--- a/reports/Profit_Prediction_Engine .pptx
+++ b/reports/Profit_Prediction_Engine .pptx
@@ -5535,7 +5535,7 @@
             </a:r>
             <a:r>
               <a:rPr lang="en-US" sz="1000" dirty="0" err="1"/>
-              <a:t>MedAE</a:t>
+              <a:t>MedMAE</a:t>
             </a:r>
             <a:r>
               <a:rPr lang="en-US" sz="1000" dirty="0"/>
@@ -5581,7 +5581,7 @@
             </a:r>
             <a:r>
               <a:rPr lang="en-US" sz="1000" dirty="0" err="1"/>
-              <a:t>MedAE</a:t>
+              <a:t>MedMAE</a:t>
             </a:r>
             <a:r>
               <a:rPr lang="en-US" sz="1000" dirty="0"/>
@@ -5627,7 +5627,7 @@
             </a:r>
             <a:r>
               <a:rPr lang="en-US" sz="1000" dirty="0" err="1"/>
-              <a:t>MedAE</a:t>
+              <a:t>MedMAE</a:t>
             </a:r>
             <a:r>
               <a:rPr lang="en-US" sz="1000" dirty="0"/>
@@ -5673,7 +5673,7 @@
             </a:r>
             <a:r>
               <a:rPr lang="en-US" sz="1000" dirty="0" err="1"/>
-              <a:t>MedAE</a:t>
+              <a:t>MedMAE</a:t>
             </a:r>
             <a:r>
               <a:rPr lang="en-US" sz="1000" dirty="0"/>
@@ -6869,12 +6869,16 @@
               <a:buNone/>
             </a:pPr>
             <a:r>
-              <a:rPr lang="en-US" sz="1400" dirty="0">
+              <a:rPr lang="en-US" sz="1400" dirty="0"/>
+              <a:t>	   </a:t>
+            </a:r>
+            <a:r>
+              <a:rPr lang="en-US" sz="1000" dirty="0">
                 <a:hlinkClick r:id="rId2"/>
               </a:rPr>
               <a:t>https://www.kaggle.com/datasets/vivek468/superstore-dataset-final/data</a:t>
             </a:r>
-            <a:endParaRPr lang="en-US" sz="1400" dirty="0"/>
+            <a:endParaRPr lang="en-US" sz="1000" dirty="0"/>
           </a:p>
           <a:p>
             <a:pPr marL="0" indent="0">
@@ -7021,7 +7025,7 @@
         </p:blipFill>
         <p:spPr>
           <a:xfrm>
-            <a:off x="563032" y="3569238"/>
+            <a:off x="563032" y="3828601"/>
             <a:ext cx="8123768" cy="518726"/>
           </a:xfrm>
           <a:prstGeom prst="rect">
@@ -7143,7 +7147,7 @@
         <p:spPr>
           <a:xfrm>
             <a:off x="457200" y="2188334"/>
-            <a:ext cx="8288867" cy="2616101"/>
+            <a:ext cx="8288867" cy="2292935"/>
           </a:xfrm>
           <a:prstGeom prst="rect">
             <a:avLst/>
@@ -7303,7 +7307,7 @@
             </a:r>
             <a:r>
               <a:rPr lang="en-US" sz="1400" dirty="0"/>
-              <a:t>’ </a:t>
+              <a:t> </a:t>
             </a:r>
             <a:r>
               <a:rPr lang="en-US" sz="1400" dirty="0" err="1"/>
@@ -7346,7 +7350,7 @@
             </a:r>
             <a:r>
               <a:rPr lang="en-US" sz="1400" dirty="0"/>
-              <a:t> : an, luna zi, delay derivate din ‘</a:t>
+              <a:t> : an, luna zi, delay: derivate din ‘</a:t>
             </a:r>
             <a:r>
               <a:rPr lang="en-US" sz="1400" dirty="0" err="1"/>
@@ -7405,15 +7409,39 @@
             </a:r>
             <a:r>
               <a:rPr lang="en-US" sz="1400" dirty="0"/>
-              <a:t>, derivate din ‘profit’, respective ‘sales’ 	</a:t>
+              <a:t>: </a:t>
             </a:r>
             <a:r>
               <a:rPr lang="en-US" sz="1400" dirty="0" err="1"/>
-              <a:t>aportate</a:t>
+              <a:t>raportul</a:t>
             </a:r>
             <a:r>
               <a:rPr lang="en-US" sz="1400" dirty="0"/>
-              <a:t> la 	‘quantity’</a:t>
+              <a:t> </a:t>
+            </a:r>
+            <a:r>
+              <a:rPr lang="en-US" sz="1400" dirty="0" err="1"/>
+              <a:t>dintre</a:t>
+            </a:r>
+            <a:r>
+              <a:rPr lang="en-US" sz="1400" dirty="0"/>
+              <a:t> ‘profit’, </a:t>
+            </a:r>
+            <a:r>
+              <a:rPr lang="en-US" sz="1400" dirty="0" err="1"/>
+              <a:t>respectiv</a:t>
+            </a:r>
+            <a:r>
+              <a:rPr lang="en-US" sz="1400" dirty="0"/>
+              <a:t> ‘sales’ </a:t>
+            </a:r>
+            <a:r>
+              <a:rPr lang="en-US" sz="1400" dirty="0" err="1"/>
+              <a:t>si</a:t>
+            </a:r>
+            <a:r>
+              <a:rPr lang="en-US" sz="1400" dirty="0"/>
+              <a:t> ‘quantity’</a:t>
             </a:r>
           </a:p>
           <a:p>

--- a/reports/Profit_Prediction_Engine .pptx
+++ b/reports/Profit_Prediction_Engine .pptx
@@ -220,7 +220,7 @@
           <a:p>
             <a:fld id="{FE75E9C6-9F5A-44CE-9DF6-C0D822160AF0}" type="datetimeFigureOut">
               <a:rPr lang="en-US" smtClean="0"/>
-              <a:t>3/19/2026</a:t>
+              <a:t>3/22/2026</a:t>
             </a:fld>
             <a:endParaRPr lang="en-US"/>
           </a:p>
@@ -750,7 +750,7 @@
           <a:p>
             <a:fld id="{5BCAD085-E8A6-8845-BD4E-CB4CCA059FC4}" type="datetimeFigureOut">
               <a:rPr lang="en-US" smtClean="0"/>
-              <a:t>3/19/2026</a:t>
+              <a:t>3/22/2026</a:t>
             </a:fld>
             <a:endParaRPr lang="en-US"/>
           </a:p>
@@ -918,7 +918,7 @@
           <a:p>
             <a:fld id="{5BCAD085-E8A6-8845-BD4E-CB4CCA059FC4}" type="datetimeFigureOut">
               <a:rPr lang="en-US" smtClean="0"/>
-              <a:t>3/19/2026</a:t>
+              <a:t>3/22/2026</a:t>
             </a:fld>
             <a:endParaRPr lang="en-US"/>
           </a:p>
@@ -1096,7 +1096,7 @@
           <a:p>
             <a:fld id="{5BCAD085-E8A6-8845-BD4E-CB4CCA059FC4}" type="datetimeFigureOut">
               <a:rPr lang="en-US" smtClean="0"/>
-              <a:t>3/19/2026</a:t>
+              <a:t>3/22/2026</a:t>
             </a:fld>
             <a:endParaRPr lang="en-US"/>
           </a:p>
@@ -1264,7 +1264,7 @@
           <a:p>
             <a:fld id="{5BCAD085-E8A6-8845-BD4E-CB4CCA059FC4}" type="datetimeFigureOut">
               <a:rPr lang="en-US" smtClean="0"/>
-              <a:t>3/19/2026</a:t>
+              <a:t>3/22/2026</a:t>
             </a:fld>
             <a:endParaRPr lang="en-US"/>
           </a:p>
@@ -1509,7 +1509,7 @@
           <a:p>
             <a:fld id="{5BCAD085-E8A6-8845-BD4E-CB4CCA059FC4}" type="datetimeFigureOut">
               <a:rPr lang="en-US" smtClean="0"/>
-              <a:t>3/19/2026</a:t>
+              <a:t>3/22/2026</a:t>
             </a:fld>
             <a:endParaRPr lang="en-US"/>
           </a:p>
@@ -1794,7 +1794,7 @@
           <a:p>
             <a:fld id="{5BCAD085-E8A6-8845-BD4E-CB4CCA059FC4}" type="datetimeFigureOut">
               <a:rPr lang="en-US" smtClean="0"/>
-              <a:t>3/19/2026</a:t>
+              <a:t>3/22/2026</a:t>
             </a:fld>
             <a:endParaRPr lang="en-US"/>
           </a:p>
@@ -2213,7 +2213,7 @@
           <a:p>
             <a:fld id="{5BCAD085-E8A6-8845-BD4E-CB4CCA059FC4}" type="datetimeFigureOut">
               <a:rPr lang="en-US" smtClean="0"/>
-              <a:t>3/19/2026</a:t>
+              <a:t>3/22/2026</a:t>
             </a:fld>
             <a:endParaRPr lang="en-US"/>
           </a:p>
@@ -2330,7 +2330,7 @@
           <a:p>
             <a:fld id="{5BCAD085-E8A6-8845-BD4E-CB4CCA059FC4}" type="datetimeFigureOut">
               <a:rPr lang="en-US" smtClean="0"/>
-              <a:t>3/19/2026</a:t>
+              <a:t>3/22/2026</a:t>
             </a:fld>
             <a:endParaRPr lang="en-US"/>
           </a:p>
@@ -2425,7 +2425,7 @@
           <a:p>
             <a:fld id="{5BCAD085-E8A6-8845-BD4E-CB4CCA059FC4}" type="datetimeFigureOut">
               <a:rPr lang="en-US" smtClean="0"/>
-              <a:t>3/19/2026</a:t>
+              <a:t>3/22/2026</a:t>
             </a:fld>
             <a:endParaRPr lang="en-US"/>
           </a:p>
@@ -2700,7 +2700,7 @@
           <a:p>
             <a:fld id="{5BCAD085-E8A6-8845-BD4E-CB4CCA059FC4}" type="datetimeFigureOut">
               <a:rPr lang="en-US" smtClean="0"/>
-              <a:t>3/19/2026</a:t>
+              <a:t>3/22/2026</a:t>
             </a:fld>
             <a:endParaRPr lang="en-US"/>
           </a:p>
@@ -2952,7 +2952,7 @@
           <a:p>
             <a:fld id="{5BCAD085-E8A6-8845-BD4E-CB4CCA059FC4}" type="datetimeFigureOut">
               <a:rPr lang="en-US" smtClean="0"/>
-              <a:t>3/19/2026</a:t>
+              <a:t>3/22/2026</a:t>
             </a:fld>
             <a:endParaRPr lang="en-US"/>
           </a:p>
@@ -3163,7 +3163,7 @@
           <a:p>
             <a:fld id="{5BCAD085-E8A6-8845-BD4E-CB4CCA059FC4}" type="datetimeFigureOut">
               <a:rPr lang="en-US" smtClean="0"/>
-              <a:t>3/19/2026</a:t>
+              <a:t>3/22/2026</a:t>
             </a:fld>
             <a:endParaRPr lang="en-US"/>
           </a:p>
@@ -3538,61 +3538,12 @@
           <a:chExt cx="0" cy="0"/>
         </a:xfrm>
       </p:grpSpPr>
-      <p:sp>
-        <p:nvSpPr>
-          <p:cNvPr id="9" name="Title 1"/>
-          <p:cNvSpPr txBox="1">
-            <a:spLocks/>
-          </p:cNvSpPr>
-          <p:nvPr/>
-        </p:nvSpPr>
-        <p:spPr>
-          <a:xfrm>
-            <a:off x="1161521" y="1744910"/>
-            <a:ext cx="7772400" cy="1464735"/>
-          </a:xfrm>
-          <a:prstGeom prst="rect">
-            <a:avLst/>
-          </a:prstGeom>
-        </p:spPr>
-        <p:txBody>
-          <a:bodyPr vert="horz" lIns="91440" tIns="45720" rIns="91440" bIns="45720" rtlCol="0" anchor="ctr">
-            <a:normAutofit fontScale="97500"/>
-          </a:bodyPr>
-          <a:lstStyle>
-            <a:lvl1pPr algn="ctr" defTabSz="457200" rtl="0" eaLnBrk="1" latinLnBrk="0" hangingPunct="1">
-              <a:spcBef>
-                <a:spcPct val="0"/>
-              </a:spcBef>
-              <a:buNone/>
-              <a:defRPr sz="4400" kern="1200">
-                <a:solidFill>
-                  <a:schemeClr val="tx1"/>
-                </a:solidFill>
-                <a:latin typeface="+mj-lt"/>
-                <a:ea typeface="+mj-ea"/>
-                <a:cs typeface="+mj-cs"/>
-              </a:defRPr>
-            </a:lvl1pPr>
-          </a:lstStyle>
-          <a:p>
-            <a:r>
-              <a:rPr lang="en-US" sz="5400" b="1" dirty="0">
-                <a:solidFill>
-                  <a:srgbClr val="002060"/>
-                </a:solidFill>
-              </a:rPr>
-              <a:t>Profit Prediction Engine</a:t>
-            </a:r>
-          </a:p>
-        </p:txBody>
-      </p:sp>
       <p:grpSp>
         <p:nvGrpSpPr>
-          <p:cNvPr id="15" name="Group 14">
+          <p:cNvPr id="2" name="Group 1">
             <a:extLst>
               <a:ext uri="{FF2B5EF4-FFF2-40B4-BE49-F238E27FC236}">
-                <a16:creationId xmlns:a16="http://schemas.microsoft.com/office/drawing/2014/main" id="{F40348ED-4522-EDFA-BECE-A9BA96C04210}"/>
+                <a16:creationId xmlns:a16="http://schemas.microsoft.com/office/drawing/2014/main" id="{602D84D5-B092-FE40-2085-60A39E7D8D79}"/>
               </a:ext>
             </a:extLst>
           </p:cNvPr>
@@ -3601,18 +3552,18 @@
         </p:nvGrpSpPr>
         <p:grpSpPr>
           <a:xfrm>
-            <a:off x="0" y="2839160"/>
-            <a:ext cx="9144000" cy="2109570"/>
-            <a:chOff x="0" y="2929467"/>
-            <a:chExt cx="9144000" cy="2662275"/>
+            <a:off x="0" y="1827928"/>
+            <a:ext cx="9144000" cy="3149599"/>
+            <a:chOff x="0" y="0"/>
+            <a:chExt cx="9144000" cy="582169"/>
           </a:xfrm>
         </p:grpSpPr>
         <p:sp>
           <p:nvSpPr>
-            <p:cNvPr id="4" name="Rectangle 3">
+            <p:cNvPr id="3" name="Shape 0">
               <a:extLst>
                 <a:ext uri="{FF2B5EF4-FFF2-40B4-BE49-F238E27FC236}">
-                  <a16:creationId xmlns:a16="http://schemas.microsoft.com/office/drawing/2014/main" id="{A142CEAB-F0C9-84EE-1713-F4AA18E4C0A8}"/>
+                  <a16:creationId xmlns:a16="http://schemas.microsoft.com/office/drawing/2014/main" id="{75B2E29D-05ED-7E04-079D-6C36ACC9BD31}"/>
                 </a:ext>
               </a:extLst>
             </p:cNvPr>
@@ -3621,39 +3572,39 @@
           </p:nvSpPr>
           <p:spPr>
             <a:xfrm>
-              <a:off x="0" y="2929467"/>
-              <a:ext cx="9144000" cy="2662274"/>
+              <a:off x="0" y="0"/>
+              <a:ext cx="9144000" cy="582169"/>
             </a:xfrm>
             <a:prstGeom prst="rect">
               <a:avLst/>
             </a:prstGeom>
+            <a:solidFill>
+              <a:srgbClr val="1E2761"/>
+            </a:solidFill>
+            <a:ln w="12700">
+              <a:solidFill>
+                <a:srgbClr val="1E2761"/>
+              </a:solidFill>
+              <a:prstDash val="solid"/>
+            </a:ln>
           </p:spPr>
-          <p:style>
-            <a:lnRef idx="1">
-              <a:schemeClr val="accent1"/>
-            </a:lnRef>
-            <a:fillRef idx="3">
-              <a:schemeClr val="accent1"/>
-            </a:fillRef>
-            <a:effectRef idx="2">
-              <a:schemeClr val="accent1"/>
-            </a:effectRef>
-            <a:fontRef idx="minor">
-              <a:schemeClr val="lt1"/>
-            </a:fontRef>
-          </p:style>
           <p:txBody>
-            <a:bodyPr rtlCol="0" anchor="ctr"/>
+            <a:bodyPr/>
             <a:lstStyle/>
             <a:p>
-              <a:pPr algn="ctr"/>
-              <a:endParaRPr lang="en-US" dirty="0"/>
+              <a:endParaRPr lang="en-US"/>
             </a:p>
           </p:txBody>
         </p:sp>
         <p:sp>
           <p:nvSpPr>
-            <p:cNvPr id="10" name="Subtitle 2"/>
+            <p:cNvPr id="5" name="Title 1">
+              <a:extLst>
+                <a:ext uri="{FF2B5EF4-FFF2-40B4-BE49-F238E27FC236}">
+                  <a16:creationId xmlns:a16="http://schemas.microsoft.com/office/drawing/2014/main" id="{B091D4EB-042E-410A-E2FA-55797D368761}"/>
+                </a:ext>
+              </a:extLst>
+            </p:cNvPr>
             <p:cNvSpPr txBox="1">
               <a:spLocks/>
             </p:cNvSpPr>
@@ -3661,502 +3612,554 @@
           </p:nvSpPr>
           <p:spPr>
             <a:xfrm>
-              <a:off x="4057121" y="4666367"/>
-              <a:ext cx="3124200" cy="612775"/>
+              <a:off x="2286000" y="76200"/>
+              <a:ext cx="6764865" cy="209516"/>
             </a:xfrm>
             <a:prstGeom prst="rect">
               <a:avLst/>
             </a:prstGeom>
           </p:spPr>
           <p:txBody>
-            <a:bodyPr vert="horz" lIns="91440" tIns="45720" rIns="91440" bIns="45720" rtlCol="0">
-              <a:normAutofit/>
+            <a:bodyPr vert="horz" lIns="91440" tIns="45720" rIns="91440" bIns="45720" rtlCol="0" anchor="ctr">
+              <a:noAutofit/>
             </a:bodyPr>
             <a:lstStyle>
-              <a:lvl1pPr marL="0" indent="0" algn="ctr" defTabSz="457200" rtl="0" eaLnBrk="1" latinLnBrk="0" hangingPunct="1">
+              <a:lvl1pPr algn="ctr" defTabSz="457200" rtl="0" eaLnBrk="1" latinLnBrk="0" hangingPunct="1">
                 <a:spcBef>
-                  <a:spcPct val="20000"/>
+                  <a:spcPct val="0"/>
                 </a:spcBef>
-                <a:buFont typeface="Arial"/>
                 <a:buNone/>
-                <a:defRPr sz="3200" kern="1200">
+                <a:defRPr sz="4400" kern="1200">
                   <a:solidFill>
-                    <a:schemeClr val="tx1">
-                      <a:tint val="75000"/>
-                    </a:schemeClr>
+                    <a:schemeClr val="tx1"/>
                   </a:solidFill>
-                  <a:latin typeface="+mn-lt"/>
-                  <a:ea typeface="+mn-ea"/>
-                  <a:cs typeface="+mn-cs"/>
+                  <a:latin typeface="+mj-lt"/>
+                  <a:ea typeface="+mj-ea"/>
+                  <a:cs typeface="+mj-cs"/>
                 </a:defRPr>
               </a:lvl1pPr>
-              <a:lvl2pPr marL="457200" indent="0" algn="ctr" defTabSz="457200" rtl="0" eaLnBrk="1" latinLnBrk="0" hangingPunct="1">
-                <a:spcBef>
-                  <a:spcPct val="20000"/>
-                </a:spcBef>
-                <a:buFont typeface="Arial"/>
-                <a:buNone/>
-                <a:defRPr sz="2800" kern="1200">
-                  <a:solidFill>
-                    <a:schemeClr val="tx1">
-                      <a:tint val="75000"/>
-                    </a:schemeClr>
-                  </a:solidFill>
-                  <a:latin typeface="+mn-lt"/>
-                  <a:ea typeface="+mn-ea"/>
-                  <a:cs typeface="+mn-cs"/>
-                </a:defRPr>
-              </a:lvl2pPr>
-              <a:lvl3pPr marL="914400" indent="0" algn="ctr" defTabSz="457200" rtl="0" eaLnBrk="1" latinLnBrk="0" hangingPunct="1">
-                <a:spcBef>
-                  <a:spcPct val="20000"/>
-                </a:spcBef>
-                <a:buFont typeface="Arial"/>
-                <a:buNone/>
-                <a:defRPr sz="2400" kern="1200">
-                  <a:solidFill>
-                    <a:schemeClr val="tx1">
-                      <a:tint val="75000"/>
-                    </a:schemeClr>
-                  </a:solidFill>
-                  <a:latin typeface="+mn-lt"/>
-                  <a:ea typeface="+mn-ea"/>
-                  <a:cs typeface="+mn-cs"/>
-                </a:defRPr>
-              </a:lvl3pPr>
-              <a:lvl4pPr marL="1371600" indent="0" algn="ctr" defTabSz="457200" rtl="0" eaLnBrk="1" latinLnBrk="0" hangingPunct="1">
-                <a:spcBef>
-                  <a:spcPct val="20000"/>
-                </a:spcBef>
-                <a:buFont typeface="Arial"/>
-                <a:buNone/>
-                <a:defRPr sz="2000" kern="1200">
-                  <a:solidFill>
-                    <a:schemeClr val="tx1">
-                      <a:tint val="75000"/>
-                    </a:schemeClr>
-                  </a:solidFill>
-                  <a:latin typeface="+mn-lt"/>
-                  <a:ea typeface="+mn-ea"/>
-                  <a:cs typeface="+mn-cs"/>
-                </a:defRPr>
-              </a:lvl4pPr>
-              <a:lvl5pPr marL="1828800" indent="0" algn="ctr" defTabSz="457200" rtl="0" eaLnBrk="1" latinLnBrk="0" hangingPunct="1">
-                <a:spcBef>
-                  <a:spcPct val="20000"/>
-                </a:spcBef>
-                <a:buFont typeface="Arial"/>
-                <a:buNone/>
-                <a:defRPr sz="2000" kern="1200">
-                  <a:solidFill>
-                    <a:schemeClr val="tx1">
-                      <a:tint val="75000"/>
-                    </a:schemeClr>
-                  </a:solidFill>
-                  <a:latin typeface="+mn-lt"/>
-                  <a:ea typeface="+mn-ea"/>
-                  <a:cs typeface="+mn-cs"/>
-                </a:defRPr>
-              </a:lvl5pPr>
-              <a:lvl6pPr marL="2286000" indent="0" algn="ctr" defTabSz="457200" rtl="0" eaLnBrk="1" latinLnBrk="0" hangingPunct="1">
-                <a:spcBef>
-                  <a:spcPct val="20000"/>
-                </a:spcBef>
-                <a:buFont typeface="Arial"/>
-                <a:buNone/>
-                <a:defRPr sz="2000" kern="1200">
-                  <a:solidFill>
-                    <a:schemeClr val="tx1">
-                      <a:tint val="75000"/>
-                    </a:schemeClr>
-                  </a:solidFill>
-                  <a:latin typeface="+mn-lt"/>
-                  <a:ea typeface="+mn-ea"/>
-                  <a:cs typeface="+mn-cs"/>
-                </a:defRPr>
-              </a:lvl6pPr>
-              <a:lvl7pPr marL="2743200" indent="0" algn="ctr" defTabSz="457200" rtl="0" eaLnBrk="1" latinLnBrk="0" hangingPunct="1">
-                <a:spcBef>
-                  <a:spcPct val="20000"/>
-                </a:spcBef>
-                <a:buFont typeface="Arial"/>
-                <a:buNone/>
-                <a:defRPr sz="2000" kern="1200">
-                  <a:solidFill>
-                    <a:schemeClr val="tx1">
-                      <a:tint val="75000"/>
-                    </a:schemeClr>
-                  </a:solidFill>
-                  <a:latin typeface="+mn-lt"/>
-                  <a:ea typeface="+mn-ea"/>
-                  <a:cs typeface="+mn-cs"/>
-                </a:defRPr>
-              </a:lvl7pPr>
-              <a:lvl8pPr marL="3200400" indent="0" algn="ctr" defTabSz="457200" rtl="0" eaLnBrk="1" latinLnBrk="0" hangingPunct="1">
-                <a:spcBef>
-                  <a:spcPct val="20000"/>
-                </a:spcBef>
-                <a:buFont typeface="Arial"/>
-                <a:buNone/>
-                <a:defRPr sz="2000" kern="1200">
-                  <a:solidFill>
-                    <a:schemeClr val="tx1">
-                      <a:tint val="75000"/>
-                    </a:schemeClr>
-                  </a:solidFill>
-                  <a:latin typeface="+mn-lt"/>
-                  <a:ea typeface="+mn-ea"/>
-                  <a:cs typeface="+mn-cs"/>
-                </a:defRPr>
-              </a:lvl8pPr>
-              <a:lvl9pPr marL="3657600" indent="0" algn="ctr" defTabSz="457200" rtl="0" eaLnBrk="1" latinLnBrk="0" hangingPunct="1">
-                <a:spcBef>
-                  <a:spcPct val="20000"/>
-                </a:spcBef>
-                <a:buFont typeface="Arial"/>
-                <a:buNone/>
-                <a:defRPr sz="2000" kern="1200">
-                  <a:solidFill>
-                    <a:schemeClr val="tx1">
-                      <a:tint val="75000"/>
-                    </a:schemeClr>
-                  </a:solidFill>
-                  <a:latin typeface="+mn-lt"/>
-                  <a:ea typeface="+mn-ea"/>
-                  <a:cs typeface="+mn-cs"/>
-                </a:defRPr>
-              </a:lvl9pPr>
             </a:lstStyle>
             <a:p>
               <a:r>
-                <a:rPr lang="en-US" sz="1100" b="1" dirty="0" err="1">
+                <a:rPr lang="en-US" sz="4000" b="1" dirty="0">
                   <a:solidFill>
-                    <a:srgbClr val="FFFF00"/>
+                    <a:schemeClr val="bg1"/>
                   </a:solidFill>
                 </a:rPr>
-                <a:t>Utilizaraa</a:t>
+                <a:t>Profit Prediction Engine</a:t>
               </a:r>
-              <a:r>
-                <a:rPr lang="en-US" sz="1100" b="1" dirty="0">
-                  <a:solidFill>
-                    <a:srgbClr val="FFFF00"/>
-                  </a:solidFill>
-                </a:rPr>
-                <a:t> Machine Learning (</a:t>
-              </a:r>
-              <a:r>
-                <a:rPr lang="en-US" sz="1100" b="1" dirty="0" err="1">
-                  <a:solidFill>
-                    <a:srgbClr val="FFFF00"/>
-                  </a:solidFill>
-                </a:rPr>
-                <a:t>XGBoost</a:t>
-              </a:r>
-              <a:r>
-                <a:rPr lang="en-US" sz="1100" b="1" dirty="0">
-                  <a:solidFill>
-                    <a:srgbClr val="FFFF00"/>
-                  </a:solidFill>
-                </a:rPr>
-                <a:t> &amp; MLP) </a:t>
-              </a:r>
-            </a:p>
-            <a:p>
-              <a:r>
-                <a:rPr lang="en-US" sz="1100" b="1" dirty="0" err="1">
-                  <a:solidFill>
-                    <a:srgbClr val="FFFF00"/>
-                  </a:solidFill>
-                </a:rPr>
-                <a:t>pentru</a:t>
-              </a:r>
-              <a:r>
-                <a:rPr lang="en-US" sz="1100" b="1" dirty="0">
-                  <a:solidFill>
-                    <a:srgbClr val="FFFF00"/>
-                  </a:solidFill>
-                </a:rPr>
-                <a:t> </a:t>
-              </a:r>
-              <a:r>
-                <a:rPr lang="en-US" sz="1100" b="1" dirty="0" err="1">
-                  <a:solidFill>
-                    <a:srgbClr val="FFFF00"/>
-                  </a:solidFill>
-                </a:rPr>
-                <a:t>modelarea</a:t>
-              </a:r>
-              <a:r>
-                <a:rPr lang="en-US" sz="1100" b="1" dirty="0">
-                  <a:solidFill>
-                    <a:srgbClr val="FFFF00"/>
-                  </a:solidFill>
-                </a:rPr>
-                <a:t> </a:t>
-              </a:r>
-              <a:r>
-                <a:rPr lang="en-US" sz="1100" b="1" dirty="0" err="1">
-                  <a:solidFill>
-                    <a:srgbClr val="FFFF00"/>
-                  </a:solidFill>
-                </a:rPr>
-                <a:t>profitului</a:t>
-              </a:r>
-              <a:r>
-                <a:rPr lang="en-US" sz="1100" b="1" dirty="0">
-                  <a:solidFill>
-                    <a:srgbClr val="FFFF00"/>
-                  </a:solidFill>
-                </a:rPr>
-                <a:t> </a:t>
-              </a:r>
-              <a:r>
-                <a:rPr lang="en-US" sz="1100" b="1" dirty="0" err="1">
-                  <a:solidFill>
-                    <a:srgbClr val="FFFF00"/>
-                  </a:solidFill>
-                </a:rPr>
-                <a:t>previzionat</a:t>
-              </a:r>
-              <a:endParaRPr lang="en-US" sz="1100" b="1" dirty="0">
-                <a:solidFill>
-                  <a:srgbClr val="FFFF00"/>
-                </a:solidFill>
-              </a:endParaRPr>
             </a:p>
           </p:txBody>
         </p:sp>
-        <p:sp>
-          <p:nvSpPr>
-            <p:cNvPr id="12" name="TextBox 11">
-              <a:extLst>
-                <a:ext uri="{FF2B5EF4-FFF2-40B4-BE49-F238E27FC236}">
-                  <a16:creationId xmlns:a16="http://schemas.microsoft.com/office/drawing/2014/main" id="{627EE5E3-8E0E-1048-07C5-70ADF4DCDC1E}"/>
-                </a:ext>
-              </a:extLst>
-            </p:cNvPr>
-            <p:cNvSpPr txBox="1"/>
-            <p:nvPr/>
-          </p:nvSpPr>
-          <p:spPr>
-            <a:xfrm>
-              <a:off x="3437466" y="2969968"/>
-              <a:ext cx="4529667" cy="1200329"/>
-            </a:xfrm>
-            <a:prstGeom prst="rect">
-              <a:avLst/>
-            </a:prstGeom>
-            <a:noFill/>
-          </p:spPr>
-          <p:txBody>
-            <a:bodyPr wrap="square">
-              <a:spAutoFit/>
-            </a:bodyPr>
-            <a:lstStyle/>
-            <a:p>
-              <a:pPr algn="ctr"/>
-              <a:r>
-                <a:rPr lang="en-US" sz="2400" dirty="0" err="1">
-                  <a:solidFill>
-                    <a:srgbClr val="002060"/>
-                  </a:solidFill>
-                </a:rPr>
-                <a:t>Putem</a:t>
-              </a:r>
-              <a:r>
-                <a:rPr lang="en-US" sz="2400" dirty="0">
-                  <a:solidFill>
-                    <a:srgbClr val="002060"/>
-                  </a:solidFill>
-                </a:rPr>
-                <a:t> </a:t>
-              </a:r>
-              <a:r>
-                <a:rPr lang="en-US" sz="2400" dirty="0" err="1">
-                  <a:solidFill>
-                    <a:srgbClr val="002060"/>
-                  </a:solidFill>
-                </a:rPr>
-                <a:t>prezice</a:t>
-              </a:r>
-              <a:r>
-                <a:rPr lang="en-US" sz="2400" dirty="0">
-                  <a:solidFill>
-                    <a:srgbClr val="002060"/>
-                  </a:solidFill>
-                </a:rPr>
-                <a:t> </a:t>
-              </a:r>
-              <a:r>
-                <a:rPr lang="en-US" sz="2400" dirty="0" err="1">
-                  <a:solidFill>
-                    <a:srgbClr val="002060"/>
-                  </a:solidFill>
-                </a:rPr>
-                <a:t>profitul</a:t>
-              </a:r>
-              <a:r>
-                <a:rPr lang="en-US" sz="2400" dirty="0">
-                  <a:solidFill>
-                    <a:srgbClr val="002060"/>
-                  </a:solidFill>
-                </a:rPr>
-                <a:t> </a:t>
-              </a:r>
-              <a:r>
-                <a:rPr lang="en-US" sz="2400" dirty="0" err="1">
-                  <a:solidFill>
-                    <a:srgbClr val="002060"/>
-                  </a:solidFill>
-                </a:rPr>
-                <a:t>unei</a:t>
-              </a:r>
-              <a:r>
-                <a:rPr lang="en-US" sz="2400" dirty="0">
-                  <a:solidFill>
-                    <a:srgbClr val="002060"/>
-                  </a:solidFill>
-                </a:rPr>
-                <a:t> </a:t>
-              </a:r>
-              <a:r>
-                <a:rPr lang="en-US" sz="2400" dirty="0" err="1">
-                  <a:solidFill>
-                    <a:srgbClr val="002060"/>
-                  </a:solidFill>
-                </a:rPr>
-                <a:t>comenzi</a:t>
-              </a:r>
-              <a:r>
-                <a:rPr lang="en-US" sz="2400" dirty="0">
-                  <a:solidFill>
-                    <a:srgbClr val="002060"/>
-                  </a:solidFill>
-                </a:rPr>
-                <a:t> de </a:t>
-              </a:r>
-              <a:r>
-                <a:rPr lang="en-US" sz="2400" dirty="0" err="1">
-                  <a:solidFill>
-                    <a:srgbClr val="002060"/>
-                  </a:solidFill>
-                </a:rPr>
-                <a:t>produse</a:t>
-              </a:r>
-              <a:r>
-                <a:rPr lang="en-US" sz="2400" dirty="0">
-                  <a:solidFill>
-                    <a:srgbClr val="002060"/>
-                  </a:solidFill>
-                </a:rPr>
-                <a:t> </a:t>
-              </a:r>
-              <a:br>
-                <a:rPr lang="en-US" sz="2400" dirty="0">
-                  <a:solidFill>
-                    <a:srgbClr val="002060"/>
-                  </a:solidFill>
-                </a:rPr>
-              </a:br>
-              <a:r>
-                <a:rPr lang="en-US" sz="2400" dirty="0" err="1">
-                  <a:solidFill>
-                    <a:srgbClr val="002060"/>
-                  </a:solidFill>
-                </a:rPr>
-                <a:t>inainte</a:t>
-              </a:r>
-              <a:r>
-                <a:rPr lang="en-US" sz="2400" dirty="0">
-                  <a:solidFill>
-                    <a:srgbClr val="002060"/>
-                  </a:solidFill>
-                </a:rPr>
-                <a:t> ca </a:t>
-              </a:r>
-              <a:r>
-                <a:rPr lang="en-US" sz="2400" dirty="0" err="1">
-                  <a:solidFill>
-                    <a:srgbClr val="002060"/>
-                  </a:solidFill>
-                </a:rPr>
-                <a:t>ea</a:t>
-              </a:r>
-              <a:r>
-                <a:rPr lang="en-US" sz="2400" dirty="0">
-                  <a:solidFill>
-                    <a:srgbClr val="002060"/>
-                  </a:solidFill>
-                </a:rPr>
-                <a:t> </a:t>
-              </a:r>
-              <a:r>
-                <a:rPr lang="en-US" sz="2400" dirty="0" err="1">
-                  <a:solidFill>
-                    <a:srgbClr val="002060"/>
-                  </a:solidFill>
-                </a:rPr>
-                <a:t>sa</a:t>
-              </a:r>
-              <a:r>
-                <a:rPr lang="en-US" sz="2400" dirty="0">
-                  <a:solidFill>
-                    <a:srgbClr val="002060"/>
-                  </a:solidFill>
-                </a:rPr>
-                <a:t> </a:t>
-              </a:r>
-              <a:r>
-                <a:rPr lang="en-US" sz="2400" dirty="0" err="1">
-                  <a:solidFill>
-                    <a:srgbClr val="002060"/>
-                  </a:solidFill>
-                </a:rPr>
-                <a:t>aiba</a:t>
-              </a:r>
-              <a:r>
-                <a:rPr lang="en-US" sz="2400" dirty="0">
-                  <a:solidFill>
-                    <a:srgbClr val="002060"/>
-                  </a:solidFill>
-                </a:rPr>
-                <a:t> loc?</a:t>
-              </a:r>
-              <a:endParaRPr lang="en-US" sz="2400" dirty="0"/>
-            </a:p>
-          </p:txBody>
-        </p:sp>
-        <p:pic>
-          <p:nvPicPr>
-            <p:cNvPr id="14" name="Picture 13">
-              <a:extLst>
-                <a:ext uri="{FF2B5EF4-FFF2-40B4-BE49-F238E27FC236}">
-                  <a16:creationId xmlns:a16="http://schemas.microsoft.com/office/drawing/2014/main" id="{EA764ABC-6701-B702-DE51-75DC48490368}"/>
-                </a:ext>
-              </a:extLst>
-            </p:cNvPr>
-            <p:cNvPicPr>
-              <a:picLocks noChangeAspect="1"/>
-            </p:cNvPicPr>
-            <p:nvPr/>
-          </p:nvPicPr>
-          <p:blipFill>
-            <a:blip r:embed="rId2"/>
-            <a:stretch>
-              <a:fillRect/>
-            </a:stretch>
-          </p:blipFill>
-          <p:spPr>
-            <a:xfrm>
-              <a:off x="0" y="2929467"/>
-              <a:ext cx="3369733" cy="2662275"/>
-            </a:xfrm>
-            <a:prstGeom prst="rect">
-              <a:avLst/>
-            </a:prstGeom>
-          </p:spPr>
-        </p:pic>
       </p:grpSp>
+      <p:sp>
+        <p:nvSpPr>
+          <p:cNvPr id="6" name="Subtitle 2"/>
+          <p:cNvSpPr txBox="1">
+            <a:spLocks/>
+          </p:cNvSpPr>
+          <p:nvPr/>
+        </p:nvSpPr>
+        <p:spPr>
+          <a:xfrm>
+            <a:off x="5088467" y="4086557"/>
+            <a:ext cx="3124200" cy="369157"/>
+          </a:xfrm>
+          <a:prstGeom prst="rect">
+            <a:avLst/>
+          </a:prstGeom>
+        </p:spPr>
+        <p:txBody>
+          <a:bodyPr vert="horz" lIns="91440" tIns="45720" rIns="91440" bIns="45720" rtlCol="0">
+            <a:normAutofit fontScale="92500" lnSpcReduction="20000"/>
+          </a:bodyPr>
+          <a:lstStyle>
+            <a:lvl1pPr marL="0" indent="0" algn="ctr" defTabSz="457200" rtl="0" eaLnBrk="1" latinLnBrk="0" hangingPunct="1">
+              <a:spcBef>
+                <a:spcPct val="20000"/>
+              </a:spcBef>
+              <a:buFont typeface="Arial"/>
+              <a:buNone/>
+              <a:defRPr sz="3200" kern="1200">
+                <a:solidFill>
+                  <a:schemeClr val="tx1">
+                    <a:tint val="75000"/>
+                  </a:schemeClr>
+                </a:solidFill>
+                <a:latin typeface="+mn-lt"/>
+                <a:ea typeface="+mn-ea"/>
+                <a:cs typeface="+mn-cs"/>
+              </a:defRPr>
+            </a:lvl1pPr>
+            <a:lvl2pPr marL="457200" indent="0" algn="ctr" defTabSz="457200" rtl="0" eaLnBrk="1" latinLnBrk="0" hangingPunct="1">
+              <a:spcBef>
+                <a:spcPct val="20000"/>
+              </a:spcBef>
+              <a:buFont typeface="Arial"/>
+              <a:buNone/>
+              <a:defRPr sz="2800" kern="1200">
+                <a:solidFill>
+                  <a:schemeClr val="tx1">
+                    <a:tint val="75000"/>
+                  </a:schemeClr>
+                </a:solidFill>
+                <a:latin typeface="+mn-lt"/>
+                <a:ea typeface="+mn-ea"/>
+                <a:cs typeface="+mn-cs"/>
+              </a:defRPr>
+            </a:lvl2pPr>
+            <a:lvl3pPr marL="914400" indent="0" algn="ctr" defTabSz="457200" rtl="0" eaLnBrk="1" latinLnBrk="0" hangingPunct="1">
+              <a:spcBef>
+                <a:spcPct val="20000"/>
+              </a:spcBef>
+              <a:buFont typeface="Arial"/>
+              <a:buNone/>
+              <a:defRPr sz="2400" kern="1200">
+                <a:solidFill>
+                  <a:schemeClr val="tx1">
+                    <a:tint val="75000"/>
+                  </a:schemeClr>
+                </a:solidFill>
+                <a:latin typeface="+mn-lt"/>
+                <a:ea typeface="+mn-ea"/>
+                <a:cs typeface="+mn-cs"/>
+              </a:defRPr>
+            </a:lvl3pPr>
+            <a:lvl4pPr marL="1371600" indent="0" algn="ctr" defTabSz="457200" rtl="0" eaLnBrk="1" latinLnBrk="0" hangingPunct="1">
+              <a:spcBef>
+                <a:spcPct val="20000"/>
+              </a:spcBef>
+              <a:buFont typeface="Arial"/>
+              <a:buNone/>
+              <a:defRPr sz="2000" kern="1200">
+                <a:solidFill>
+                  <a:schemeClr val="tx1">
+                    <a:tint val="75000"/>
+                  </a:schemeClr>
+                </a:solidFill>
+                <a:latin typeface="+mn-lt"/>
+                <a:ea typeface="+mn-ea"/>
+                <a:cs typeface="+mn-cs"/>
+              </a:defRPr>
+            </a:lvl4pPr>
+            <a:lvl5pPr marL="1828800" indent="0" algn="ctr" defTabSz="457200" rtl="0" eaLnBrk="1" latinLnBrk="0" hangingPunct="1">
+              <a:spcBef>
+                <a:spcPct val="20000"/>
+              </a:spcBef>
+              <a:buFont typeface="Arial"/>
+              <a:buNone/>
+              <a:defRPr sz="2000" kern="1200">
+                <a:solidFill>
+                  <a:schemeClr val="tx1">
+                    <a:tint val="75000"/>
+                  </a:schemeClr>
+                </a:solidFill>
+                <a:latin typeface="+mn-lt"/>
+                <a:ea typeface="+mn-ea"/>
+                <a:cs typeface="+mn-cs"/>
+              </a:defRPr>
+            </a:lvl5pPr>
+            <a:lvl6pPr marL="2286000" indent="0" algn="ctr" defTabSz="457200" rtl="0" eaLnBrk="1" latinLnBrk="0" hangingPunct="1">
+              <a:spcBef>
+                <a:spcPct val="20000"/>
+              </a:spcBef>
+              <a:buFont typeface="Arial"/>
+              <a:buNone/>
+              <a:defRPr sz="2000" kern="1200">
+                <a:solidFill>
+                  <a:schemeClr val="tx1">
+                    <a:tint val="75000"/>
+                  </a:schemeClr>
+                </a:solidFill>
+                <a:latin typeface="+mn-lt"/>
+                <a:ea typeface="+mn-ea"/>
+                <a:cs typeface="+mn-cs"/>
+              </a:defRPr>
+            </a:lvl6pPr>
+            <a:lvl7pPr marL="2743200" indent="0" algn="ctr" defTabSz="457200" rtl="0" eaLnBrk="1" latinLnBrk="0" hangingPunct="1">
+              <a:spcBef>
+                <a:spcPct val="20000"/>
+              </a:spcBef>
+              <a:buFont typeface="Arial"/>
+              <a:buNone/>
+              <a:defRPr sz="2000" kern="1200">
+                <a:solidFill>
+                  <a:schemeClr val="tx1">
+                    <a:tint val="75000"/>
+                  </a:schemeClr>
+                </a:solidFill>
+                <a:latin typeface="+mn-lt"/>
+                <a:ea typeface="+mn-ea"/>
+                <a:cs typeface="+mn-cs"/>
+              </a:defRPr>
+            </a:lvl7pPr>
+            <a:lvl8pPr marL="3200400" indent="0" algn="ctr" defTabSz="457200" rtl="0" eaLnBrk="1" latinLnBrk="0" hangingPunct="1">
+              <a:spcBef>
+                <a:spcPct val="20000"/>
+              </a:spcBef>
+              <a:buFont typeface="Arial"/>
+              <a:buNone/>
+              <a:defRPr sz="2000" kern="1200">
+                <a:solidFill>
+                  <a:schemeClr val="tx1">
+                    <a:tint val="75000"/>
+                  </a:schemeClr>
+                </a:solidFill>
+                <a:latin typeface="+mn-lt"/>
+                <a:ea typeface="+mn-ea"/>
+                <a:cs typeface="+mn-cs"/>
+              </a:defRPr>
+            </a:lvl8pPr>
+            <a:lvl9pPr marL="3657600" indent="0" algn="ctr" defTabSz="457200" rtl="0" eaLnBrk="1" latinLnBrk="0" hangingPunct="1">
+              <a:spcBef>
+                <a:spcPct val="20000"/>
+              </a:spcBef>
+              <a:buFont typeface="Arial"/>
+              <a:buNone/>
+              <a:defRPr sz="2000" kern="1200">
+                <a:solidFill>
+                  <a:schemeClr val="tx1">
+                    <a:tint val="75000"/>
+                  </a:schemeClr>
+                </a:solidFill>
+                <a:latin typeface="+mn-lt"/>
+                <a:ea typeface="+mn-ea"/>
+                <a:cs typeface="+mn-cs"/>
+              </a:defRPr>
+            </a:lvl9pPr>
+          </a:lstStyle>
+          <a:p>
+            <a:r>
+              <a:rPr lang="en-US" sz="1100" b="1" dirty="0" err="1">
+                <a:solidFill>
+                  <a:srgbClr val="FFFF00"/>
+                </a:solidFill>
+              </a:rPr>
+              <a:t>Utilizaraa</a:t>
+            </a:r>
+            <a:r>
+              <a:rPr lang="en-US" sz="1100" b="1" dirty="0">
+                <a:solidFill>
+                  <a:srgbClr val="FFFF00"/>
+                </a:solidFill>
+              </a:rPr>
+              <a:t> Machine Learning (</a:t>
+            </a:r>
+            <a:r>
+              <a:rPr lang="en-US" sz="1100" b="1" dirty="0" err="1">
+                <a:solidFill>
+                  <a:srgbClr val="FFFF00"/>
+                </a:solidFill>
+              </a:rPr>
+              <a:t>XGBoost</a:t>
+            </a:r>
+            <a:r>
+              <a:rPr lang="en-US" sz="1100" b="1" dirty="0">
+                <a:solidFill>
+                  <a:srgbClr val="FFFF00"/>
+                </a:solidFill>
+              </a:rPr>
+              <a:t> &amp; MLP) </a:t>
+            </a:r>
+          </a:p>
+          <a:p>
+            <a:r>
+              <a:rPr lang="en-US" sz="1100" b="1" dirty="0" err="1">
+                <a:solidFill>
+                  <a:srgbClr val="FFFF00"/>
+                </a:solidFill>
+              </a:rPr>
+              <a:t>pentru</a:t>
+            </a:r>
+            <a:r>
+              <a:rPr lang="en-US" sz="1100" b="1" dirty="0">
+                <a:solidFill>
+                  <a:srgbClr val="FFFF00"/>
+                </a:solidFill>
+              </a:rPr>
+              <a:t> </a:t>
+            </a:r>
+            <a:r>
+              <a:rPr lang="en-US" sz="1100" b="1" dirty="0" err="1">
+                <a:solidFill>
+                  <a:srgbClr val="FFFF00"/>
+                </a:solidFill>
+              </a:rPr>
+              <a:t>modelarea</a:t>
+            </a:r>
+            <a:r>
+              <a:rPr lang="en-US" sz="1100" b="1" dirty="0">
+                <a:solidFill>
+                  <a:srgbClr val="FFFF00"/>
+                </a:solidFill>
+              </a:rPr>
+              <a:t> </a:t>
+            </a:r>
+            <a:r>
+              <a:rPr lang="en-US" sz="1100" b="1" dirty="0" err="1">
+                <a:solidFill>
+                  <a:srgbClr val="FFFF00"/>
+                </a:solidFill>
+              </a:rPr>
+              <a:t>profitului</a:t>
+            </a:r>
+            <a:r>
+              <a:rPr lang="en-US" sz="1100" b="1" dirty="0">
+                <a:solidFill>
+                  <a:srgbClr val="FFFF00"/>
+                </a:solidFill>
+              </a:rPr>
+              <a:t> </a:t>
+            </a:r>
+            <a:r>
+              <a:rPr lang="en-US" sz="1100" b="1" dirty="0" err="1">
+                <a:solidFill>
+                  <a:srgbClr val="FFFF00"/>
+                </a:solidFill>
+              </a:rPr>
+              <a:t>previzionat</a:t>
+            </a:r>
+            <a:endParaRPr lang="en-US" sz="1100" b="1" dirty="0">
+              <a:solidFill>
+                <a:srgbClr val="FFFF00"/>
+              </a:solidFill>
+            </a:endParaRPr>
+          </a:p>
+        </p:txBody>
+      </p:sp>
+      <p:sp>
+        <p:nvSpPr>
+          <p:cNvPr id="7" name="TextBox 6">
+            <a:extLst>
+              <a:ext uri="{FF2B5EF4-FFF2-40B4-BE49-F238E27FC236}">
+                <a16:creationId xmlns:a16="http://schemas.microsoft.com/office/drawing/2014/main" id="{627EE5E3-8E0E-1048-07C5-70ADF4DCDC1E}"/>
+              </a:ext>
+            </a:extLst>
+          </p:cNvPr>
+          <p:cNvSpPr txBox="1"/>
+          <p:nvPr/>
+        </p:nvSpPr>
+        <p:spPr>
+          <a:xfrm>
+            <a:off x="2362201" y="3287572"/>
+            <a:ext cx="5132622" cy="646331"/>
+          </a:xfrm>
+          <a:prstGeom prst="rect">
+            <a:avLst/>
+          </a:prstGeom>
+          <a:noFill/>
+        </p:spPr>
+        <p:txBody>
+          <a:bodyPr wrap="square">
+            <a:spAutoFit/>
+          </a:bodyPr>
+          <a:lstStyle/>
+          <a:p>
+            <a:pPr algn="ctr"/>
+            <a:r>
+              <a:rPr lang="en-US" dirty="0" err="1">
+                <a:solidFill>
+                  <a:schemeClr val="bg1"/>
+                </a:solidFill>
+              </a:rPr>
+              <a:t>Putem</a:t>
+            </a:r>
+            <a:r>
+              <a:rPr lang="en-US" dirty="0">
+                <a:solidFill>
+                  <a:schemeClr val="bg1"/>
+                </a:solidFill>
+              </a:rPr>
+              <a:t> </a:t>
+            </a:r>
+            <a:r>
+              <a:rPr lang="en-US" dirty="0" err="1">
+                <a:solidFill>
+                  <a:schemeClr val="bg1"/>
+                </a:solidFill>
+              </a:rPr>
+              <a:t>prezice</a:t>
+            </a:r>
+            <a:r>
+              <a:rPr lang="en-US" dirty="0">
+                <a:solidFill>
+                  <a:schemeClr val="bg1"/>
+                </a:solidFill>
+              </a:rPr>
+              <a:t> </a:t>
+            </a:r>
+            <a:r>
+              <a:rPr lang="en-US" dirty="0" err="1">
+                <a:solidFill>
+                  <a:schemeClr val="bg1"/>
+                </a:solidFill>
+              </a:rPr>
+              <a:t>profitul</a:t>
+            </a:r>
+            <a:r>
+              <a:rPr lang="en-US" dirty="0">
+                <a:solidFill>
+                  <a:schemeClr val="bg1"/>
+                </a:solidFill>
+              </a:rPr>
+              <a:t> </a:t>
+            </a:r>
+            <a:r>
+              <a:rPr lang="en-US" dirty="0" err="1">
+                <a:solidFill>
+                  <a:schemeClr val="bg1"/>
+                </a:solidFill>
+              </a:rPr>
+              <a:t>unei</a:t>
+            </a:r>
+            <a:r>
+              <a:rPr lang="en-US" dirty="0">
+                <a:solidFill>
+                  <a:schemeClr val="bg1"/>
+                </a:solidFill>
+              </a:rPr>
+              <a:t> </a:t>
+            </a:r>
+            <a:r>
+              <a:rPr lang="en-US" dirty="0" err="1">
+                <a:solidFill>
+                  <a:schemeClr val="bg1"/>
+                </a:solidFill>
+              </a:rPr>
+              <a:t>comenzi</a:t>
+            </a:r>
+            <a:r>
+              <a:rPr lang="en-US" dirty="0">
+                <a:solidFill>
+                  <a:schemeClr val="bg1"/>
+                </a:solidFill>
+              </a:rPr>
+              <a:t> </a:t>
+            </a:r>
+          </a:p>
+          <a:p>
+            <a:pPr algn="ctr"/>
+            <a:r>
+              <a:rPr lang="en-US" dirty="0">
+                <a:solidFill>
+                  <a:schemeClr val="bg1"/>
+                </a:solidFill>
+              </a:rPr>
+              <a:t>de </a:t>
+            </a:r>
+            <a:r>
+              <a:rPr lang="en-US" dirty="0" err="1">
+                <a:solidFill>
+                  <a:schemeClr val="bg1"/>
+                </a:solidFill>
+              </a:rPr>
+              <a:t>produse</a:t>
+            </a:r>
+            <a:r>
+              <a:rPr lang="en-US" dirty="0">
+                <a:solidFill>
+                  <a:schemeClr val="bg1"/>
+                </a:solidFill>
+              </a:rPr>
+              <a:t> </a:t>
+            </a:r>
+            <a:r>
+              <a:rPr lang="en-US" dirty="0" err="1">
+                <a:solidFill>
+                  <a:schemeClr val="bg1"/>
+                </a:solidFill>
+              </a:rPr>
+              <a:t>inainte</a:t>
+            </a:r>
+            <a:r>
+              <a:rPr lang="en-US" dirty="0">
+                <a:solidFill>
+                  <a:schemeClr val="bg1"/>
+                </a:solidFill>
+              </a:rPr>
+              <a:t> ca </a:t>
+            </a:r>
+            <a:r>
+              <a:rPr lang="en-US" dirty="0" err="1">
+                <a:solidFill>
+                  <a:schemeClr val="bg1"/>
+                </a:solidFill>
+              </a:rPr>
+              <a:t>ea</a:t>
+            </a:r>
+            <a:r>
+              <a:rPr lang="en-US" dirty="0">
+                <a:solidFill>
+                  <a:schemeClr val="bg1"/>
+                </a:solidFill>
+              </a:rPr>
+              <a:t> </a:t>
+            </a:r>
+            <a:r>
+              <a:rPr lang="en-US" dirty="0" err="1">
+                <a:solidFill>
+                  <a:schemeClr val="bg1"/>
+                </a:solidFill>
+              </a:rPr>
+              <a:t>sa</a:t>
+            </a:r>
+            <a:r>
+              <a:rPr lang="en-US" dirty="0">
+                <a:solidFill>
+                  <a:schemeClr val="bg1"/>
+                </a:solidFill>
+              </a:rPr>
+              <a:t> </a:t>
+            </a:r>
+            <a:r>
+              <a:rPr lang="en-US" dirty="0" err="1">
+                <a:solidFill>
+                  <a:schemeClr val="bg1"/>
+                </a:solidFill>
+              </a:rPr>
+              <a:t>aiba</a:t>
+            </a:r>
+            <a:r>
+              <a:rPr lang="en-US" dirty="0">
+                <a:solidFill>
+                  <a:schemeClr val="bg1"/>
+                </a:solidFill>
+              </a:rPr>
+              <a:t> loc?</a:t>
+            </a:r>
+          </a:p>
+        </p:txBody>
+      </p:sp>
+      <p:pic>
+        <p:nvPicPr>
+          <p:cNvPr id="8" name="Picture 7">
+            <a:extLst>
+              <a:ext uri="{FF2B5EF4-FFF2-40B4-BE49-F238E27FC236}">
+                <a16:creationId xmlns:a16="http://schemas.microsoft.com/office/drawing/2014/main" id="{EA764ABC-6701-B702-DE51-75DC48490368}"/>
+              </a:ext>
+            </a:extLst>
+          </p:cNvPr>
+          <p:cNvPicPr>
+            <a:picLocks noChangeAspect="1"/>
+          </p:cNvPicPr>
+          <p:nvPr/>
+        </p:nvPicPr>
+        <p:blipFill>
+          <a:blip r:embed="rId2"/>
+          <a:stretch>
+            <a:fillRect/>
+          </a:stretch>
+        </p:blipFill>
+        <p:spPr>
+          <a:xfrm>
+            <a:off x="93135" y="2586864"/>
+            <a:ext cx="2997978" cy="1398790"/>
+          </a:xfrm>
+          <a:prstGeom prst="rect">
+            <a:avLst/>
+          </a:prstGeom>
+        </p:spPr>
+      </p:pic>
     </p:spTree>
   </p:cSld>
   <p:clrMapOvr>
@@ -4184,45 +4187,6 @@
       </p:grpSpPr>
       <p:sp>
         <p:nvSpPr>
-          <p:cNvPr id="2" name="Title 1"/>
-          <p:cNvSpPr>
-            <a:spLocks noGrp="1"/>
-          </p:cNvSpPr>
-          <p:nvPr>
-            <p:ph type="title"/>
-          </p:nvPr>
-        </p:nvSpPr>
-        <p:spPr>
-          <a:xfrm>
-            <a:off x="254000" y="274638"/>
-            <a:ext cx="8796866" cy="1143000"/>
-          </a:xfrm>
-        </p:spPr>
-        <p:txBody>
-          <a:bodyPr>
-            <a:noAutofit/>
-          </a:bodyPr>
-          <a:lstStyle/>
-          <a:p>
-            <a:r>
-              <a:rPr lang="en-US" sz="4000" b="1" dirty="0">
-                <a:solidFill>
-                  <a:srgbClr val="002060"/>
-                </a:solidFill>
-              </a:rPr>
-              <a:t>Lookups de Risc: Memorie model</a:t>
-            </a:r>
-            <a:endParaRPr sz="4000" b="1" dirty="0">
-              <a:solidFill>
-                <a:srgbClr val="002060"/>
-              </a:solidFill>
-              <a:latin typeface="Arial"/>
-            </a:endParaRPr>
-          </a:p>
-        </p:txBody>
-      </p:sp>
-      <p:sp>
-        <p:nvSpPr>
           <p:cNvPr id="3" name="Content Placeholder 2"/>
           <p:cNvSpPr>
             <a:spLocks noGrp="1"/>
@@ -4233,8 +4197,8 @@
         </p:nvSpPr>
         <p:spPr>
           <a:xfrm>
-            <a:off x="457200" y="1913466"/>
-            <a:ext cx="8229600" cy="4525963"/>
+            <a:off x="254000" y="821856"/>
+            <a:ext cx="8432800" cy="5367277"/>
           </a:xfrm>
         </p:spPr>
         <p:txBody>
@@ -4263,7 +4227,15 @@
             </a:r>
             <a:r>
               <a:rPr lang="en-US" sz="1600" b="1" dirty="0" err="1"/>
-              <a:t>tiparelor</a:t>
+              <a:t>unor</a:t>
+            </a:r>
+            <a:r>
+              <a:rPr lang="en-US" sz="1600" b="1" dirty="0"/>
+              <a:t> </a:t>
+            </a:r>
+            <a:r>
+              <a:rPr lang="en-US" sz="1600" b="1" dirty="0" err="1"/>
+              <a:t>tipare</a:t>
             </a:r>
             <a:r>
               <a:rPr lang="en-US" sz="1600" b="1" dirty="0"/>
@@ -4275,7 +4247,7 @@
             </a:r>
             <a:r>
               <a:rPr lang="en-US" sz="1600" dirty="0" err="1"/>
-              <a:t>calculul</a:t>
+              <a:t>cei</a:t>
             </a:r>
             <a:r>
               <a:rPr lang="en-US" sz="1600" dirty="0"/>
@@ -4283,51 +4255,161 @@
             </a:r>
             <a:r>
               <a:rPr lang="en-US" sz="1600" dirty="0" err="1"/>
+              <a:t>mai</a:t>
+            </a:r>
+            <a:r>
+              <a:rPr lang="en-US" sz="1600" dirty="0"/>
+              <a:t> </a:t>
+            </a:r>
+            <a:r>
+              <a:rPr lang="en-US" sz="1600" dirty="0" err="1"/>
+              <a:t>puternici</a:t>
+            </a:r>
+            <a:r>
+              <a:rPr lang="en-US" sz="1600" dirty="0"/>
+              <a:t> predictor ai </a:t>
+            </a:r>
+            <a:r>
+              <a:rPr lang="en-US" sz="1600" dirty="0" err="1"/>
+              <a:t>profitului</a:t>
+            </a:r>
+            <a:r>
+              <a:rPr lang="en-US" sz="1600" dirty="0"/>
+              <a:t>:</a:t>
+            </a:r>
+          </a:p>
+          <a:p>
+            <a:pPr lvl="1">
+              <a:lnSpc>
+                <a:spcPct val="150000"/>
+              </a:lnSpc>
+            </a:pPr>
+            <a:r>
+              <a:rPr lang="en-US" sz="1400" dirty="0"/>
+              <a:t>	</a:t>
+            </a:r>
+            <a:r>
+              <a:rPr lang="en-US" sz="1400" dirty="0" err="1"/>
+              <a:t>profilul</a:t>
+            </a:r>
+            <a:r>
+              <a:rPr lang="en-US" sz="1400" dirty="0"/>
+              <a:t> </a:t>
+            </a:r>
+            <a:r>
+              <a:rPr lang="en-US" sz="1400" dirty="0" err="1"/>
+              <a:t>istoric</a:t>
+            </a:r>
+            <a:r>
+              <a:rPr lang="en-US" sz="1400" dirty="0"/>
+              <a:t> al </a:t>
+            </a:r>
+            <a:r>
+              <a:rPr lang="en-US" sz="1400" dirty="0" err="1"/>
+              <a:t>clientului</a:t>
+            </a:r>
+            <a:r>
+              <a:rPr lang="en-US" sz="1400" dirty="0"/>
+              <a:t> (</a:t>
+            </a:r>
+            <a:r>
+              <a:rPr lang="en-US" sz="1400" dirty="0" err="1"/>
+              <a:t>avg_margin</a:t>
+            </a:r>
+            <a:r>
+              <a:rPr lang="en-US" sz="1400" dirty="0"/>
+              <a:t>, </a:t>
+            </a:r>
+            <a:r>
+              <a:rPr lang="en-US" sz="1400" dirty="0" err="1"/>
+              <a:t>loss_rate</a:t>
+            </a:r>
+            <a:r>
+              <a:rPr lang="en-US" sz="1400" dirty="0"/>
+              <a:t>, tenure) </a:t>
+            </a:r>
+          </a:p>
+          <a:p>
+            <a:pPr lvl="1">
+              <a:lnSpc>
+                <a:spcPct val="150000"/>
+              </a:lnSpc>
+            </a:pPr>
+            <a:r>
+              <a:rPr lang="en-US" sz="1400" dirty="0"/>
+              <a:t>	</a:t>
+            </a:r>
+            <a:r>
+              <a:rPr lang="en-US" sz="1400" dirty="0" err="1"/>
               <a:t>profitul</a:t>
             </a:r>
             <a:r>
-              <a:rPr lang="en-US" sz="1600" dirty="0"/>
-              <a:t> </a:t>
-            </a:r>
-            <a:r>
-              <a:rPr lang="en-US" sz="1600" dirty="0" err="1"/>
+              <a:rPr lang="en-US" sz="1400" dirty="0"/>
+              <a:t> </a:t>
+            </a:r>
+            <a:r>
+              <a:rPr lang="en-US" sz="1400" dirty="0" err="1"/>
               <a:t>mediu</a:t>
             </a:r>
             <a:r>
-              <a:rPr lang="en-US" sz="1600" dirty="0"/>
-              <a:t> pe </a:t>
-            </a:r>
-            <a:r>
-              <a:rPr lang="en-US" sz="1600" dirty="0" err="1"/>
-              <a:t>combinatii</a:t>
-            </a:r>
-            <a:r>
-              <a:rPr lang="en-US" sz="1600" dirty="0"/>
-              <a:t> de Sub-</a:t>
-            </a:r>
-            <a:r>
-              <a:rPr lang="en-US" sz="1600" dirty="0" err="1"/>
-              <a:t>Categorie</a:t>
-            </a:r>
-            <a:r>
-              <a:rPr lang="en-US" sz="1600" dirty="0"/>
-              <a:t> </a:t>
-            </a:r>
-            <a:r>
-              <a:rPr lang="en-US" sz="1600" dirty="0" err="1"/>
-              <a:t>si</a:t>
-            </a:r>
-            <a:r>
-              <a:rPr lang="en-US" sz="1600" dirty="0"/>
-              <a:t> </a:t>
-            </a:r>
-            <a:r>
-              <a:rPr lang="en-US" sz="1600" dirty="0" err="1"/>
-              <a:t>Regiune</a:t>
-            </a:r>
-            <a:r>
-              <a:rPr lang="en-US" sz="1600" dirty="0"/>
-              <a:t>.</a:t>
+              <a:rPr lang="en-US" sz="1400" dirty="0"/>
+              <a:t> </a:t>
+            </a:r>
+            <a:r>
+              <a:rPr lang="en-US" sz="1400" dirty="0" err="1"/>
+              <a:t>calculat</a:t>
+            </a:r>
+            <a:r>
+              <a:rPr lang="en-US" sz="1400" dirty="0"/>
+              <a:t> pe 4 </a:t>
+            </a:r>
+            <a:r>
+              <a:rPr lang="en-US" sz="1400" dirty="0" err="1"/>
+              <a:t>niveluri</a:t>
+            </a:r>
+            <a:r>
+              <a:rPr lang="en-US" sz="1400" dirty="0"/>
+              <a:t> (sub-</a:t>
+            </a:r>
+            <a:r>
+              <a:rPr lang="en-US" sz="1400" dirty="0" err="1"/>
+              <a:t>categorie</a:t>
+            </a:r>
+            <a:r>
+              <a:rPr lang="en-US" sz="1400" dirty="0"/>
+              <a:t> × </a:t>
+            </a:r>
+            <a:r>
+              <a:rPr lang="en-US" sz="1400" dirty="0" err="1"/>
+              <a:t>regiune</a:t>
+            </a:r>
+            <a:r>
+              <a:rPr lang="en-US" sz="1400" dirty="0"/>
+              <a:t>, </a:t>
+            </a:r>
+            <a:r>
+              <a:rPr lang="en-US" sz="1400" dirty="0" err="1"/>
+              <a:t>categorie</a:t>
+            </a:r>
+            <a:r>
+              <a:rPr lang="en-US" sz="1400" dirty="0"/>
+              <a:t>, </a:t>
+            </a:r>
+            <a:r>
+              <a:rPr lang="en-US" sz="1400" dirty="0" err="1"/>
+              <a:t>produs</a:t>
+            </a:r>
+            <a:r>
+              <a:rPr lang="en-US" sz="1400" dirty="0"/>
+              <a:t>, </a:t>
+            </a:r>
+            <a:r>
+              <a:rPr lang="en-US" sz="1400" dirty="0" err="1"/>
+              <a:t>sezon</a:t>
+            </a:r>
+            <a:r>
+              <a:rPr lang="en-US" sz="1400" dirty="0"/>
+              <a:t>)</a:t>
             </a:r>
           </a:p>
           <a:p>
@@ -4343,118 +4425,220 @@
             </a:r>
             <a:r>
               <a:rPr lang="en-US" sz="1600" b="1" dirty="0" err="1"/>
-              <a:t>Semnale</a:t>
+              <a:t>Procesarea</a:t>
             </a:r>
             <a:r>
               <a:rPr lang="en-US" sz="1600" b="1" dirty="0"/>
-              <a:t> de </a:t>
+              <a:t> Discount </a:t>
             </a:r>
             <a:r>
               <a:rPr lang="en-US" sz="1600" b="1" dirty="0" err="1"/>
-              <a:t>alerta</a:t>
+              <a:t>si</a:t>
             </a:r>
             <a:r>
               <a:rPr lang="en-US" sz="1600" b="1" dirty="0"/>
-              <a:t>:</a:t>
+              <a:t> Profit la </a:t>
+            </a:r>
+            <a:r>
+              <a:rPr lang="en-US" sz="1600" b="1" dirty="0" err="1"/>
+              <a:t>nivel</a:t>
+            </a:r>
+            <a:r>
+              <a:rPr lang="en-US" sz="1600" b="1" dirty="0"/>
+              <a:t> de client</a:t>
             </a:r>
             <a:r>
               <a:rPr lang="en-US" sz="1600" dirty="0"/>
               <a:t> </a:t>
             </a:r>
-            <a:r>
-              <a:rPr lang="en-US" sz="1600" dirty="0" err="1"/>
-              <a:t>e.g</a:t>
-            </a:r>
-            <a:r>
-              <a:rPr lang="en-US" sz="1600" dirty="0"/>
-              <a:t>: </a:t>
-            </a:r>
-            <a:r>
-              <a:rPr lang="en-US" sz="1600" dirty="0" err="1"/>
-              <a:t>daca</a:t>
-            </a:r>
-            <a:r>
-              <a:rPr lang="en-US" sz="1600" dirty="0"/>
-              <a:t> </a:t>
-            </a:r>
-            <a:r>
-              <a:rPr lang="en-US" sz="1600" dirty="0" err="1"/>
-              <a:t>categoria</a:t>
-            </a:r>
-            <a:r>
-              <a:rPr lang="en-US" sz="1600" dirty="0"/>
-              <a:t> de </a:t>
-            </a:r>
-            <a:r>
-              <a:rPr lang="en-US" sz="1600" dirty="0" err="1"/>
-              <a:t>produse</a:t>
-            </a:r>
-            <a:r>
-              <a:rPr lang="en-US" sz="1600" dirty="0"/>
-              <a:t> "Tables" in </a:t>
-            </a:r>
-            <a:r>
-              <a:rPr lang="en-US" sz="1600" dirty="0" err="1"/>
-              <a:t>regiunea</a:t>
-            </a:r>
-            <a:r>
-              <a:rPr lang="en-US" sz="1600" dirty="0"/>
-              <a:t> "East" are </a:t>
-            </a:r>
-            <a:r>
-              <a:rPr lang="en-US" sz="1600" dirty="0" err="1"/>
-              <a:t>pierderi</a:t>
-            </a:r>
-            <a:r>
-              <a:rPr lang="en-US" sz="1600" dirty="0"/>
-              <a:t> </a:t>
-            </a:r>
-            <a:r>
-              <a:rPr lang="en-US" sz="1600" dirty="0" err="1"/>
-              <a:t>constante</a:t>
-            </a:r>
-            <a:r>
-              <a:rPr lang="en-US" sz="1600" dirty="0"/>
-              <a:t>, </a:t>
-            </a:r>
-            <a:r>
-              <a:rPr lang="en-US" sz="1600" dirty="0" err="1"/>
-              <a:t>modelul</a:t>
-            </a:r>
-            <a:r>
-              <a:rPr lang="en-US" sz="1600" dirty="0"/>
-              <a:t> </a:t>
-            </a:r>
-            <a:r>
-              <a:rPr lang="en-US" sz="1600" dirty="0" err="1"/>
-              <a:t>primeste</a:t>
-            </a:r>
-            <a:r>
-              <a:rPr lang="en-US" sz="1600" dirty="0"/>
-              <a:t> la </a:t>
-            </a:r>
-            <a:r>
-              <a:rPr lang="en-US" sz="1600" dirty="0" err="1"/>
-              <a:t>aceasta</a:t>
-            </a:r>
-            <a:r>
-              <a:rPr lang="en-US" sz="1600" dirty="0"/>
-              <a:t> </a:t>
-            </a:r>
-            <a:r>
-              <a:rPr lang="en-US" sz="1600" dirty="0" err="1"/>
-              <a:t>categoire</a:t>
-            </a:r>
-            <a:r>
-              <a:rPr lang="en-US" sz="1600" dirty="0"/>
-              <a:t> “red-flag".</a:t>
-            </a:r>
-          </a:p>
-          <a:p>
-            <a:pPr marL="0" indent="0">
+          </a:p>
+          <a:p>
+            <a:pPr lvl="1">
               <a:lnSpc>
                 <a:spcPct val="150000"/>
               </a:lnSpc>
+            </a:pPr>
+            <a:r>
+              <a:rPr lang="en-US" sz="1400" dirty="0" err="1"/>
+              <a:t>relatia</a:t>
+            </a:r>
+            <a:r>
+              <a:rPr lang="en-US" sz="1400" dirty="0"/>
+              <a:t> discount-profit invers </a:t>
+            </a:r>
+            <a:r>
+              <a:rPr lang="en-US" sz="1400" dirty="0" err="1"/>
+              <a:t>proportionala</a:t>
+            </a:r>
+            <a:r>
+              <a:rPr lang="en-US" sz="1400" dirty="0"/>
+              <a:t> (e.g. disc ≥ 30%= 91.6% </a:t>
+            </a:r>
+            <a:r>
+              <a:rPr lang="en-US" sz="1400" dirty="0" err="1"/>
+              <a:t>pierdere</a:t>
+            </a:r>
+            <a:r>
+              <a:rPr lang="en-US" sz="1400" dirty="0"/>
+              <a:t>) -&gt; </a:t>
+            </a:r>
+            <a:r>
+              <a:rPr lang="en-US" sz="1400" dirty="0" err="1"/>
+              <a:t>high_disc_pct</a:t>
+            </a:r>
+            <a:r>
+              <a:rPr lang="en-US" sz="1400" dirty="0"/>
+              <a:t>, </a:t>
+            </a:r>
+            <a:r>
+              <a:rPr lang="en-US" sz="1400" dirty="0" err="1"/>
+              <a:t>zero_disc_pct</a:t>
+            </a:r>
+            <a:r>
+              <a:rPr lang="en-US" sz="1400" dirty="0"/>
+              <a:t> </a:t>
+            </a:r>
+            <a:r>
+              <a:rPr lang="en-US" sz="1400" dirty="0" err="1"/>
+              <a:t>și</a:t>
+            </a:r>
+            <a:r>
+              <a:rPr lang="en-US" sz="1400" dirty="0"/>
+              <a:t> </a:t>
+            </a:r>
+            <a:r>
+              <a:rPr lang="en-US" sz="1400" dirty="0" err="1"/>
+              <a:t>discount_sq</a:t>
+            </a:r>
+            <a:r>
+              <a:rPr lang="en-US" sz="1400" dirty="0"/>
+              <a:t> </a:t>
+            </a:r>
+          </a:p>
+          <a:p>
+            <a:pPr lvl="1">
+              <a:lnSpc>
+                <a:spcPct val="150000"/>
+              </a:lnSpc>
+            </a:pPr>
+            <a:r>
+              <a:rPr lang="en-US" sz="1400" dirty="0" err="1"/>
+              <a:t>tranzactiile</a:t>
+            </a:r>
+            <a:r>
+              <a:rPr lang="en-US" sz="1400" dirty="0"/>
+              <a:t> </a:t>
+            </a:r>
+            <a:r>
+              <a:rPr lang="en-US" sz="1400" dirty="0" err="1"/>
+              <a:t>agregate</a:t>
+            </a:r>
+            <a:r>
+              <a:rPr lang="en-US" sz="1400" dirty="0"/>
+              <a:t> la </a:t>
+            </a:r>
+            <a:r>
+              <a:rPr lang="en-US" sz="1400" dirty="0" err="1"/>
+              <a:t>nivel</a:t>
+            </a:r>
+            <a:r>
+              <a:rPr lang="en-US" sz="1400" dirty="0"/>
+              <a:t> customer × an × </a:t>
+            </a:r>
+            <a:r>
+              <a:rPr lang="en-US" sz="1400" dirty="0" err="1"/>
+              <a:t>regiune</a:t>
+            </a:r>
+            <a:r>
+              <a:rPr lang="en-US" sz="1400" dirty="0"/>
+              <a:t> × sub-</a:t>
+            </a:r>
+            <a:r>
+              <a:rPr lang="en-US" sz="1400" dirty="0" err="1"/>
+              <a:t>categorie</a:t>
+            </a:r>
+            <a:endParaRPr lang="en-US" sz="1400" dirty="0"/>
+          </a:p>
+          <a:p>
+            <a:pPr lvl="1">
+              <a:lnSpc>
+                <a:spcPct val="150000"/>
+              </a:lnSpc>
+            </a:pPr>
+            <a:r>
+              <a:rPr lang="en-US" sz="1400" dirty="0" err="1"/>
+              <a:t>winzorizare</a:t>
+            </a:r>
+            <a:r>
+              <a:rPr lang="en-US" sz="1400" dirty="0"/>
+              <a:t> (percentile 1–99% din train) </a:t>
+            </a:r>
+          </a:p>
+          <a:p>
+            <a:pPr lvl="1">
+              <a:lnSpc>
+                <a:spcPct val="150000"/>
+              </a:lnSpc>
+            </a:pPr>
+            <a:r>
+              <a:rPr lang="en-US" sz="1400" dirty="0" err="1"/>
+              <a:t>transformare</a:t>
+            </a:r>
+            <a:r>
+              <a:rPr lang="en-US" sz="1400" dirty="0"/>
+              <a:t> Yeo-Johnson </a:t>
+            </a:r>
+            <a:r>
+              <a:rPr lang="en-US" sz="1400" dirty="0" err="1"/>
+              <a:t>pentru</a:t>
+            </a:r>
+            <a:r>
+              <a:rPr lang="en-US" sz="1400" dirty="0"/>
+              <a:t> </a:t>
+            </a:r>
+            <a:r>
+              <a:rPr lang="en-US" sz="1400" dirty="0" err="1"/>
+              <a:t>stabilizarea</a:t>
+            </a:r>
+            <a:r>
+              <a:rPr lang="en-US" sz="1400" dirty="0"/>
+              <a:t> </a:t>
+            </a:r>
+            <a:r>
+              <a:rPr lang="en-US" sz="1400" dirty="0" err="1"/>
+              <a:t>gradientilor</a:t>
+            </a:r>
+            <a:r>
+              <a:rPr lang="en-US" sz="1400" dirty="0"/>
+              <a:t> (</a:t>
+            </a:r>
+            <a:r>
+              <a:rPr lang="en-US" sz="1400" dirty="0" err="1"/>
+              <a:t>comprimarea</a:t>
+            </a:r>
+            <a:r>
+              <a:rPr lang="en-US" sz="1400" dirty="0"/>
+              <a:t> </a:t>
+            </a:r>
+            <a:r>
+              <a:rPr lang="en-US" sz="1400" dirty="0" err="1"/>
+              <a:t>cozilor</a:t>
+            </a:r>
+            <a:r>
+              <a:rPr lang="en-US" sz="1400" dirty="0"/>
+              <a:t> </a:t>
+            </a:r>
+            <a:r>
+              <a:rPr lang="en-US" sz="1400" dirty="0" err="1"/>
+              <a:t>distributiei</a:t>
+            </a:r>
+            <a:r>
+              <a:rPr lang="en-US" sz="1400" dirty="0"/>
+              <a:t>)</a:t>
+            </a:r>
+          </a:p>
+          <a:p>
+            <a:pPr marL="0" indent="0">
               <a:buNone/>
             </a:pPr>
             <a:r>
@@ -4467,106 +4651,305 @@
             </a:r>
             <a:r>
               <a:rPr lang="en-US" sz="1600" b="1" dirty="0"/>
-              <a:t> ‘fallback’:</a:t>
+              <a:t> fallback:</a:t>
             </a:r>
             <a:r>
               <a:rPr lang="en-US" sz="1600" dirty="0"/>
               <a:t> </a:t>
             </a:r>
-            <a:r>
-              <a:rPr lang="en-US" sz="1600" dirty="0" err="1"/>
+          </a:p>
+          <a:p>
+            <a:pPr lvl="1">
+              <a:lnSpc>
+                <a:spcPct val="150000"/>
+              </a:lnSpc>
+            </a:pPr>
+            <a:r>
+              <a:rPr lang="en-US" sz="1400" dirty="0" err="1"/>
               <a:t>pentru</a:t>
             </a:r>
             <a:r>
-              <a:rPr lang="en-US" sz="1600" dirty="0"/>
-              <a:t> </a:t>
-            </a:r>
-            <a:r>
-              <a:rPr lang="en-US" sz="1600" dirty="0" err="1"/>
-              <a:t>produse</a:t>
-            </a:r>
-            <a:r>
-              <a:rPr lang="en-US" sz="1600" dirty="0"/>
-              <a:t> </a:t>
-            </a:r>
-            <a:r>
-              <a:rPr lang="en-US" sz="1600" dirty="0" err="1"/>
+              <a:rPr lang="en-US" sz="1400" dirty="0"/>
+              <a:t> </a:t>
+            </a:r>
+            <a:r>
+              <a:rPr lang="en-US" sz="1400" dirty="0" err="1"/>
+              <a:t>tranzactiile</a:t>
+            </a:r>
+            <a:r>
+              <a:rPr lang="en-US" sz="1400" dirty="0"/>
+              <a:t> </a:t>
+            </a:r>
+            <a:r>
+              <a:rPr lang="en-US" sz="1400" dirty="0" err="1"/>
               <a:t>noi</a:t>
             </a:r>
             <a:r>
-              <a:rPr lang="en-US" sz="1600" dirty="0"/>
-              <a:t> in 2017, </a:t>
-            </a:r>
-            <a:r>
-              <a:rPr lang="en-US" sz="1600" dirty="0" err="1"/>
+              <a:rPr lang="en-US" sz="1400" dirty="0"/>
+              <a:t> (e.g.2017), </a:t>
+            </a:r>
+            <a:r>
+              <a:rPr lang="en-US" sz="1400" dirty="0" err="1"/>
               <a:t>folosim</a:t>
             </a:r>
             <a:r>
-              <a:rPr lang="en-US" sz="1600" dirty="0"/>
-              <a:t> </a:t>
-            </a:r>
-            <a:r>
-              <a:rPr lang="en-US" sz="1600" dirty="0" err="1"/>
-              <a:t>marja</a:t>
-            </a:r>
-            <a:r>
-              <a:rPr lang="en-US" sz="1600" dirty="0"/>
-              <a:t> </a:t>
-            </a:r>
-            <a:r>
-              <a:rPr lang="en-US" sz="1600" dirty="0" err="1"/>
-              <a:t>medie</a:t>
-            </a:r>
-            <a:r>
-              <a:rPr lang="en-US" sz="1600" dirty="0"/>
-              <a:t> </a:t>
-            </a:r>
-            <a:r>
-              <a:rPr lang="en-US" sz="1600" dirty="0" err="1"/>
-              <a:t>istorica</a:t>
-            </a:r>
-            <a:r>
-              <a:rPr lang="en-US" sz="1600" dirty="0"/>
-              <a:t> </a:t>
-            </a:r>
-            <a:r>
-              <a:rPr lang="en-US" sz="1600" dirty="0" err="1"/>
+              <a:rPr lang="en-US" sz="1400" dirty="0"/>
+              <a:t> </a:t>
+            </a:r>
+            <a:r>
+              <a:rPr lang="en-US" sz="1400" dirty="0" err="1"/>
+              <a:t>profitul</a:t>
+            </a:r>
+            <a:r>
+              <a:rPr lang="en-US" sz="1400" dirty="0"/>
+              <a:t> </a:t>
+            </a:r>
+            <a:r>
+              <a:rPr lang="en-US" sz="1400" dirty="0" err="1"/>
+              <a:t>mediu</a:t>
+            </a:r>
+            <a:r>
+              <a:rPr lang="en-US" sz="1400" dirty="0"/>
+              <a:t> </a:t>
+            </a:r>
+            <a:r>
+              <a:rPr lang="en-US" sz="1400" dirty="0" err="1"/>
+              <a:t>istoric</a:t>
+            </a:r>
+            <a:r>
+              <a:rPr lang="en-US" sz="1400" dirty="0"/>
+              <a:t> </a:t>
+            </a:r>
+            <a:r>
+              <a:rPr lang="en-US" sz="1400" dirty="0" err="1"/>
+              <a:t>agregat</a:t>
+            </a:r>
+            <a:r>
+              <a:rPr lang="en-US" sz="1400" dirty="0"/>
+              <a:t> </a:t>
+            </a:r>
+            <a:r>
+              <a:rPr lang="en-US" sz="1400" dirty="0" err="1"/>
               <a:t>pentru</a:t>
             </a:r>
             <a:r>
-              <a:rPr lang="en-US" sz="1600" dirty="0"/>
+              <a:rPr lang="en-US" sz="1400" dirty="0"/>
               <a:t> a </a:t>
             </a:r>
             <a:r>
-              <a:rPr lang="en-US" sz="1600" dirty="0" err="1"/>
+              <a:rPr lang="en-US" sz="1400" dirty="0" err="1"/>
               <a:t>evita</a:t>
             </a:r>
             <a:r>
-              <a:rPr lang="en-US" sz="1600" dirty="0"/>
-              <a:t> </a:t>
-            </a:r>
-            <a:r>
-              <a:rPr lang="en-US" sz="1600" dirty="0" err="1"/>
+              <a:rPr lang="en-US" sz="1400" dirty="0"/>
+              <a:t> </a:t>
+            </a:r>
+            <a:r>
+              <a:rPr lang="en-US" sz="1400" dirty="0" err="1"/>
               <a:t>predictiile</a:t>
             </a:r>
             <a:r>
-              <a:rPr lang="en-US" sz="1600" dirty="0"/>
-              <a:t> </a:t>
-            </a:r>
-            <a:r>
-              <a:rPr lang="en-US" sz="1600" dirty="0" err="1"/>
+              <a:rPr lang="en-US" sz="1400" dirty="0"/>
+              <a:t> </a:t>
+            </a:r>
+            <a:r>
+              <a:rPr lang="en-US" sz="1400" dirty="0" err="1"/>
               <a:t>oarbe</a:t>
             </a:r>
             <a:r>
-              <a:rPr lang="en-US" sz="1600" dirty="0"/>
-              <a:t>.</a:t>
-            </a:r>
-          </a:p>
-          <a:p>
-            <a:endParaRPr lang="en-US" dirty="0"/>
+              <a:rPr lang="en-US" sz="1400" dirty="0"/>
+              <a:t>: </a:t>
+            </a:r>
+            <a:r>
+              <a:rPr lang="en-US" sz="1400" dirty="0" err="1"/>
+              <a:t>p_last</a:t>
+            </a:r>
+            <a:r>
+              <a:rPr lang="en-US" sz="1400" dirty="0"/>
+              <a:t>, </a:t>
+            </a:r>
+            <a:r>
+              <a:rPr lang="en-US" sz="1400" dirty="0" err="1"/>
+              <a:t>margin_trend</a:t>
+            </a:r>
+            <a:r>
+              <a:rPr lang="en-US" sz="1400" dirty="0"/>
+              <a:t> </a:t>
+            </a:r>
+            <a:r>
+              <a:rPr lang="en-US" sz="1400" dirty="0" err="1"/>
+              <a:t>și</a:t>
+            </a:r>
+            <a:r>
+              <a:rPr lang="en-US" sz="1400" dirty="0"/>
+              <a:t> </a:t>
+            </a:r>
+            <a:r>
+              <a:rPr lang="en-US" sz="1400" dirty="0" err="1"/>
+              <a:t>profit_last</a:t>
+            </a:r>
+            <a:r>
+              <a:rPr lang="en-US" sz="1400" dirty="0"/>
+              <a:t> </a:t>
+            </a:r>
+            <a:r>
+              <a:rPr lang="en-US" sz="1400" dirty="0" err="1"/>
+              <a:t>utilizeaza</a:t>
+            </a:r>
+            <a:r>
+              <a:rPr lang="en-US" sz="1400" dirty="0"/>
+              <a:t> </a:t>
+            </a:r>
+            <a:r>
+              <a:rPr lang="en-US" sz="1400" dirty="0" err="1"/>
+              <a:t>istoricul</a:t>
+            </a:r>
+            <a:r>
+              <a:rPr lang="en-US" sz="1400" dirty="0"/>
+              <a:t> </a:t>
+            </a:r>
+            <a:r>
+              <a:rPr lang="en-US" sz="1400" dirty="0" err="1"/>
+              <a:t>clientului</a:t>
+            </a:r>
+            <a:r>
+              <a:rPr lang="en-US" sz="1400" dirty="0"/>
+              <a:t> </a:t>
+            </a:r>
+            <a:r>
+              <a:rPr lang="en-US" sz="1400" dirty="0" err="1"/>
+              <a:t>prin</a:t>
+            </a:r>
+            <a:r>
+              <a:rPr lang="en-US" sz="1400" dirty="0"/>
+              <a:t> shift strict </a:t>
+            </a:r>
+            <a:r>
+              <a:rPr lang="en-US" sz="1400" dirty="0" err="1"/>
+              <a:t>retroactiv</a:t>
+            </a:r>
+            <a:r>
+              <a:rPr lang="en-US" sz="1400" dirty="0"/>
+              <a:t> = no-leakage</a:t>
+            </a:r>
           </a:p>
         </p:txBody>
       </p:sp>
+      <p:grpSp>
+        <p:nvGrpSpPr>
+          <p:cNvPr id="11" name="Group 10">
+            <a:extLst>
+              <a:ext uri="{FF2B5EF4-FFF2-40B4-BE49-F238E27FC236}">
+                <a16:creationId xmlns:a16="http://schemas.microsoft.com/office/drawing/2014/main" id="{4E8C0B47-2685-7617-ACCD-DE2729893110}"/>
+              </a:ext>
+            </a:extLst>
+          </p:cNvPr>
+          <p:cNvGrpSpPr/>
+          <p:nvPr/>
+        </p:nvGrpSpPr>
+        <p:grpSpPr>
+          <a:xfrm>
+            <a:off x="0" y="0"/>
+            <a:ext cx="9144000" cy="668867"/>
+            <a:chOff x="0" y="0"/>
+            <a:chExt cx="9144000" cy="658368"/>
+          </a:xfrm>
+        </p:grpSpPr>
+        <p:sp>
+          <p:nvSpPr>
+            <p:cNvPr id="7" name="Shape 0">
+              <a:extLst>
+                <a:ext uri="{FF2B5EF4-FFF2-40B4-BE49-F238E27FC236}">
+                  <a16:creationId xmlns:a16="http://schemas.microsoft.com/office/drawing/2014/main" id="{3161A948-4F06-AAC4-77E6-FC4705B45678}"/>
+                </a:ext>
+              </a:extLst>
+            </p:cNvPr>
+            <p:cNvSpPr/>
+            <p:nvPr/>
+          </p:nvSpPr>
+          <p:spPr>
+            <a:xfrm>
+              <a:off x="0" y="0"/>
+              <a:ext cx="9144000" cy="658368"/>
+            </a:xfrm>
+            <a:prstGeom prst="rect">
+              <a:avLst/>
+            </a:prstGeom>
+            <a:solidFill>
+              <a:srgbClr val="1E2761"/>
+            </a:solidFill>
+            <a:ln w="12700">
+              <a:solidFill>
+                <a:srgbClr val="1E2761"/>
+              </a:solidFill>
+              <a:prstDash val="solid"/>
+            </a:ln>
+          </p:spPr>
+          <p:txBody>
+            <a:bodyPr/>
+            <a:lstStyle/>
+            <a:p>
+              <a:endParaRPr lang="en-US"/>
+            </a:p>
+          </p:txBody>
+        </p:sp>
+        <p:sp>
+          <p:nvSpPr>
+            <p:cNvPr id="10" name="Title 1"/>
+            <p:cNvSpPr txBox="1">
+              <a:spLocks/>
+            </p:cNvSpPr>
+            <p:nvPr/>
+          </p:nvSpPr>
+          <p:spPr>
+            <a:xfrm>
+              <a:off x="254000" y="76200"/>
+              <a:ext cx="8796866" cy="464158"/>
+            </a:xfrm>
+            <a:prstGeom prst="rect">
+              <a:avLst/>
+            </a:prstGeom>
+          </p:spPr>
+          <p:txBody>
+            <a:bodyPr vert="horz" lIns="91440" tIns="45720" rIns="91440" bIns="45720" rtlCol="0" anchor="ctr">
+              <a:noAutofit/>
+            </a:bodyPr>
+            <a:lstStyle>
+              <a:lvl1pPr algn="ctr" defTabSz="457200" rtl="0" eaLnBrk="1" latinLnBrk="0" hangingPunct="1">
+                <a:spcBef>
+                  <a:spcPct val="0"/>
+                </a:spcBef>
+                <a:buNone/>
+                <a:defRPr sz="4400" kern="1200">
+                  <a:solidFill>
+                    <a:schemeClr val="tx1"/>
+                  </a:solidFill>
+                  <a:latin typeface="+mj-lt"/>
+                  <a:ea typeface="+mj-ea"/>
+                  <a:cs typeface="+mj-cs"/>
+                </a:defRPr>
+              </a:lvl1pPr>
+            </a:lstStyle>
+            <a:p>
+              <a:pPr algn="l"/>
+              <a:r>
+                <a:rPr lang="en-US" sz="4000" b="1" dirty="0">
+                  <a:solidFill>
+                    <a:schemeClr val="bg1"/>
+                  </a:solidFill>
+                </a:rPr>
+                <a:t>Pipeline: Memorie model</a:t>
+              </a:r>
+              <a:endParaRPr lang="en-US" sz="4000" b="1" dirty="0">
+                <a:solidFill>
+                  <a:schemeClr val="bg1"/>
+                </a:solidFill>
+                <a:latin typeface="Arial"/>
+              </a:endParaRPr>
+            </a:p>
+          </p:txBody>
+        </p:sp>
+      </p:grpSp>
     </p:spTree>
   </p:cSld>
   <p:clrMapOvr>
@@ -4592,50 +4975,6 @@
           <a:chExt cx="0" cy="0"/>
         </a:xfrm>
       </p:grpSpPr>
-      <p:sp>
-        <p:nvSpPr>
-          <p:cNvPr id="6" name="Title 1">
-            <a:extLst>
-              <a:ext uri="{FF2B5EF4-FFF2-40B4-BE49-F238E27FC236}">
-                <a16:creationId xmlns:a16="http://schemas.microsoft.com/office/drawing/2014/main" id="{978F8C5A-4900-2506-D810-0FB0B6F412B2}"/>
-              </a:ext>
-            </a:extLst>
-          </p:cNvPr>
-          <p:cNvSpPr>
-            <a:spLocks noGrp="1"/>
-          </p:cNvSpPr>
-          <p:nvPr>
-            <p:ph type="title"/>
-          </p:nvPr>
-        </p:nvSpPr>
-        <p:spPr>
-          <a:xfrm>
-            <a:off x="457200" y="274638"/>
-            <a:ext cx="8229600" cy="930190"/>
-          </a:xfrm>
-        </p:spPr>
-        <p:txBody>
-          <a:bodyPr>
-            <a:normAutofit/>
-          </a:bodyPr>
-          <a:lstStyle/>
-          <a:p>
-            <a:r>
-              <a:rPr lang="en-US" sz="4000" b="1" dirty="0">
-                <a:solidFill>
-                  <a:srgbClr val="002060"/>
-                </a:solidFill>
-              </a:rPr>
-              <a:t>Model</a:t>
-            </a:r>
-            <a:endParaRPr sz="4000" b="1" dirty="0">
-              <a:solidFill>
-                <a:srgbClr val="002060"/>
-              </a:solidFill>
-            </a:endParaRPr>
-          </a:p>
-        </p:txBody>
-      </p:sp>
       <p:pic>
         <p:nvPicPr>
           <p:cNvPr id="16" name="Picture 15">
@@ -4658,8 +4997,8 @@
         </p:blipFill>
         <p:spPr>
           <a:xfrm>
-            <a:off x="0" y="877589"/>
-            <a:ext cx="5754731" cy="5347104"/>
+            <a:off x="-143934" y="593682"/>
+            <a:ext cx="6316133" cy="5868740"/>
           </a:xfrm>
           <a:prstGeom prst="rect">
             <a:avLst/>
@@ -4684,8 +5023,8 @@
         </p:nvSpPr>
         <p:spPr>
           <a:xfrm>
-            <a:off x="5754731" y="1036014"/>
-            <a:ext cx="3124200" cy="5191240"/>
+            <a:off x="5918201" y="1291479"/>
+            <a:ext cx="2954866" cy="4978019"/>
           </a:xfrm>
         </p:spPr>
         <p:txBody>
@@ -4698,15 +5037,15 @@
               <a:buNone/>
             </a:pPr>
             <a:r>
-              <a:rPr lang="en-US" sz="1200" dirty="0"/>
+              <a:rPr lang="en-US" sz="1400" dirty="0"/>
               <a:t>➡️ </a:t>
             </a:r>
             <a:r>
-              <a:rPr lang="en-US" sz="1200" b="1" dirty="0" err="1"/>
+              <a:rPr lang="en-US" sz="1400" b="1" dirty="0" err="1"/>
               <a:t>Profil</a:t>
             </a:r>
             <a:r>
-              <a:rPr lang="en-US" sz="1200" b="1" dirty="0"/>
+              <a:rPr lang="en-US" sz="1400" b="1" dirty="0"/>
               <a:t> Client RFM</a:t>
             </a:r>
           </a:p>
@@ -4715,44 +5054,81 @@
               <a:buNone/>
             </a:pPr>
             <a:r>
-              <a:rPr lang="en-US" sz="1200" b="1" dirty="0"/>
+              <a:rPr lang="en-US" sz="1400" b="1" dirty="0"/>
               <a:t>	- </a:t>
             </a:r>
             <a:r>
-              <a:rPr lang="en-US" sz="1200" i="1" dirty="0"/>
+              <a:rPr lang="en-US" sz="1400" i="1" dirty="0"/>
               <a:t>Recent, </a:t>
             </a:r>
             <a:r>
-              <a:rPr lang="en-US" sz="1200" i="1" dirty="0" err="1"/>
+              <a:rPr lang="en-US" sz="1400" i="1" dirty="0" err="1"/>
               <a:t>Frecvent</a:t>
             </a:r>
             <a:r>
-              <a:rPr lang="en-US" sz="1200" i="1" dirty="0"/>
+              <a:rPr lang="en-US" sz="1400" i="1" dirty="0"/>
               <a:t>, </a:t>
             </a:r>
             <a:r>
-              <a:rPr lang="en-US" sz="1200" i="1" dirty="0" err="1"/>
+              <a:rPr lang="en-US" sz="1400" i="1" dirty="0" err="1"/>
               <a:t>Monetar</a:t>
             </a:r>
-            <a:endParaRPr lang="en-US" sz="1200" i="1" dirty="0"/>
+            <a:endParaRPr lang="en-US" sz="1400" dirty="0"/>
           </a:p>
           <a:p>
             <a:pPr marL="0" indent="0">
               <a:buNone/>
             </a:pPr>
-            <a:endParaRPr lang="en-US" sz="1200" dirty="0"/>
+            <a:r>
+              <a:rPr lang="en-US" sz="1400" dirty="0"/>
+              <a:t>➡️ </a:t>
+            </a:r>
+            <a:r>
+              <a:rPr lang="en-US" sz="1400" b="1" dirty="0"/>
+              <a:t>Lista de features  </a:t>
+            </a:r>
           </a:p>
           <a:p>
             <a:pPr marL="0" indent="0">
               <a:buNone/>
             </a:pPr>
             <a:r>
-              <a:rPr lang="en-US" sz="1200" dirty="0"/>
+              <a:rPr lang="en-US" sz="1400" b="1" dirty="0"/>
+              <a:t>	</a:t>
+            </a:r>
+            <a:r>
+              <a:rPr lang="en-US" sz="1400" b="1" i="1" dirty="0"/>
+              <a:t>- </a:t>
+            </a:r>
+            <a:r>
+              <a:rPr lang="en-US" sz="1400" i="1" dirty="0"/>
+              <a:t>44 de features</a:t>
+            </a:r>
+            <a:endParaRPr lang="en-US" sz="1400" dirty="0"/>
+          </a:p>
+          <a:p>
+            <a:pPr marL="0" indent="0">
+              <a:buNone/>
+            </a:pPr>
+            <a:r>
+              <a:rPr lang="en-US" sz="1400" dirty="0"/>
               <a:t>➡️ </a:t>
             </a:r>
             <a:r>
-              <a:rPr lang="en-US" sz="1200" b="1" dirty="0"/>
-              <a:t>Lista de features  </a:t>
+              <a:rPr lang="en-US" sz="1400" b="1" dirty="0" err="1"/>
+              <a:t>Impactul</a:t>
+            </a:r>
+            <a:r>
+              <a:rPr lang="en-US" sz="1400" b="1" dirty="0"/>
+              <a:t> </a:t>
+            </a:r>
+            <a:r>
+              <a:rPr lang="en-US" sz="1400" b="1" dirty="0" err="1"/>
+              <a:t>Discountului</a:t>
+            </a:r>
+            <a:r>
+              <a:rPr lang="en-US" sz="1400" b="1" dirty="0"/>
+              <a:t> </a:t>
             </a:r>
           </a:p>
           <a:p>
@@ -4760,153 +5136,81 @@
               <a:buNone/>
             </a:pPr>
             <a:r>
-              <a:rPr lang="en-US" sz="1200" b="1" dirty="0"/>
-              <a:t>	</a:t>
-            </a:r>
-            <a:r>
-              <a:rPr lang="en-US" sz="1200" b="1" i="1" dirty="0"/>
-              <a:t>- </a:t>
-            </a:r>
-            <a:r>
-              <a:rPr lang="en-US" sz="1200" i="1" dirty="0"/>
-              <a:t>44 de features </a:t>
-            </a:r>
-            <a:r>
-              <a:rPr lang="en-US" sz="1200" i="1" dirty="0" err="1"/>
-              <a:t>organizate</a:t>
-            </a:r>
-            <a:r>
-              <a:rPr lang="en-US" sz="1200" i="1" dirty="0"/>
-              <a:t> </a:t>
-            </a:r>
-            <a:r>
-              <a:rPr lang="en-US" sz="1200" i="1" dirty="0" err="1"/>
-              <a:t>tematic</a:t>
-            </a:r>
-            <a:endParaRPr lang="en-US" sz="1200" i="1" dirty="0"/>
+              <a:rPr lang="en-US" sz="1400" b="1" dirty="0"/>
+              <a:t>	- </a:t>
+            </a:r>
+            <a:r>
+              <a:rPr lang="en-US" sz="1400" dirty="0" err="1"/>
+              <a:t>prag</a:t>
+            </a:r>
+            <a:r>
+              <a:rPr lang="en-US" sz="1400" b="1" dirty="0"/>
+              <a:t> </a:t>
+            </a:r>
+            <a:r>
+              <a:rPr lang="en-US" sz="1400" i="1" dirty="0"/>
+              <a:t>30%</a:t>
+            </a:r>
+            <a:endParaRPr lang="en-US" sz="1400" dirty="0"/>
           </a:p>
           <a:p>
             <a:pPr marL="0" indent="0">
               <a:buNone/>
             </a:pPr>
-            <a:endParaRPr lang="en-US" sz="1200" dirty="0"/>
+            <a:r>
+              <a:rPr lang="en-US" sz="1400" dirty="0"/>
+              <a:t>➡️ </a:t>
+            </a:r>
+            <a:r>
+              <a:rPr lang="en-US" sz="1400" b="1" dirty="0" err="1"/>
+              <a:t>Agregarea</a:t>
+            </a:r>
+            <a:r>
+              <a:rPr lang="en-US" sz="1400" b="1" dirty="0"/>
+              <a:t> </a:t>
+            </a:r>
+            <a:r>
+              <a:rPr lang="en-US" sz="1400" b="1" dirty="0" err="1"/>
+              <a:t>Datelor</a:t>
+            </a:r>
+            <a:r>
+              <a:rPr lang="en-US" sz="1400" b="1" dirty="0"/>
+              <a:t> </a:t>
+            </a:r>
+            <a:endParaRPr lang="en-US" sz="1400" dirty="0"/>
           </a:p>
           <a:p>
             <a:pPr marL="0" indent="0">
               <a:buNone/>
             </a:pPr>
             <a:r>
-              <a:rPr lang="en-US" sz="1200" dirty="0"/>
+              <a:rPr lang="en-US" sz="1400" i="1" dirty="0"/>
+              <a:t>	- Client × An × </a:t>
+            </a:r>
+            <a:r>
+              <a:rPr lang="en-US" sz="1400" i="1" dirty="0" err="1"/>
+              <a:t>Regiune</a:t>
+            </a:r>
+            <a:r>
+              <a:rPr lang="en-US" sz="1400" i="1" dirty="0"/>
+              <a:t> × Sub-</a:t>
+            </a:r>
+            <a:r>
+              <a:rPr lang="en-US" sz="1400" i="1" dirty="0" err="1"/>
+              <a:t>Categorie</a:t>
+            </a:r>
+            <a:endParaRPr lang="en-US" sz="1400" i="1" dirty="0"/>
+          </a:p>
+          <a:p>
+            <a:pPr marL="0" indent="0">
+              <a:buNone/>
+            </a:pPr>
+            <a:r>
+              <a:rPr lang="en-US" sz="1400" dirty="0"/>
               <a:t>➡️ </a:t>
             </a:r>
             <a:r>
-              <a:rPr lang="en-US" sz="1200" b="1" dirty="0" err="1"/>
-              <a:t>Impactul</a:t>
-            </a:r>
-            <a:r>
-              <a:rPr lang="en-US" sz="1200" b="1" dirty="0"/>
-              <a:t> </a:t>
-            </a:r>
-            <a:r>
-              <a:rPr lang="en-US" sz="1200" b="1" dirty="0" err="1"/>
-              <a:t>Discountului</a:t>
-            </a:r>
-            <a:r>
-              <a:rPr lang="en-US" sz="1200" b="1" dirty="0"/>
-              <a:t> </a:t>
-            </a:r>
-          </a:p>
-          <a:p>
-            <a:pPr marL="0" indent="0">
-              <a:buNone/>
-            </a:pPr>
-            <a:r>
-              <a:rPr lang="en-US" sz="1200" b="1" dirty="0"/>
-              <a:t>	- </a:t>
-            </a:r>
-            <a:r>
-              <a:rPr lang="en-US" sz="1200" dirty="0" err="1"/>
-              <a:t>prag</a:t>
-            </a:r>
-            <a:r>
-              <a:rPr lang="en-US" sz="1200" b="1" dirty="0"/>
-              <a:t> </a:t>
-            </a:r>
-            <a:r>
-              <a:rPr lang="en-US" sz="1200" i="1" dirty="0"/>
-              <a:t>30%</a:t>
-            </a:r>
-          </a:p>
-          <a:p>
-            <a:pPr marL="0" indent="0">
-              <a:buNone/>
-            </a:pPr>
-            <a:endParaRPr lang="en-US" sz="1200" dirty="0"/>
-          </a:p>
-          <a:p>
-            <a:pPr marL="0" indent="0">
-              <a:buNone/>
-            </a:pPr>
-            <a:r>
-              <a:rPr lang="en-US" sz="1200" dirty="0"/>
-              <a:t>➡️ </a:t>
-            </a:r>
-            <a:r>
-              <a:rPr lang="en-US" sz="1200" b="1" dirty="0" err="1"/>
-              <a:t>Agregarea</a:t>
-            </a:r>
-            <a:r>
-              <a:rPr lang="en-US" sz="1200" b="1" dirty="0"/>
-              <a:t> </a:t>
-            </a:r>
-            <a:r>
-              <a:rPr lang="en-US" sz="1200" b="1" dirty="0" err="1"/>
-              <a:t>Datelor</a:t>
-            </a:r>
-            <a:r>
-              <a:rPr lang="en-US" sz="1200" b="1" dirty="0"/>
-              <a:t> </a:t>
-            </a:r>
-            <a:endParaRPr lang="en-US" sz="1200" dirty="0"/>
-          </a:p>
-          <a:p>
-            <a:pPr marL="0" indent="0">
-              <a:buNone/>
-            </a:pPr>
-            <a:r>
-              <a:rPr lang="en-US" sz="1200" i="1" dirty="0"/>
-              <a:t>	- Client × An × </a:t>
-            </a:r>
-            <a:r>
-              <a:rPr lang="en-US" sz="1200" i="1" dirty="0" err="1"/>
-              <a:t>Regiune</a:t>
-            </a:r>
-            <a:r>
-              <a:rPr lang="en-US" sz="1200" i="1" dirty="0"/>
-              <a:t> × Sub-</a:t>
-            </a:r>
-            <a:r>
-              <a:rPr lang="en-US" sz="1200" i="1" dirty="0" err="1"/>
-              <a:t>Categorie</a:t>
-            </a:r>
-            <a:endParaRPr lang="en-US" sz="1200" i="1" dirty="0"/>
-          </a:p>
-          <a:p>
-            <a:pPr marL="0" indent="0">
-              <a:buNone/>
-            </a:pPr>
-            <a:endParaRPr lang="en-US" sz="1200" i="1" dirty="0"/>
-          </a:p>
-          <a:p>
-            <a:pPr marL="0" indent="0">
-              <a:buNone/>
-            </a:pPr>
-            <a:r>
-              <a:rPr lang="en-US" sz="1200" dirty="0"/>
-              <a:t>➡️ </a:t>
-            </a:r>
-            <a:r>
-              <a:rPr lang="en-US" sz="1200" b="1" dirty="0" err="1">
+              <a:rPr lang="en-US" sz="1400" b="1" dirty="0" err="1">
                 <a:solidFill>
                   <a:srgbClr val="002060"/>
                 </a:solidFill>
@@ -4914,7 +5218,7 @@
               <a:t>Winsorize</a:t>
             </a:r>
             <a:r>
-              <a:rPr lang="en-US" sz="1200" b="1" dirty="0">
+              <a:rPr lang="en-US" sz="1400" b="1" dirty="0">
                 <a:solidFill>
                   <a:srgbClr val="002060"/>
                 </a:solidFill>
@@ -4922,7 +5226,7 @@
               <a:t>:</a:t>
             </a:r>
             <a:r>
-              <a:rPr lang="en-US" sz="1200" dirty="0">
+              <a:rPr lang="en-US" sz="1400" dirty="0">
                 <a:solidFill>
                   <a:srgbClr val="002060"/>
                 </a:solidFill>
@@ -4935,7 +5239,7 @@
               <a:buNone/>
             </a:pPr>
             <a:r>
-              <a:rPr lang="en-US" sz="1200" dirty="0">
+              <a:rPr lang="en-US" sz="1400" dirty="0">
                 <a:solidFill>
                   <a:srgbClr val="002060"/>
                 </a:solidFill>
@@ -4943,46 +5247,33 @@
               <a:t>	- </a:t>
             </a:r>
             <a:r>
-              <a:rPr lang="en-US" sz="1200" i="1" dirty="0" err="1"/>
-              <a:t>Plafonarea</a:t>
-            </a:r>
-            <a:r>
-              <a:rPr lang="en-US" sz="1200" i="1" dirty="0"/>
-              <a:t> la </a:t>
-            </a:r>
-            <a:r>
-              <a:rPr lang="en-US" sz="1200" i="1" dirty="0" err="1"/>
+              <a:rPr lang="en-US" sz="1400" i="1" dirty="0" err="1"/>
               <a:t>percentilele</a:t>
             </a:r>
             <a:r>
-              <a:rPr lang="en-US" sz="1200" i="1" dirty="0"/>
+              <a:rPr lang="en-US" sz="1400" i="1" dirty="0"/>
               <a:t> 1% </a:t>
             </a:r>
             <a:r>
-              <a:rPr lang="en-US" sz="1200" i="1" dirty="0" err="1"/>
+              <a:rPr lang="en-US" sz="1400" i="1" dirty="0" err="1"/>
               <a:t>si</a:t>
             </a:r>
             <a:r>
-              <a:rPr lang="en-US" sz="1200" i="1" dirty="0"/>
+              <a:rPr lang="en-US" sz="1400" i="1" dirty="0"/>
               <a:t> 99% </a:t>
             </a:r>
+            <a:endParaRPr lang="en-US" sz="1400" dirty="0"/>
           </a:p>
           <a:p>
             <a:pPr marL="0" indent="0">
               <a:buNone/>
             </a:pPr>
-            <a:endParaRPr lang="en-US" sz="1200" dirty="0"/>
-          </a:p>
-          <a:p>
-            <a:pPr marL="0" indent="0">
-              <a:buNone/>
-            </a:pPr>
-            <a:r>
-              <a:rPr lang="en-US" sz="1200" dirty="0"/>
+            <a:r>
+              <a:rPr lang="en-US" sz="1400" dirty="0"/>
               <a:t>➡️ </a:t>
             </a:r>
             <a:r>
-              <a:rPr lang="en-US" sz="1200" b="1" dirty="0">
+              <a:rPr lang="en-US" sz="1400" b="1" dirty="0">
                 <a:solidFill>
                   <a:srgbClr val="002060"/>
                 </a:solidFill>
@@ -4990,7 +5281,7 @@
               <a:t>4 </a:t>
             </a:r>
             <a:r>
-              <a:rPr lang="en-US" sz="1200" b="1" dirty="0" err="1">
+              <a:rPr lang="en-US" sz="1400" b="1" dirty="0" err="1">
                 <a:solidFill>
                   <a:srgbClr val="002060"/>
                 </a:solidFill>
@@ -4998,7 +5289,7 @@
               <a:t>Clustere</a:t>
             </a:r>
             <a:r>
-              <a:rPr lang="en-US" sz="1200" b="1" dirty="0">
+              <a:rPr lang="en-US" sz="1400" b="1" dirty="0">
                 <a:solidFill>
                   <a:srgbClr val="002060"/>
                 </a:solidFill>
@@ -5014,7 +5305,7 @@
               <a:buNone/>
             </a:pPr>
             <a:r>
-              <a:rPr lang="en-US" sz="1200" b="1" i="1" dirty="0">
+              <a:rPr lang="en-US" sz="1400" b="1" i="1" dirty="0">
                 <a:solidFill>
                   <a:srgbClr val="002060"/>
                 </a:solidFill>
@@ -5022,7 +5313,7 @@
               <a:t>	- </a:t>
             </a:r>
             <a:r>
-              <a:rPr lang="en-US" sz="1200" i="1" dirty="0" err="1">
+              <a:rPr lang="en-US" sz="1400" i="1" dirty="0" err="1">
                 <a:solidFill>
                   <a:srgbClr val="002060"/>
                 </a:solidFill>
@@ -5030,10 +5321,10 @@
               <a:t>p</a:t>
             </a:r>
             <a:r>
-              <a:rPr lang="en-US" sz="1200" i="1" dirty="0" err="1"/>
+              <a:rPr lang="en-US" sz="1400" i="1" dirty="0" err="1"/>
               <a:t>rofitabili</a:t>
             </a:r>
-            <a:endParaRPr lang="en-US" sz="1200" dirty="0"/>
+            <a:endParaRPr lang="en-US" sz="1400" dirty="0"/>
           </a:p>
           <a:p>
             <a:pPr marL="457200" lvl="1" indent="0">
@@ -5043,10 +5334,10 @@
               <a:buNone/>
             </a:pPr>
             <a:r>
-              <a:rPr lang="en-US" sz="1200" i="1" dirty="0"/>
+              <a:rPr lang="en-US" sz="1400" i="1" dirty="0"/>
               <a:t>- discount mare</a:t>
             </a:r>
-            <a:endParaRPr lang="en-US" sz="1200" dirty="0"/>
+            <a:endParaRPr lang="en-US" sz="1400" dirty="0"/>
           </a:p>
           <a:p>
             <a:pPr marL="457200" lvl="1" indent="0">
@@ -5056,14 +5347,14 @@
               <a:buNone/>
             </a:pPr>
             <a:r>
-              <a:rPr lang="en-US" sz="1200" i="1" dirty="0"/>
+              <a:rPr lang="en-US" sz="1400" i="1" dirty="0"/>
               <a:t>- </a:t>
             </a:r>
             <a:r>
-              <a:rPr lang="en-US" sz="1200" i="1" dirty="0" err="1"/>
-              <a:t>occasionali</a:t>
-            </a:r>
-            <a:endParaRPr lang="en-US" sz="1200" dirty="0"/>
+              <a:rPr lang="en-US" sz="1400" i="1" dirty="0" err="1"/>
+              <a:t>ocasionali</a:t>
+            </a:r>
+            <a:endParaRPr lang="en-US" sz="1400" dirty="0"/>
           </a:p>
           <a:p>
             <a:pPr marL="457200" lvl="1" indent="0">
@@ -5073,30 +5364,136 @@
               <a:buNone/>
             </a:pPr>
             <a:r>
-              <a:rPr lang="en-US" sz="1200" i="1" dirty="0"/>
+              <a:rPr lang="en-US" sz="1400" i="1" dirty="0"/>
               <a:t>- </a:t>
             </a:r>
             <a:r>
-              <a:rPr lang="en-US" sz="1200" i="1" dirty="0" err="1"/>
+              <a:rPr lang="en-US" sz="1400" i="1" dirty="0" err="1"/>
               <a:t>volum</a:t>
             </a:r>
             <a:r>
-              <a:rPr lang="en-US" sz="1200" i="1" dirty="0"/>
+              <a:rPr lang="en-US" sz="1400" i="1" dirty="0"/>
               <a:t> mare, </a:t>
             </a:r>
             <a:r>
-              <a:rPr lang="en-US" sz="1200" i="1" dirty="0" err="1"/>
+              <a:rPr lang="en-US" sz="1400" i="1" dirty="0" err="1"/>
               <a:t>marja</a:t>
             </a:r>
             <a:r>
-              <a:rPr lang="en-US" sz="1200" i="1" dirty="0"/>
-              <a:t> </a:t>
-            </a:r>
-            <a:r>
-              <a:rPr lang="en-US" sz="1200" i="1" dirty="0" err="1"/>
+              <a:rPr lang="en-US" sz="1400" i="1" dirty="0"/>
+              <a:t> </a:t>
+            </a:r>
+            <a:r>
+              <a:rPr lang="en-US" sz="1400" i="1" dirty="0" err="1"/>
               <a:t>medie</a:t>
             </a:r>
-            <a:endParaRPr lang="en-US" sz="1200" i="1" dirty="0"/>
+            <a:endParaRPr lang="en-US" sz="1400" i="1" dirty="0"/>
+          </a:p>
+          <a:p>
+            <a:pPr marL="57150" indent="0">
+              <a:spcBef>
+                <a:spcPts val="0"/>
+              </a:spcBef>
+              <a:buNone/>
+            </a:pPr>
+            <a:r>
+              <a:rPr lang="en-US" sz="1400" dirty="0"/>
+              <a:t>➡️ </a:t>
+            </a:r>
+            <a:r>
+              <a:rPr lang="en-US" sz="1400" b="1" dirty="0" err="1">
+                <a:solidFill>
+                  <a:srgbClr val="002060"/>
+                </a:solidFill>
+              </a:rPr>
+              <a:t>HistGBRegressor</a:t>
+            </a:r>
+            <a:endParaRPr lang="en-US" sz="1400" b="1" dirty="0">
+              <a:solidFill>
+                <a:srgbClr val="002060"/>
+              </a:solidFill>
+            </a:endParaRPr>
+          </a:p>
+          <a:p>
+            <a:pPr marL="57150" indent="0">
+              <a:spcBef>
+                <a:spcPts val="0"/>
+              </a:spcBef>
+              <a:buNone/>
+            </a:pPr>
+            <a:r>
+              <a:rPr lang="en-US" sz="1400" b="1" dirty="0">
+                <a:solidFill>
+                  <a:srgbClr val="002060"/>
+                </a:solidFill>
+              </a:rPr>
+              <a:t>	</a:t>
+            </a:r>
+            <a:r>
+              <a:rPr lang="en-US" sz="1400" b="1" i="1" dirty="0">
+                <a:solidFill>
+                  <a:srgbClr val="002060"/>
+                </a:solidFill>
+              </a:rPr>
+              <a:t>- </a:t>
+            </a:r>
+            <a:r>
+              <a:rPr lang="en-US" sz="1400" i="1" dirty="0" err="1"/>
+              <a:t>max_iter</a:t>
+            </a:r>
+            <a:r>
+              <a:rPr lang="en-US" sz="1400" i="1" dirty="0"/>
+              <a:t>=1500, </a:t>
+            </a:r>
+            <a:r>
+              <a:rPr lang="en-US" sz="1400" i="1" dirty="0" err="1"/>
+              <a:t>max_depth</a:t>
+            </a:r>
+            <a:r>
+              <a:rPr lang="en-US" sz="1400" i="1" dirty="0"/>
+              <a:t>=5</a:t>
+            </a:r>
+          </a:p>
+          <a:p>
+            <a:pPr marL="57150" indent="0">
+              <a:spcBef>
+                <a:spcPts val="0"/>
+              </a:spcBef>
+              <a:buNone/>
+            </a:pPr>
+            <a:r>
+              <a:rPr lang="en-US" sz="1400" i="1" dirty="0"/>
+              <a:t>	- </a:t>
+            </a:r>
+            <a:r>
+              <a:rPr lang="en-US" sz="1400" i="1" dirty="0" err="1"/>
+              <a:t>learning_rate</a:t>
+            </a:r>
+            <a:r>
+              <a:rPr lang="en-US" sz="1400" i="1" dirty="0"/>
+              <a:t>=0.01</a:t>
+            </a:r>
+          </a:p>
+          <a:p>
+            <a:pPr marL="57150" indent="0">
+              <a:spcBef>
+                <a:spcPts val="0"/>
+              </a:spcBef>
+              <a:buNone/>
+            </a:pPr>
+            <a:r>
+              <a:rPr lang="en-US" sz="1400" i="1" dirty="0"/>
+              <a:t>	- early-stopping pe </a:t>
+            </a:r>
+            <a:r>
+              <a:rPr lang="en-US" sz="1400" i="1" dirty="0" err="1"/>
+              <a:t>neg_mae</a:t>
+            </a:r>
+            <a:endParaRPr lang="en-US" sz="1400" b="1" dirty="0">
+              <a:solidFill>
+                <a:srgbClr val="002060"/>
+              </a:solidFill>
+            </a:endParaRPr>
           </a:p>
           <a:p>
             <a:pPr lvl="1">
@@ -5104,130 +5501,137 @@
                 <a:spcPts val="0"/>
               </a:spcBef>
             </a:pPr>
-            <a:endParaRPr lang="en-US" sz="1200" i="1" dirty="0"/>
-          </a:p>
-          <a:p>
-            <a:pPr marL="57150" indent="0">
-              <a:spcBef>
-                <a:spcPts val="0"/>
-              </a:spcBef>
+            <a:endParaRPr lang="en-US" sz="1400" b="1" dirty="0"/>
+          </a:p>
+          <a:p>
+            <a:pPr marL="0" indent="0">
               <a:buNone/>
             </a:pPr>
-            <a:r>
-              <a:rPr lang="en-US" sz="1200" dirty="0"/>
-              <a:t>➡️ </a:t>
-            </a:r>
-            <a:r>
-              <a:rPr lang="en-US" sz="1200" b="1" dirty="0" err="1">
-                <a:solidFill>
-                  <a:srgbClr val="002060"/>
-                </a:solidFill>
-              </a:rPr>
-              <a:t>HistGBRegressor</a:t>
-            </a:r>
-            <a:endParaRPr lang="en-US" sz="1200" b="1" dirty="0">
-              <a:solidFill>
-                <a:srgbClr val="002060"/>
-              </a:solidFill>
-            </a:endParaRPr>
-          </a:p>
-          <a:p>
-            <a:pPr marL="57150" indent="0">
-              <a:spcBef>
-                <a:spcPts val="0"/>
-              </a:spcBef>
-              <a:buNone/>
-            </a:pPr>
-            <a:r>
-              <a:rPr lang="en-US" sz="1200" b="1" dirty="0">
-                <a:solidFill>
-                  <a:srgbClr val="002060"/>
-                </a:solidFill>
-              </a:rPr>
-              <a:t>	</a:t>
-            </a:r>
-            <a:r>
-              <a:rPr lang="en-US" sz="1200" b="1" i="1" dirty="0">
-                <a:solidFill>
-                  <a:srgbClr val="002060"/>
-                </a:solidFill>
-              </a:rPr>
-              <a:t>- </a:t>
-            </a:r>
-            <a:r>
-              <a:rPr lang="en-US" sz="1200" i="1" dirty="0" err="1"/>
-              <a:t>max_iter</a:t>
-            </a:r>
-            <a:r>
-              <a:rPr lang="en-US" sz="1200" i="1" dirty="0"/>
-              <a:t>=1500, </a:t>
-            </a:r>
-            <a:r>
-              <a:rPr lang="en-US" sz="1200" i="1" dirty="0" err="1"/>
-              <a:t>max_depth</a:t>
-            </a:r>
-            <a:r>
-              <a:rPr lang="en-US" sz="1200" i="1" dirty="0"/>
-              <a:t>=5</a:t>
-            </a:r>
-          </a:p>
-          <a:p>
-            <a:pPr marL="57150" indent="0">
-              <a:spcBef>
-                <a:spcPts val="0"/>
-              </a:spcBef>
-              <a:buNone/>
-            </a:pPr>
-            <a:r>
-              <a:rPr lang="en-US" sz="1200" i="1" dirty="0"/>
-              <a:t>	- </a:t>
-            </a:r>
-            <a:r>
-              <a:rPr lang="en-US" sz="1200" i="1" dirty="0" err="1"/>
-              <a:t>learning_rate</a:t>
-            </a:r>
-            <a:r>
-              <a:rPr lang="en-US" sz="1200" i="1" dirty="0"/>
-              <a:t>=0.01</a:t>
-            </a:r>
-          </a:p>
-          <a:p>
-            <a:pPr marL="57150" indent="0">
-              <a:spcBef>
-                <a:spcPts val="0"/>
-              </a:spcBef>
-              <a:buNone/>
-            </a:pPr>
-            <a:r>
-              <a:rPr lang="en-US" sz="1200" i="1" dirty="0"/>
-              <a:t>	- early-stopping pe </a:t>
-            </a:r>
-            <a:r>
-              <a:rPr lang="en-US" sz="1200" i="1" dirty="0" err="1"/>
-              <a:t>neg_mae</a:t>
-            </a:r>
-            <a:endParaRPr lang="en-US" sz="1200" b="1" dirty="0">
-              <a:solidFill>
-                <a:srgbClr val="002060"/>
-              </a:solidFill>
-            </a:endParaRPr>
-          </a:p>
-          <a:p>
-            <a:pPr lvl="1">
-              <a:spcBef>
-                <a:spcPts val="0"/>
-              </a:spcBef>
-            </a:pPr>
-            <a:endParaRPr lang="en-US" sz="1200" b="1" dirty="0"/>
-          </a:p>
-          <a:p>
-            <a:pPr marL="0" indent="0">
-              <a:buNone/>
-            </a:pPr>
-            <a:endParaRPr lang="en-US" sz="1200" dirty="0"/>
+            <a:endParaRPr lang="en-US" sz="1400" dirty="0"/>
           </a:p>
         </p:txBody>
       </p:sp>
+      <p:grpSp>
+        <p:nvGrpSpPr>
+          <p:cNvPr id="2" name="Group 1">
+            <a:extLst>
+              <a:ext uri="{FF2B5EF4-FFF2-40B4-BE49-F238E27FC236}">
+                <a16:creationId xmlns:a16="http://schemas.microsoft.com/office/drawing/2014/main" id="{28299CAA-F949-E934-3A2C-C22BEF974D74}"/>
+              </a:ext>
+            </a:extLst>
+          </p:cNvPr>
+          <p:cNvGrpSpPr/>
+          <p:nvPr/>
+        </p:nvGrpSpPr>
+        <p:grpSpPr>
+          <a:xfrm>
+            <a:off x="0" y="1"/>
+            <a:ext cx="9144000" cy="588501"/>
+            <a:chOff x="0" y="0"/>
+            <a:chExt cx="9144000" cy="658368"/>
+          </a:xfrm>
+        </p:grpSpPr>
+        <p:sp>
+          <p:nvSpPr>
+            <p:cNvPr id="3" name="Shape 0">
+              <a:extLst>
+                <a:ext uri="{FF2B5EF4-FFF2-40B4-BE49-F238E27FC236}">
+                  <a16:creationId xmlns:a16="http://schemas.microsoft.com/office/drawing/2014/main" id="{CB8B4E62-2D15-C02F-A2E5-BAC41B984225}"/>
+                </a:ext>
+              </a:extLst>
+            </p:cNvPr>
+            <p:cNvSpPr/>
+            <p:nvPr/>
+          </p:nvSpPr>
+          <p:spPr>
+            <a:xfrm>
+              <a:off x="0" y="0"/>
+              <a:ext cx="9144000" cy="658368"/>
+            </a:xfrm>
+            <a:prstGeom prst="rect">
+              <a:avLst/>
+            </a:prstGeom>
+            <a:solidFill>
+              <a:srgbClr val="1E2761"/>
+            </a:solidFill>
+            <a:ln w="12700">
+              <a:solidFill>
+                <a:srgbClr val="1E2761"/>
+              </a:solidFill>
+              <a:prstDash val="solid"/>
+            </a:ln>
+          </p:spPr>
+          <p:txBody>
+            <a:bodyPr/>
+            <a:lstStyle/>
+            <a:p>
+              <a:endParaRPr lang="en-US"/>
+            </a:p>
+          </p:txBody>
+        </p:sp>
+        <p:sp>
+          <p:nvSpPr>
+            <p:cNvPr id="4" name="Title 1">
+              <a:extLst>
+                <a:ext uri="{FF2B5EF4-FFF2-40B4-BE49-F238E27FC236}">
+                  <a16:creationId xmlns:a16="http://schemas.microsoft.com/office/drawing/2014/main" id="{769F40F2-1E39-67BD-2F10-1ABA87E031B6}"/>
+                </a:ext>
+              </a:extLst>
+            </p:cNvPr>
+            <p:cNvSpPr txBox="1">
+              <a:spLocks/>
+            </p:cNvSpPr>
+            <p:nvPr/>
+          </p:nvSpPr>
+          <p:spPr>
+            <a:xfrm>
+              <a:off x="254000" y="76200"/>
+              <a:ext cx="8796866" cy="464158"/>
+            </a:xfrm>
+            <a:prstGeom prst="rect">
+              <a:avLst/>
+            </a:prstGeom>
+          </p:spPr>
+          <p:txBody>
+            <a:bodyPr vert="horz" lIns="91440" tIns="45720" rIns="91440" bIns="45720" rtlCol="0" anchor="ctr">
+              <a:noAutofit/>
+            </a:bodyPr>
+            <a:lstStyle>
+              <a:lvl1pPr algn="ctr" defTabSz="457200" rtl="0" eaLnBrk="1" latinLnBrk="0" hangingPunct="1">
+                <a:spcBef>
+                  <a:spcPct val="0"/>
+                </a:spcBef>
+                <a:buNone/>
+                <a:defRPr sz="4400" kern="1200">
+                  <a:solidFill>
+                    <a:schemeClr val="tx1"/>
+                  </a:solidFill>
+                  <a:latin typeface="+mj-lt"/>
+                  <a:ea typeface="+mj-ea"/>
+                  <a:cs typeface="+mj-cs"/>
+                </a:defRPr>
+              </a:lvl1pPr>
+            </a:lstStyle>
+            <a:p>
+              <a:pPr algn="l"/>
+              <a:r>
+                <a:rPr lang="en-US" sz="4000" b="1" dirty="0">
+                  <a:solidFill>
+                    <a:schemeClr val="bg1"/>
+                  </a:solidFill>
+                </a:rPr>
+                <a:t>Model</a:t>
+              </a:r>
+              <a:endParaRPr lang="en-US" sz="4000" b="1" dirty="0">
+                <a:solidFill>
+                  <a:schemeClr val="bg1"/>
+                </a:solidFill>
+                <a:latin typeface="Arial"/>
+              </a:endParaRPr>
+            </a:p>
+          </p:txBody>
+        </p:sp>
+      </p:grpSp>
     </p:spTree>
     <p:extLst>
       <p:ext uri="{BB962C8B-B14F-4D97-AF65-F5344CB8AC3E}">
@@ -5260,93 +5664,6 @@
       </p:grpSpPr>
       <p:sp>
         <p:nvSpPr>
-          <p:cNvPr id="2" name="Title 1">
-            <a:extLst>
-              <a:ext uri="{FF2B5EF4-FFF2-40B4-BE49-F238E27FC236}">
-                <a16:creationId xmlns:a16="http://schemas.microsoft.com/office/drawing/2014/main" id="{91A346F9-1EC7-07DB-A57D-3F46CE4CA48D}"/>
-              </a:ext>
-            </a:extLst>
-          </p:cNvPr>
-          <p:cNvSpPr>
-            <a:spLocks noGrp="1"/>
-          </p:cNvSpPr>
-          <p:nvPr>
-            <p:ph type="title"/>
-          </p:nvPr>
-        </p:nvSpPr>
-        <p:spPr/>
-        <p:txBody>
-          <a:bodyPr>
-            <a:normAutofit/>
-          </a:bodyPr>
-          <a:lstStyle/>
-          <a:p>
-            <a:r>
-              <a:rPr lang="en-US" b="1" dirty="0" err="1">
-                <a:solidFill>
-                  <a:srgbClr val="002060"/>
-                </a:solidFill>
-              </a:rPr>
-              <a:t>Rezulte</a:t>
-            </a:r>
-            <a:r>
-              <a:rPr lang="en-US" b="1" dirty="0">
-                <a:solidFill>
-                  <a:srgbClr val="002060"/>
-                </a:solidFill>
-              </a:rPr>
-              <a:t>: </a:t>
-            </a:r>
-            <a:r>
-              <a:rPr lang="en-US" sz="4000" b="1" dirty="0" err="1">
-                <a:solidFill>
-                  <a:srgbClr val="002060"/>
-                </a:solidFill>
-              </a:rPr>
-              <a:t>Performanta</a:t>
-            </a:r>
-            <a:r>
-              <a:rPr lang="en-US" b="1" dirty="0">
-                <a:solidFill>
-                  <a:srgbClr val="002060"/>
-                </a:solidFill>
-              </a:rPr>
-              <a:t> </a:t>
-            </a:r>
-            <a:r>
-              <a:rPr lang="en-US" b="1" dirty="0" err="1">
-                <a:solidFill>
-                  <a:srgbClr val="002060"/>
-                </a:solidFill>
-              </a:rPr>
-              <a:t>si</a:t>
-            </a:r>
-            <a:r>
-              <a:rPr lang="en-US" b="1" dirty="0">
-                <a:solidFill>
-                  <a:srgbClr val="002060"/>
-                </a:solidFill>
-              </a:rPr>
-              <a:t> </a:t>
-            </a:r>
-            <a:r>
-              <a:rPr lang="en-US" b="1" dirty="0" err="1">
-                <a:solidFill>
-                  <a:srgbClr val="002060"/>
-                </a:solidFill>
-              </a:rPr>
-              <a:t>Validare</a:t>
-            </a:r>
-            <a:endParaRPr lang="en-US" dirty="0">
-              <a:solidFill>
-                <a:srgbClr val="002060"/>
-              </a:solidFill>
-            </a:endParaRPr>
-          </a:p>
-        </p:txBody>
-      </p:sp>
-      <p:sp>
-        <p:nvSpPr>
           <p:cNvPr id="5" name="TextBox 4">
             <a:extLst>
               <a:ext uri="{FF2B5EF4-FFF2-40B4-BE49-F238E27FC236}">
@@ -5359,7 +5676,7 @@
         </p:nvSpPr>
         <p:spPr>
           <a:xfrm>
-            <a:off x="385234" y="1280458"/>
+            <a:off x="381000" y="928130"/>
             <a:ext cx="8542866" cy="1384995"/>
           </a:xfrm>
           <a:prstGeom prst="rect">
@@ -5481,7 +5798,7 @@
         </p:nvSpPr>
         <p:spPr>
           <a:xfrm>
-            <a:off x="385234" y="2740502"/>
+            <a:off x="381000" y="2508145"/>
             <a:ext cx="7725833" cy="1292662"/>
           </a:xfrm>
           <a:prstGeom prst="rect">
@@ -5715,14 +6032,183 @@
         </p:blipFill>
         <p:spPr>
           <a:xfrm>
-            <a:off x="385234" y="3889651"/>
-            <a:ext cx="7962899" cy="2968349"/>
+            <a:off x="385234" y="3736579"/>
+            <a:ext cx="8373532" cy="3121421"/>
           </a:xfrm>
           <a:prstGeom prst="rect">
             <a:avLst/>
           </a:prstGeom>
         </p:spPr>
       </p:pic>
+      <p:grpSp>
+        <p:nvGrpSpPr>
+          <p:cNvPr id="3" name="Group 2">
+            <a:extLst>
+              <a:ext uri="{FF2B5EF4-FFF2-40B4-BE49-F238E27FC236}">
+                <a16:creationId xmlns:a16="http://schemas.microsoft.com/office/drawing/2014/main" id="{239D4E2E-F97C-A224-011D-1BC6DF040CAA}"/>
+              </a:ext>
+            </a:extLst>
+          </p:cNvPr>
+          <p:cNvGrpSpPr/>
+          <p:nvPr/>
+        </p:nvGrpSpPr>
+        <p:grpSpPr>
+          <a:xfrm>
+            <a:off x="0" y="1"/>
+            <a:ext cx="9144000" cy="604568"/>
+            <a:chOff x="0" y="0"/>
+            <a:chExt cx="9144000" cy="658368"/>
+          </a:xfrm>
+        </p:grpSpPr>
+        <p:sp>
+          <p:nvSpPr>
+            <p:cNvPr id="4" name="Shape 0">
+              <a:extLst>
+                <a:ext uri="{FF2B5EF4-FFF2-40B4-BE49-F238E27FC236}">
+                  <a16:creationId xmlns:a16="http://schemas.microsoft.com/office/drawing/2014/main" id="{E1C6C19C-9E4E-E795-67B9-1C662F47A788}"/>
+                </a:ext>
+              </a:extLst>
+            </p:cNvPr>
+            <p:cNvSpPr/>
+            <p:nvPr/>
+          </p:nvSpPr>
+          <p:spPr>
+            <a:xfrm>
+              <a:off x="0" y="0"/>
+              <a:ext cx="9144000" cy="658368"/>
+            </a:xfrm>
+            <a:prstGeom prst="rect">
+              <a:avLst/>
+            </a:prstGeom>
+            <a:solidFill>
+              <a:srgbClr val="1E2761"/>
+            </a:solidFill>
+            <a:ln w="12700">
+              <a:solidFill>
+                <a:srgbClr val="1E2761"/>
+              </a:solidFill>
+              <a:prstDash val="solid"/>
+            </a:ln>
+          </p:spPr>
+          <p:txBody>
+            <a:bodyPr/>
+            <a:lstStyle/>
+            <a:p>
+              <a:endParaRPr lang="en-US"/>
+            </a:p>
+          </p:txBody>
+        </p:sp>
+        <p:sp>
+          <p:nvSpPr>
+            <p:cNvPr id="6" name="Title 1">
+              <a:extLst>
+                <a:ext uri="{FF2B5EF4-FFF2-40B4-BE49-F238E27FC236}">
+                  <a16:creationId xmlns:a16="http://schemas.microsoft.com/office/drawing/2014/main" id="{284EDDA4-0C06-080A-A03B-054DE7E30B0F}"/>
+                </a:ext>
+              </a:extLst>
+            </p:cNvPr>
+            <p:cNvSpPr txBox="1">
+              <a:spLocks/>
+            </p:cNvSpPr>
+            <p:nvPr/>
+          </p:nvSpPr>
+          <p:spPr>
+            <a:xfrm>
+              <a:off x="254000" y="76200"/>
+              <a:ext cx="8796866" cy="464158"/>
+            </a:xfrm>
+            <a:prstGeom prst="rect">
+              <a:avLst/>
+            </a:prstGeom>
+          </p:spPr>
+          <p:txBody>
+            <a:bodyPr vert="horz" lIns="91440" tIns="45720" rIns="91440" bIns="45720" rtlCol="0" anchor="ctr">
+              <a:noAutofit/>
+            </a:bodyPr>
+            <a:lstStyle>
+              <a:lvl1pPr algn="ctr" defTabSz="457200" rtl="0" eaLnBrk="1" latinLnBrk="0" hangingPunct="1">
+                <a:spcBef>
+                  <a:spcPct val="0"/>
+                </a:spcBef>
+                <a:buNone/>
+                <a:defRPr sz="4400" kern="1200">
+                  <a:solidFill>
+                    <a:schemeClr val="tx1"/>
+                  </a:solidFill>
+                  <a:latin typeface="+mj-lt"/>
+                  <a:ea typeface="+mj-ea"/>
+                  <a:cs typeface="+mj-cs"/>
+                </a:defRPr>
+              </a:lvl1pPr>
+            </a:lstStyle>
+            <a:p>
+              <a:pPr algn="l"/>
+              <a:r>
+                <a:rPr lang="en-US" sz="4000" b="1" dirty="0" err="1">
+                  <a:solidFill>
+                    <a:schemeClr val="bg1"/>
+                  </a:solidFill>
+                </a:rPr>
+                <a:t>Rezulte</a:t>
+              </a:r>
+              <a:r>
+                <a:rPr lang="en-US" sz="4000" b="1" dirty="0">
+                  <a:solidFill>
+                    <a:schemeClr val="bg1"/>
+                  </a:solidFill>
+                </a:rPr>
+                <a:t>: </a:t>
+              </a:r>
+              <a:r>
+                <a:rPr lang="en-US" sz="3600" b="1" dirty="0" err="1">
+                  <a:solidFill>
+                    <a:schemeClr val="bg1"/>
+                  </a:solidFill>
+                </a:rPr>
+                <a:t>Performanta</a:t>
+              </a:r>
+              <a:r>
+                <a:rPr lang="en-US" sz="4000" b="1" dirty="0">
+                  <a:solidFill>
+                    <a:schemeClr val="bg1"/>
+                  </a:solidFill>
+                </a:rPr>
+                <a:t> </a:t>
+              </a:r>
+              <a:r>
+                <a:rPr lang="en-US" sz="4000" b="1" dirty="0" err="1">
+                  <a:solidFill>
+                    <a:schemeClr val="bg1"/>
+                  </a:solidFill>
+                </a:rPr>
+                <a:t>si</a:t>
+              </a:r>
+              <a:r>
+                <a:rPr lang="en-US" sz="4000" b="1" dirty="0">
+                  <a:solidFill>
+                    <a:schemeClr val="bg1"/>
+                  </a:solidFill>
+                </a:rPr>
+                <a:t> </a:t>
+              </a:r>
+              <a:r>
+                <a:rPr lang="en-US" sz="4000" b="1" dirty="0" err="1">
+                  <a:solidFill>
+                    <a:schemeClr val="bg1"/>
+                  </a:solidFill>
+                </a:rPr>
+                <a:t>Validare</a:t>
+              </a:r>
+              <a:endParaRPr lang="en-US" sz="4000" b="1" dirty="0">
+                <a:solidFill>
+                  <a:schemeClr val="bg1"/>
+                </a:solidFill>
+                <a:latin typeface="Arial"/>
+              </a:endParaRPr>
+            </a:p>
+          </p:txBody>
+        </p:sp>
+      </p:grpSp>
     </p:spTree>
     <p:extLst>
       <p:ext uri="{BB962C8B-B14F-4D97-AF65-F5344CB8AC3E}">
@@ -5755,85 +6241,6 @@
       </p:grpSpPr>
       <p:sp>
         <p:nvSpPr>
-          <p:cNvPr id="2" name="Title 1">
-            <a:extLst>
-              <a:ext uri="{FF2B5EF4-FFF2-40B4-BE49-F238E27FC236}">
-                <a16:creationId xmlns:a16="http://schemas.microsoft.com/office/drawing/2014/main" id="{62630453-D7A6-EC2A-A006-0492367EFC9B}"/>
-              </a:ext>
-            </a:extLst>
-          </p:cNvPr>
-          <p:cNvSpPr>
-            <a:spLocks noGrp="1"/>
-          </p:cNvSpPr>
-          <p:nvPr>
-            <p:ph type="title"/>
-          </p:nvPr>
-        </p:nvSpPr>
-        <p:spPr/>
-        <p:txBody>
-          <a:bodyPr>
-            <a:normAutofit fontScale="90000"/>
-          </a:bodyPr>
-          <a:lstStyle/>
-          <a:p>
-            <a:r>
-              <a:rPr lang="en-US" b="1" dirty="0" err="1">
-                <a:solidFill>
-                  <a:srgbClr val="002060"/>
-                </a:solidFill>
-              </a:rPr>
-              <a:t>Concluzii</a:t>
-            </a:r>
-            <a:r>
-              <a:rPr lang="en-US" b="1" dirty="0">
-                <a:solidFill>
-                  <a:srgbClr val="002060"/>
-                </a:solidFill>
-              </a:rPr>
-              <a:t> </a:t>
-            </a:r>
-            <a:r>
-              <a:rPr lang="en-US" b="1" dirty="0" err="1">
-                <a:solidFill>
-                  <a:srgbClr val="002060"/>
-                </a:solidFill>
-              </a:rPr>
-              <a:t>si</a:t>
-            </a:r>
-            <a:r>
-              <a:rPr lang="en-US" b="1" dirty="0">
-                <a:solidFill>
-                  <a:srgbClr val="002060"/>
-                </a:solidFill>
-              </a:rPr>
-              <a:t> </a:t>
-            </a:r>
-            <a:r>
-              <a:rPr lang="en-US" b="1" dirty="0" err="1">
-                <a:solidFill>
-                  <a:srgbClr val="002060"/>
-                </a:solidFill>
-              </a:rPr>
-              <a:t>Implementare</a:t>
-            </a:r>
-            <a:r>
-              <a:rPr lang="en-US" b="1" dirty="0">
-                <a:solidFill>
-                  <a:srgbClr val="002060"/>
-                </a:solidFill>
-              </a:rPr>
-              <a:t> in Business</a:t>
-            </a:r>
-            <a:endParaRPr lang="en-US" dirty="0">
-              <a:solidFill>
-                <a:srgbClr val="002060"/>
-              </a:solidFill>
-            </a:endParaRPr>
-          </a:p>
-        </p:txBody>
-      </p:sp>
-      <p:sp>
-        <p:nvSpPr>
           <p:cNvPr id="3" name="Content Placeholder 2">
             <a:extLst>
               <a:ext uri="{FF2B5EF4-FFF2-40B4-BE49-F238E27FC236}">
@@ -5848,7 +6255,12 @@
             <p:ph idx="1"/>
           </p:nvPr>
         </p:nvSpPr>
-        <p:spPr/>
+        <p:spPr>
+          <a:xfrm>
+            <a:off x="254000" y="1049867"/>
+            <a:ext cx="8229600" cy="4754563"/>
+          </a:xfrm>
+        </p:spPr>
         <p:txBody>
           <a:bodyPr/>
           <a:lstStyle/>
@@ -5908,11 +6320,11 @@
               <a:t>-un </a:t>
             </a:r>
             <a:r>
-              <a:rPr lang="en-US" sz="1600" b="1" dirty="0" err="1"/>
+              <a:rPr lang="en-US" sz="1600" dirty="0" err="1"/>
               <a:t>sistem</a:t>
             </a:r>
             <a:r>
-              <a:rPr lang="en-US" sz="1600" b="1" dirty="0"/>
+              <a:rPr lang="en-US" sz="1600" dirty="0"/>
               <a:t> de </a:t>
             </a:r>
             <a:r>
@@ -5927,10 +6339,7 @@
               <a:rPr lang="en-US" sz="1600" b="1" dirty="0" err="1"/>
               <a:t>discounturilor</a:t>
             </a:r>
-            <a:r>
-              <a:rPr lang="en-US" sz="1600" dirty="0"/>
-              <a:t>.</a:t>
-            </a:r>
+            <a:endParaRPr lang="en-US" sz="1600" dirty="0"/>
           </a:p>
           <a:p>
             <a:pPr marL="0" indent="0">
@@ -5999,10 +6408,7 @@
               <a:rPr lang="en-US" sz="1600" b="1" dirty="0" err="1"/>
               <a:t>profitul</a:t>
             </a:r>
-            <a:r>
-              <a:rPr lang="en-US" sz="1600" dirty="0"/>
-              <a:t>.</a:t>
-            </a:r>
+            <a:endParaRPr lang="en-US" sz="1600" dirty="0"/>
           </a:p>
           <a:p>
             <a:pPr marL="0" indent="0">
@@ -6079,16 +6485,174 @@
               <a:rPr lang="en-US" sz="1600" b="1" dirty="0" err="1"/>
               <a:t>produse</a:t>
             </a:r>
-            <a:r>
-              <a:rPr lang="en-US" sz="1600" dirty="0"/>
-              <a:t>.</a:t>
-            </a:r>
+            <a:endParaRPr lang="en-US" sz="1600" dirty="0"/>
           </a:p>
           <a:p>
             <a:endParaRPr lang="en-US" dirty="0"/>
           </a:p>
         </p:txBody>
       </p:sp>
+      <p:grpSp>
+        <p:nvGrpSpPr>
+          <p:cNvPr id="4" name="Group 3">
+            <a:extLst>
+              <a:ext uri="{FF2B5EF4-FFF2-40B4-BE49-F238E27FC236}">
+                <a16:creationId xmlns:a16="http://schemas.microsoft.com/office/drawing/2014/main" id="{C1AB67C7-3A20-157B-3FB7-D8493A86CE56}"/>
+              </a:ext>
+            </a:extLst>
+          </p:cNvPr>
+          <p:cNvGrpSpPr/>
+          <p:nvPr/>
+        </p:nvGrpSpPr>
+        <p:grpSpPr>
+          <a:xfrm>
+            <a:off x="0" y="1"/>
+            <a:ext cx="9144000" cy="604568"/>
+            <a:chOff x="0" y="0"/>
+            <a:chExt cx="9144000" cy="658368"/>
+          </a:xfrm>
+        </p:grpSpPr>
+        <p:sp>
+          <p:nvSpPr>
+            <p:cNvPr id="5" name="Shape 0">
+              <a:extLst>
+                <a:ext uri="{FF2B5EF4-FFF2-40B4-BE49-F238E27FC236}">
+                  <a16:creationId xmlns:a16="http://schemas.microsoft.com/office/drawing/2014/main" id="{7A450920-499B-B4F4-48C8-5B22B9FA83AE}"/>
+                </a:ext>
+              </a:extLst>
+            </p:cNvPr>
+            <p:cNvSpPr/>
+            <p:nvPr/>
+          </p:nvSpPr>
+          <p:spPr>
+            <a:xfrm>
+              <a:off x="0" y="0"/>
+              <a:ext cx="9144000" cy="658368"/>
+            </a:xfrm>
+            <a:prstGeom prst="rect">
+              <a:avLst/>
+            </a:prstGeom>
+            <a:solidFill>
+              <a:srgbClr val="1E2761"/>
+            </a:solidFill>
+            <a:ln w="12700">
+              <a:solidFill>
+                <a:srgbClr val="1E2761"/>
+              </a:solidFill>
+              <a:prstDash val="solid"/>
+            </a:ln>
+          </p:spPr>
+          <p:txBody>
+            <a:bodyPr/>
+            <a:lstStyle/>
+            <a:p>
+              <a:endParaRPr lang="en-US"/>
+            </a:p>
+          </p:txBody>
+        </p:sp>
+        <p:sp>
+          <p:nvSpPr>
+            <p:cNvPr id="6" name="Title 1">
+              <a:extLst>
+                <a:ext uri="{FF2B5EF4-FFF2-40B4-BE49-F238E27FC236}">
+                  <a16:creationId xmlns:a16="http://schemas.microsoft.com/office/drawing/2014/main" id="{A5895E1D-4BD5-7E40-A639-B234AA8D2E3D}"/>
+                </a:ext>
+              </a:extLst>
+            </p:cNvPr>
+            <p:cNvSpPr txBox="1">
+              <a:spLocks/>
+            </p:cNvSpPr>
+            <p:nvPr/>
+          </p:nvSpPr>
+          <p:spPr>
+            <a:xfrm>
+              <a:off x="254000" y="76200"/>
+              <a:ext cx="8796866" cy="464158"/>
+            </a:xfrm>
+            <a:prstGeom prst="rect">
+              <a:avLst/>
+            </a:prstGeom>
+          </p:spPr>
+          <p:txBody>
+            <a:bodyPr vert="horz" lIns="91440" tIns="45720" rIns="91440" bIns="45720" rtlCol="0" anchor="ctr">
+              <a:noAutofit/>
+            </a:bodyPr>
+            <a:lstStyle>
+              <a:lvl1pPr algn="ctr" defTabSz="457200" rtl="0" eaLnBrk="1" latinLnBrk="0" hangingPunct="1">
+                <a:spcBef>
+                  <a:spcPct val="0"/>
+                </a:spcBef>
+                <a:buNone/>
+                <a:defRPr sz="4400" kern="1200">
+                  <a:solidFill>
+                    <a:schemeClr val="tx1"/>
+                  </a:solidFill>
+                  <a:latin typeface="+mj-lt"/>
+                  <a:ea typeface="+mj-ea"/>
+                  <a:cs typeface="+mj-cs"/>
+                </a:defRPr>
+              </a:lvl1pPr>
+            </a:lstStyle>
+            <a:p>
+              <a:pPr algn="l"/>
+              <a:r>
+                <a:rPr lang="en-US" sz="4000" b="1" dirty="0" err="1">
+                  <a:solidFill>
+                    <a:schemeClr val="bg1"/>
+                  </a:solidFill>
+                </a:rPr>
+                <a:t>Concluzii</a:t>
+              </a:r>
+              <a:r>
+                <a:rPr lang="en-US" sz="4000" b="1" dirty="0">
+                  <a:solidFill>
+                    <a:schemeClr val="bg1"/>
+                  </a:solidFill>
+                </a:rPr>
+                <a:t> </a:t>
+              </a:r>
+              <a:r>
+                <a:rPr lang="en-US" sz="4000" b="1" dirty="0" err="1">
+                  <a:solidFill>
+                    <a:schemeClr val="bg1"/>
+                  </a:solidFill>
+                </a:rPr>
+                <a:t>si</a:t>
+              </a:r>
+              <a:r>
+                <a:rPr lang="en-US" sz="4000" b="1" dirty="0">
+                  <a:solidFill>
+                    <a:schemeClr val="bg1"/>
+                  </a:solidFill>
+                </a:rPr>
+                <a:t> </a:t>
+              </a:r>
+              <a:r>
+                <a:rPr lang="en-US" sz="4000" b="1" dirty="0" err="1">
+                  <a:solidFill>
+                    <a:schemeClr val="bg1"/>
+                  </a:solidFill>
+                </a:rPr>
+                <a:t>Implementare</a:t>
+              </a:r>
+              <a:r>
+                <a:rPr lang="en-US" sz="4000" b="1" dirty="0">
+                  <a:solidFill>
+                    <a:schemeClr val="bg1"/>
+                  </a:solidFill>
+                </a:rPr>
+                <a:t> in Business</a:t>
+              </a:r>
+              <a:endParaRPr lang="en-US" sz="4000" b="1" dirty="0">
+                <a:solidFill>
+                  <a:schemeClr val="bg1"/>
+                </a:solidFill>
+                <a:latin typeface="Arial"/>
+              </a:endParaRPr>
+            </a:p>
+          </p:txBody>
+        </p:sp>
+      </p:grpSp>
     </p:spTree>
     <p:extLst>
       <p:ext uri="{BB962C8B-B14F-4D97-AF65-F5344CB8AC3E}">
@@ -6121,55 +6685,6 @@
       </p:grpSpPr>
       <p:sp>
         <p:nvSpPr>
-          <p:cNvPr id="2" name="Title 1"/>
-          <p:cNvSpPr>
-            <a:spLocks noGrp="1"/>
-          </p:cNvSpPr>
-          <p:nvPr>
-            <p:ph type="title"/>
-          </p:nvPr>
-        </p:nvSpPr>
-        <p:spPr/>
-        <p:txBody>
-          <a:bodyPr>
-            <a:normAutofit/>
-          </a:bodyPr>
-          <a:lstStyle/>
-          <a:p>
-            <a:r>
-              <a:rPr sz="4000" b="1" dirty="0" err="1">
-                <a:solidFill>
-                  <a:srgbClr val="002060"/>
-                </a:solidFill>
-              </a:rPr>
-              <a:t>Obiectivele</a:t>
-            </a:r>
-            <a:r>
-              <a:rPr sz="4000" b="1" dirty="0">
-                <a:solidFill>
-                  <a:srgbClr val="002060"/>
-                </a:solidFill>
-              </a:rPr>
-              <a:t> </a:t>
-            </a:r>
-            <a:r>
-              <a:rPr sz="4000" b="1" dirty="0" err="1">
-                <a:solidFill>
-                  <a:srgbClr val="002060"/>
-                </a:solidFill>
-              </a:rPr>
-              <a:t>Proiectului</a:t>
-            </a:r>
-            <a:endParaRPr sz="4000" b="1" dirty="0">
-              <a:solidFill>
-                <a:srgbClr val="002060"/>
-              </a:solidFill>
-            </a:endParaRPr>
-          </a:p>
-        </p:txBody>
-      </p:sp>
-      <p:sp>
-        <p:nvSpPr>
           <p:cNvPr id="3" name="Content Placeholder 2"/>
           <p:cNvSpPr>
             <a:spLocks noGrp="1"/>
@@ -6180,8 +6695,8 @@
         </p:nvSpPr>
         <p:spPr>
           <a:xfrm>
-            <a:off x="457200" y="1320800"/>
-            <a:ext cx="8229600" cy="4859867"/>
+            <a:off x="254000" y="745737"/>
+            <a:ext cx="8432800" cy="5773596"/>
           </a:xfrm>
         </p:spPr>
         <p:txBody>
@@ -6190,7 +6705,7 @@
           </a:bodyPr>
           <a:lstStyle/>
           <a:p>
-            <a:pPr marL="0" lvl="0" indent="0" defTabSz="914400" eaLnBrk="0" fontAlgn="base" hangingPunct="0">
+            <a:pPr marL="0" indent="0" defTabSz="914400" eaLnBrk="0" fontAlgn="base" hangingPunct="0">
               <a:lnSpc>
                 <a:spcPct val="150000"/>
               </a:lnSpc>
@@ -6207,122 +6722,81 @@
               <a:t>➡️ </a:t>
             </a:r>
             <a:r>
-              <a:rPr lang="en-US" altLang="en-US" sz="1400" b="1" dirty="0" err="1">
-                <a:latin typeface="Arial" panose="020B0604020202020204" pitchFamily="34" charset="0"/>
-              </a:rPr>
+              <a:rPr lang="en-US" altLang="en-US" sz="1400" b="1" dirty="0" err="1"/>
               <a:t>Problema</a:t>
             </a:r>
             <a:r>
-              <a:rPr lang="en-US" altLang="en-US" sz="1400" b="1" dirty="0">
-                <a:latin typeface="Arial" panose="020B0604020202020204" pitchFamily="34" charset="0"/>
-              </a:rPr>
+              <a:rPr lang="en-US" altLang="en-US" sz="1400" b="1" dirty="0"/>
               <a:t>:</a:t>
             </a:r>
             <a:r>
-              <a:rPr lang="en-US" altLang="en-US" sz="1400" dirty="0">
-                <a:latin typeface="Arial" panose="020B0604020202020204" pitchFamily="34" charset="0"/>
-              </a:rPr>
-              <a:t> </a:t>
-            </a:r>
-            <a:r>
-              <a:rPr lang="en-US" altLang="en-US" sz="1400" dirty="0" err="1">
-                <a:latin typeface="Arial" panose="020B0604020202020204" pitchFamily="34" charset="0"/>
-              </a:rPr>
+              <a:rPr lang="en-US" altLang="en-US" sz="1400" dirty="0"/>
+              <a:t> </a:t>
+            </a:r>
+            <a:r>
+              <a:rPr lang="en-US" altLang="en-US" sz="1400" dirty="0" err="1"/>
               <a:t>Predictia</a:t>
             </a:r>
             <a:r>
-              <a:rPr lang="en-US" altLang="en-US" sz="1400" dirty="0">
-                <a:latin typeface="Arial" panose="020B0604020202020204" pitchFamily="34" charset="0"/>
-              </a:rPr>
-              <a:t> </a:t>
-            </a:r>
-            <a:r>
-              <a:rPr lang="en-US" altLang="en-US" sz="1400" dirty="0" err="1">
-                <a:latin typeface="Arial" panose="020B0604020202020204" pitchFamily="34" charset="0"/>
-              </a:rPr>
+              <a:rPr lang="en-US" altLang="en-US" sz="1400" dirty="0"/>
+              <a:t> </a:t>
+            </a:r>
+            <a:r>
+              <a:rPr lang="en-US" altLang="en-US" sz="1400" dirty="0" err="1"/>
               <a:t>profitului</a:t>
             </a:r>
             <a:r>
-              <a:rPr lang="en-US" altLang="en-US" sz="1400" dirty="0">
-                <a:latin typeface="Arial" panose="020B0604020202020204" pitchFamily="34" charset="0"/>
-              </a:rPr>
-              <a:t> </a:t>
-            </a:r>
-            <a:r>
-              <a:rPr lang="en-US" altLang="en-US" sz="1400" dirty="0" err="1">
-                <a:latin typeface="Arial" panose="020B0604020202020204" pitchFamily="34" charset="0"/>
-              </a:rPr>
+              <a:rPr lang="en-US" altLang="en-US" sz="1400" dirty="0"/>
+              <a:t> </a:t>
+            </a:r>
+            <a:r>
+              <a:rPr lang="en-US" altLang="en-US" sz="1400" dirty="0" err="1"/>
               <a:t>este</a:t>
             </a:r>
             <a:r>
-              <a:rPr lang="en-US" altLang="en-US" sz="1400" dirty="0">
-                <a:latin typeface="Arial" panose="020B0604020202020204" pitchFamily="34" charset="0"/>
-              </a:rPr>
-              <a:t> </a:t>
-            </a:r>
-            <a:r>
-              <a:rPr lang="en-US" altLang="en-US" sz="1400" dirty="0" err="1">
-                <a:latin typeface="Arial" panose="020B0604020202020204" pitchFamily="34" charset="0"/>
-              </a:rPr>
+              <a:rPr lang="en-US" altLang="en-US" sz="1400" dirty="0"/>
+              <a:t> </a:t>
+            </a:r>
+            <a:r>
+              <a:rPr lang="en-US" altLang="en-US" sz="1400" dirty="0" err="1"/>
               <a:t>dificila</a:t>
             </a:r>
             <a:r>
-              <a:rPr lang="en-US" altLang="en-US" sz="1400" dirty="0">
-                <a:latin typeface="Arial" panose="020B0604020202020204" pitchFamily="34" charset="0"/>
-              </a:rPr>
+              <a:rPr lang="en-US" altLang="en-US" sz="1400" dirty="0"/>
               <a:t> din </a:t>
             </a:r>
             <a:r>
-              <a:rPr lang="en-US" altLang="en-US" sz="1400" dirty="0" err="1">
-                <a:latin typeface="Arial" panose="020B0604020202020204" pitchFamily="34" charset="0"/>
-              </a:rPr>
+              <a:rPr lang="en-US" altLang="en-US" sz="1400" dirty="0" err="1"/>
               <a:t>cauza</a:t>
             </a:r>
             <a:r>
-              <a:rPr lang="en-US" altLang="en-US" sz="1400" dirty="0">
-                <a:latin typeface="Arial" panose="020B0604020202020204" pitchFamily="34" charset="0"/>
-              </a:rPr>
-              <a:t> </a:t>
-            </a:r>
-            <a:r>
-              <a:rPr lang="en-US" altLang="en-US" sz="1400" dirty="0" err="1">
-                <a:latin typeface="Arial" panose="020B0604020202020204" pitchFamily="34" charset="0"/>
-              </a:rPr>
+              <a:rPr lang="en-US" altLang="en-US" sz="1400" dirty="0"/>
+              <a:t> </a:t>
+            </a:r>
+            <a:r>
+              <a:rPr lang="en-US" altLang="en-US" sz="1400" dirty="0" err="1"/>
               <a:t>variatiilor</a:t>
             </a:r>
             <a:r>
-              <a:rPr lang="en-US" altLang="en-US" sz="1400" dirty="0">
-                <a:latin typeface="Arial" panose="020B0604020202020204" pitchFamily="34" charset="0"/>
-              </a:rPr>
+              <a:rPr lang="en-US" altLang="en-US" sz="1400" dirty="0"/>
               <a:t> de discount </a:t>
             </a:r>
             <a:r>
-              <a:rPr lang="en-US" altLang="en-US" sz="1400" dirty="0" err="1">
-                <a:latin typeface="Arial" panose="020B0604020202020204" pitchFamily="34" charset="0"/>
-              </a:rPr>
+              <a:rPr lang="en-US" altLang="en-US" sz="1400" dirty="0" err="1"/>
               <a:t>si</a:t>
             </a:r>
             <a:r>
-              <a:rPr lang="en-US" altLang="en-US" sz="1400" dirty="0">
-                <a:latin typeface="Arial" panose="020B0604020202020204" pitchFamily="34" charset="0"/>
-              </a:rPr>
-              <a:t> </a:t>
-            </a:r>
-            <a:r>
-              <a:rPr lang="en-US" altLang="en-US" sz="1400" dirty="0" err="1">
-                <a:latin typeface="Arial" panose="020B0604020202020204" pitchFamily="34" charset="0"/>
-              </a:rPr>
+              <a:rPr lang="en-US" altLang="en-US" sz="1400" dirty="0"/>
+              <a:t> </a:t>
+            </a:r>
+            <a:r>
+              <a:rPr lang="en-US" altLang="en-US" sz="1400" dirty="0" err="1"/>
               <a:t>sezonalitate</a:t>
             </a:r>
-            <a:r>
-              <a:rPr lang="en-US" altLang="en-US" sz="1400" dirty="0">
-                <a:latin typeface="Arial" panose="020B0604020202020204" pitchFamily="34" charset="0"/>
-              </a:rPr>
-              <a:t>.</a:t>
-            </a:r>
-          </a:p>
-          <a:p>
-            <a:pPr marL="0" lvl="0" indent="0" defTabSz="914400" eaLnBrk="0" fontAlgn="base" hangingPunct="0">
+            <a:endParaRPr lang="en-US" altLang="en-US" sz="1400" dirty="0"/>
+          </a:p>
+          <a:p>
+            <a:pPr marL="0" indent="0" defTabSz="914400" eaLnBrk="0" fontAlgn="base" hangingPunct="0">
               <a:lnSpc>
                 <a:spcPct val="150000"/>
               </a:lnSpc>
@@ -6334,61 +6808,10 @@
               </a:spcAft>
               <a:buNone/>
             </a:pPr>
-            <a:r>
-              <a:rPr lang="en-US" sz="1400" dirty="0"/>
-              <a:t>➡️ </a:t>
-            </a:r>
-            <a:r>
-              <a:rPr lang="en-US" altLang="en-US" sz="1400" b="1" dirty="0">
-                <a:latin typeface="Arial" panose="020B0604020202020204" pitchFamily="34" charset="0"/>
-              </a:rPr>
-              <a:t>Solutia:</a:t>
-            </a:r>
-            <a:r>
-              <a:rPr lang="en-US" altLang="en-US" sz="1400" dirty="0">
-                <a:latin typeface="Arial" panose="020B0604020202020204" pitchFamily="34" charset="0"/>
-              </a:rPr>
-              <a:t> Un pipeline de date ‘Zero-Leakage’ care </a:t>
-            </a:r>
-            <a:r>
-              <a:rPr lang="en-US" altLang="en-US" sz="1400" dirty="0" err="1">
-                <a:latin typeface="Arial" panose="020B0604020202020204" pitchFamily="34" charset="0"/>
-              </a:rPr>
-              <a:t>separa</a:t>
-            </a:r>
-            <a:r>
-              <a:rPr lang="en-US" altLang="en-US" sz="1400" dirty="0">
-                <a:latin typeface="Arial" panose="020B0604020202020204" pitchFamily="34" charset="0"/>
-              </a:rPr>
-              <a:t> strict </a:t>
-            </a:r>
-            <a:r>
-              <a:rPr lang="en-US" altLang="en-US" sz="1400" dirty="0" err="1">
-                <a:latin typeface="Arial" panose="020B0604020202020204" pitchFamily="34" charset="0"/>
-              </a:rPr>
-              <a:t>istoricul</a:t>
-            </a:r>
-            <a:r>
-              <a:rPr lang="en-US" altLang="en-US" sz="1400" dirty="0">
-                <a:latin typeface="Arial" panose="020B0604020202020204" pitchFamily="34" charset="0"/>
-              </a:rPr>
-              <a:t> de </a:t>
-            </a:r>
-            <a:r>
-              <a:rPr lang="en-US" altLang="en-US" sz="1400" dirty="0" err="1">
-                <a:latin typeface="Arial" panose="020B0604020202020204" pitchFamily="34" charset="0"/>
-              </a:rPr>
-              <a:t>viitor</a:t>
-            </a:r>
-            <a:r>
-              <a:rPr lang="en-US" altLang="en-US" sz="1400" dirty="0">
-                <a:latin typeface="Arial" panose="020B0604020202020204" pitchFamily="34" charset="0"/>
-              </a:rPr>
-              <a:t>.</a:t>
-            </a:r>
-          </a:p>
-          <a:p>
-            <a:pPr marL="0" lvl="0" indent="0" defTabSz="914400" eaLnBrk="0" fontAlgn="base" hangingPunct="0">
+            <a:endParaRPr lang="en-US" altLang="en-US" sz="1400" dirty="0"/>
+          </a:p>
+          <a:p>
+            <a:pPr marL="0" indent="0" defTabSz="914400" eaLnBrk="0" fontAlgn="base" hangingPunct="0">
               <a:lnSpc>
                 <a:spcPct val="150000"/>
               </a:lnSpc>
@@ -6405,104 +6828,64 @@
               <a:t>➡️ </a:t>
             </a:r>
             <a:r>
-              <a:rPr lang="en-US" altLang="en-US" sz="1400" b="1" dirty="0" err="1">
-                <a:latin typeface="Arial" panose="020B0604020202020204" pitchFamily="34" charset="0"/>
-              </a:rPr>
-              <a:t>Obiectiv</a:t>
-            </a:r>
-            <a:r>
-              <a:rPr lang="en-US" altLang="en-US" sz="1400" b="1" dirty="0">
-                <a:latin typeface="Arial" panose="020B0604020202020204" pitchFamily="34" charset="0"/>
-              </a:rPr>
-              <a:t>: </a:t>
-            </a:r>
-            <a:r>
-              <a:rPr lang="en-US" sz="1400" dirty="0" err="1"/>
-              <a:t>Modelare</a:t>
-            </a:r>
-            <a:r>
-              <a:rPr lang="en-US" sz="1400" dirty="0"/>
-              <a:t> Machine Learning </a:t>
-            </a:r>
-            <a:r>
-              <a:rPr lang="en-US" sz="1400" dirty="0" err="1"/>
-              <a:t>pentru</a:t>
-            </a:r>
-            <a:r>
-              <a:rPr lang="en-US" sz="1400" dirty="0"/>
-              <a:t> </a:t>
-            </a:r>
-            <a:r>
-              <a:rPr lang="en-US" sz="1400" dirty="0" err="1"/>
-              <a:t>prezicerea</a:t>
-            </a:r>
-            <a:r>
-              <a:rPr lang="en-US" sz="1400" dirty="0"/>
-              <a:t> </a:t>
-            </a:r>
-            <a:r>
-              <a:rPr lang="en-US" sz="1400" dirty="0" err="1"/>
-              <a:t>profitul</a:t>
-            </a:r>
-            <a:r>
-              <a:rPr lang="en-US" sz="1400" dirty="0"/>
-              <a:t> </a:t>
-            </a:r>
-            <a:r>
-              <a:rPr lang="en-US" sz="1400" dirty="0" err="1"/>
+              <a:rPr lang="en-US" altLang="en-US" sz="1400" b="1" dirty="0"/>
+              <a:t>Solutia:</a:t>
+            </a:r>
+            <a:r>
+              <a:rPr lang="en-US" altLang="en-US" sz="1400" dirty="0"/>
+              <a:t> Un pipeline </a:t>
+            </a:r>
+            <a:r>
+              <a:rPr lang="en-US" altLang="en-US" sz="1400" dirty="0" err="1"/>
+              <a:t>bazat</a:t>
+            </a:r>
+            <a:r>
+              <a:rPr lang="en-US" altLang="en-US" sz="1400" dirty="0"/>
+              <a:t> pe </a:t>
+            </a:r>
+            <a:r>
+              <a:rPr lang="en-US" altLang="en-US" sz="1400" dirty="0" err="1"/>
+              <a:t>comportamentul</a:t>
+            </a:r>
+            <a:r>
+              <a:rPr lang="en-US" altLang="en-US" sz="1400" dirty="0"/>
+              <a:t> </a:t>
+            </a:r>
+            <a:r>
+              <a:rPr lang="en-US" altLang="en-US" sz="1400" dirty="0" err="1"/>
+              <a:t>clientului</a:t>
+            </a:r>
+            <a:r>
+              <a:rPr lang="en-US" altLang="en-US" sz="1400" dirty="0"/>
+              <a:t>,  cu ‘zero-leakage’ (</a:t>
+            </a:r>
+            <a:r>
+              <a:rPr lang="en-US" altLang="en-US" sz="1400" dirty="0" err="1"/>
               <a:t>viitor</a:t>
             </a:r>
             <a:r>
-              <a:rPr lang="en-US" sz="1400" dirty="0"/>
-              <a:t> al </a:t>
-            </a:r>
-            <a:r>
-              <a:rPr lang="en-US" sz="1400" dirty="0" err="1"/>
-              <a:t>unei</a:t>
-            </a:r>
-            <a:r>
-              <a:rPr lang="en-US" sz="1400" dirty="0"/>
-              <a:t> </a:t>
-            </a:r>
-            <a:r>
-              <a:rPr lang="en-US" sz="1400" dirty="0" err="1"/>
-              <a:t>comenzi</a:t>
-            </a:r>
-            <a:r>
-              <a:rPr lang="en-US" sz="1400" dirty="0"/>
-              <a:t>, </a:t>
-            </a:r>
-            <a:r>
-              <a:rPr lang="en-US" sz="1400" dirty="0" err="1"/>
-              <a:t>folosind</a:t>
-            </a:r>
-            <a:r>
-              <a:rPr lang="en-US" sz="1400" dirty="0"/>
-              <a:t>:</a:t>
-            </a:r>
-            <a:br>
-              <a:rPr lang="en-US" sz="1400" dirty="0"/>
-            </a:br>
-            <a:r>
-              <a:rPr lang="en-US" sz="1400" dirty="0"/>
-              <a:t>	-  </a:t>
-            </a:r>
-            <a:r>
-              <a:rPr lang="en-US" sz="1400" dirty="0" err="1"/>
-              <a:t>istoricul</a:t>
-            </a:r>
-            <a:r>
-              <a:rPr lang="en-US" sz="1400" dirty="0"/>
-              <a:t> </a:t>
-            </a:r>
-            <a:r>
-              <a:rPr lang="en-US" sz="1400" dirty="0" err="1"/>
-              <a:t>clientului</a:t>
-            </a:r>
-            <a:endParaRPr lang="en-US" sz="1400" dirty="0"/>
-          </a:p>
-          <a:p>
-            <a:pPr marL="0" lvl="0" indent="0" defTabSz="914400" eaLnBrk="0" fontAlgn="base" hangingPunct="0">
+              <a:rPr lang="en-US" altLang="en-US" sz="1400" dirty="0"/>
+              <a:t> strict </a:t>
+            </a:r>
+            <a:r>
+              <a:rPr lang="en-US" altLang="en-US" sz="1400" dirty="0" err="1"/>
+              <a:t>izolat</a:t>
+            </a:r>
+            <a:r>
+              <a:rPr lang="en-US" altLang="en-US" sz="1400" dirty="0"/>
+              <a:t> de </a:t>
+            </a:r>
+            <a:r>
+              <a:rPr lang="en-US" altLang="en-US" sz="1400" dirty="0" err="1"/>
+              <a:t>trecut</a:t>
+            </a:r>
+            <a:r>
+              <a:rPr lang="en-US" altLang="en-US" sz="1400" dirty="0"/>
+              <a:t>)</a:t>
+            </a:r>
+          </a:p>
+          <a:p>
+            <a:pPr marL="0" indent="0" defTabSz="914400" eaLnBrk="0" fontAlgn="base" hangingPunct="0">
               <a:lnSpc>
                 <a:spcPct val="150000"/>
               </a:lnSpc>
@@ -6514,26 +6897,10 @@
               </a:spcAft>
               <a:buNone/>
             </a:pPr>
-            <a:r>
-              <a:rPr lang="en-US" sz="1400" dirty="0"/>
-              <a:t>	-  </a:t>
-            </a:r>
-            <a:r>
-              <a:rPr lang="en-US" sz="1400" dirty="0" err="1"/>
-              <a:t>tipul</a:t>
-            </a:r>
-            <a:r>
-              <a:rPr lang="en-US" sz="1400" dirty="0"/>
-              <a:t> </a:t>
-            </a:r>
-            <a:r>
-              <a:rPr lang="en-US" sz="1400" dirty="0" err="1"/>
-              <a:t>produsului</a:t>
-            </a:r>
-            <a:endParaRPr lang="en-US" sz="1400" dirty="0"/>
-          </a:p>
-          <a:p>
-            <a:pPr marL="0" lvl="0" indent="0" defTabSz="914400" eaLnBrk="0" fontAlgn="base" hangingPunct="0">
+            <a:endParaRPr lang="en-US" altLang="en-US" sz="1400" dirty="0"/>
+          </a:p>
+          <a:p>
+            <a:pPr marL="0" indent="0" defTabSz="914400" eaLnBrk="0" fontAlgn="base" hangingPunct="0">
               <a:lnSpc>
                 <a:spcPct val="150000"/>
               </a:lnSpc>
@@ -6547,11 +6914,83 @@
             </a:pPr>
             <a:r>
               <a:rPr lang="en-US" sz="1400" dirty="0"/>
-              <a:t>	- discount</a:t>
-            </a:r>
-          </a:p>
-          <a:p>
-            <a:pPr marL="0" lvl="0" indent="0" defTabSz="914400" eaLnBrk="0" fontAlgn="base" hangingPunct="0">
+              <a:t>➡️ </a:t>
+            </a:r>
+            <a:r>
+              <a:rPr lang="en-US" altLang="en-US" sz="1400" b="1" dirty="0" err="1"/>
+              <a:t>Obiectiv</a:t>
+            </a:r>
+            <a:r>
+              <a:rPr lang="en-US" altLang="en-US" sz="1400" b="1" dirty="0"/>
+              <a:t>: </a:t>
+            </a:r>
+            <a:r>
+              <a:rPr lang="en-US" sz="1400" dirty="0" err="1"/>
+              <a:t>Modelare</a:t>
+            </a:r>
+            <a:r>
+              <a:rPr lang="en-US" sz="1400" dirty="0"/>
+              <a:t> Machine Learning </a:t>
+            </a:r>
+            <a:r>
+              <a:rPr lang="en-US" sz="1400" dirty="0" err="1"/>
+              <a:t>pentru</a:t>
+            </a:r>
+            <a:r>
+              <a:rPr lang="en-US" sz="1400" dirty="0"/>
+              <a:t> </a:t>
+            </a:r>
+            <a:r>
+              <a:rPr lang="en-US" sz="1400" dirty="0" err="1"/>
+              <a:t>prezicerea</a:t>
+            </a:r>
+            <a:r>
+              <a:rPr lang="en-US" sz="1400" dirty="0"/>
+              <a:t> </a:t>
+            </a:r>
+            <a:r>
+              <a:rPr lang="en-US" sz="1400" dirty="0" err="1"/>
+              <a:t>profitul</a:t>
+            </a:r>
+            <a:r>
+              <a:rPr lang="en-US" sz="1400" dirty="0"/>
+              <a:t> </a:t>
+            </a:r>
+            <a:r>
+              <a:rPr lang="en-US" sz="1400" dirty="0" err="1"/>
+              <a:t>viitor</a:t>
+            </a:r>
+            <a:r>
+              <a:rPr lang="en-US" sz="1400" dirty="0"/>
+              <a:t> al </a:t>
+            </a:r>
+            <a:r>
+              <a:rPr lang="en-US" sz="1400" dirty="0" err="1"/>
+              <a:t>unei</a:t>
+            </a:r>
+            <a:r>
+              <a:rPr lang="en-US" sz="1400" dirty="0"/>
+              <a:t> </a:t>
+            </a:r>
+            <a:r>
+              <a:rPr lang="en-US" sz="1400" dirty="0" err="1"/>
+              <a:t>comenzi</a:t>
+            </a:r>
+            <a:r>
+              <a:rPr lang="en-US" sz="1400" dirty="0"/>
+              <a:t>, </a:t>
+            </a:r>
+            <a:r>
+              <a:rPr lang="en-US" sz="1400" dirty="0" err="1"/>
+              <a:t>folosind</a:t>
+            </a:r>
+            <a:r>
+              <a:rPr lang="en-US" sz="1400" dirty="0"/>
+              <a:t>:</a:t>
+            </a:r>
+          </a:p>
+          <a:p>
+            <a:pPr lvl="1" defTabSz="914400" eaLnBrk="0" fontAlgn="base" hangingPunct="0">
               <a:lnSpc>
                 <a:spcPct val="150000"/>
               </a:lnSpc>
@@ -6561,20 +7000,23 @@
               <a:spcAft>
                 <a:spcPct val="0"/>
               </a:spcAft>
-              <a:buNone/>
             </a:pPr>
             <a:r>
-              <a:rPr lang="en-US" sz="1400" dirty="0"/>
-              <a:t>	- </a:t>
-            </a:r>
-            <a:r>
-              <a:rPr lang="en-US" sz="1400" dirty="0" err="1"/>
-              <a:t>regiune</a:t>
+              <a:rPr lang="en-US" sz="1400" dirty="0" err="1"/>
+              <a:t>istoricul</a:t>
+            </a:r>
+            <a:r>
+              <a:rPr lang="en-US" sz="1400" dirty="0"/>
+              <a:t> </a:t>
+            </a:r>
+            <a:r>
+              <a:rPr lang="en-US" sz="1400" dirty="0" err="1"/>
+              <a:t>clientului</a:t>
             </a:r>
             <a:endParaRPr lang="en-US" sz="1400" dirty="0"/>
           </a:p>
           <a:p>
-            <a:pPr marL="0" lvl="0" indent="0" defTabSz="914400" eaLnBrk="0" fontAlgn="base" hangingPunct="0">
+            <a:pPr lvl="1" defTabSz="914400" eaLnBrk="0" fontAlgn="base" hangingPunct="0">
               <a:lnSpc>
                 <a:spcPct val="150000"/>
               </a:lnSpc>
@@ -6584,20 +7026,23 @@
               <a:spcAft>
                 <a:spcPct val="0"/>
               </a:spcAft>
-              <a:buNone/>
             </a:pPr>
             <a:r>
-              <a:rPr lang="en-US" sz="1400" dirty="0"/>
-              <a:t>	- </a:t>
-            </a:r>
-            <a:r>
-              <a:rPr lang="en-US" sz="1400" dirty="0" err="1"/>
-              <a:t>sezonalitate</a:t>
+              <a:rPr lang="en-US" sz="1400" dirty="0" err="1"/>
+              <a:t>tipul</a:t>
+            </a:r>
+            <a:r>
+              <a:rPr lang="en-US" sz="1400" dirty="0"/>
+              <a:t> </a:t>
+            </a:r>
+            <a:r>
+              <a:rPr lang="en-US" sz="1400" dirty="0" err="1"/>
+              <a:t>produsului</a:t>
             </a:r>
             <a:endParaRPr lang="en-US" sz="1400" dirty="0"/>
           </a:p>
           <a:p>
-            <a:pPr marL="0" lvl="0" indent="0" defTabSz="914400" eaLnBrk="0" fontAlgn="base" hangingPunct="0">
+            <a:pPr lvl="1" defTabSz="914400" eaLnBrk="0" fontAlgn="base" hangingPunct="0">
               <a:lnSpc>
                 <a:spcPct val="150000"/>
               </a:lnSpc>
@@ -6607,20 +7052,61 @@
               <a:spcAft>
                 <a:spcPct val="0"/>
               </a:spcAft>
-              <a:buNone/>
             </a:pPr>
             <a:r>
               <a:rPr lang="en-US" sz="1400" dirty="0"/>
-              <a:t>	- </a:t>
-            </a:r>
-            <a:r>
-              <a:rPr lang="en-US" sz="1400" dirty="0" err="1"/>
-              <a:t>comportament</a:t>
-            </a:r>
-            <a:r>
-              <a:rPr lang="en-US" sz="1400" dirty="0"/>
-              <a:t> client</a:t>
-            </a:r>
+              <a:t>discount</a:t>
+            </a:r>
+          </a:p>
+          <a:p>
+            <a:pPr lvl="1" defTabSz="914400" eaLnBrk="0" fontAlgn="base" hangingPunct="0">
+              <a:lnSpc>
+                <a:spcPct val="150000"/>
+              </a:lnSpc>
+              <a:spcBef>
+                <a:spcPct val="0"/>
+              </a:spcBef>
+              <a:spcAft>
+                <a:spcPct val="0"/>
+              </a:spcAft>
+            </a:pPr>
+            <a:r>
+              <a:rPr lang="en-US" sz="1400" dirty="0" err="1"/>
+              <a:t>regiune</a:t>
+            </a:r>
+            <a:endParaRPr lang="en-US" sz="1400" dirty="0"/>
+          </a:p>
+          <a:p>
+            <a:pPr lvl="1" defTabSz="914400" eaLnBrk="0" fontAlgn="base" hangingPunct="0">
+              <a:lnSpc>
+                <a:spcPct val="150000"/>
+              </a:lnSpc>
+              <a:spcBef>
+                <a:spcPct val="0"/>
+              </a:spcBef>
+              <a:spcAft>
+                <a:spcPct val="0"/>
+              </a:spcAft>
+            </a:pPr>
+            <a:r>
+              <a:rPr lang="en-US" sz="1400" dirty="0" err="1"/>
+              <a:t>Sezonalitate</a:t>
+            </a:r>
+            <a:endParaRPr lang="en-US" sz="1400" dirty="0"/>
+          </a:p>
+          <a:p>
+            <a:pPr lvl="1" defTabSz="914400" eaLnBrk="0" fontAlgn="base" hangingPunct="0">
+              <a:lnSpc>
+                <a:spcPct val="150000"/>
+              </a:lnSpc>
+              <a:spcBef>
+                <a:spcPct val="0"/>
+              </a:spcBef>
+              <a:spcAft>
+                <a:spcPct val="0"/>
+              </a:spcAft>
+            </a:pPr>
+            <a:endParaRPr lang="en-US" sz="1400" dirty="0"/>
           </a:p>
           <a:p>
             <a:pPr marL="0" indent="0">
@@ -6675,62 +7161,215 @@
             </a:r>
           </a:p>
           <a:p>
-            <a:pPr marL="800100" lvl="2" indent="0">
-              <a:spcAft>
-                <a:spcPts val="1000"/>
-              </a:spcAft>
-              <a:buNone/>
-              <a:defRPr sz="2000">
-                <a:solidFill>
-                  <a:srgbClr val="404040"/>
-                </a:solidFill>
-                <a:latin typeface="Arial"/>
-              </a:defRPr>
+            <a:pPr lvl="1">
+              <a:lnSpc>
+                <a:spcPct val="150000"/>
+              </a:lnSpc>
             </a:pPr>
             <a:r>
-              <a:rPr lang="en-US" sz="1400" dirty="0"/>
-              <a:t>- pricing optimization</a:t>
-            </a:r>
-          </a:p>
-          <a:p>
-            <a:pPr marL="800100" lvl="2" indent="0">
-              <a:spcAft>
-                <a:spcPts val="1000"/>
-              </a:spcAft>
-              <a:buNone/>
-              <a:defRPr sz="2000">
-                <a:solidFill>
-                  <a:srgbClr val="404040"/>
-                </a:solidFill>
-                <a:latin typeface="Arial"/>
-              </a:defRPr>
+              <a:rPr lang="en-US" sz="1400" dirty="0" err="1"/>
+              <a:t>optimizarea</a:t>
+            </a:r>
+            <a:r>
+              <a:rPr lang="en-US" sz="1400" dirty="0"/>
+              <a:t> </a:t>
+            </a:r>
+            <a:r>
+              <a:rPr lang="en-US" sz="1400" dirty="0" err="1"/>
+              <a:t>preturilor</a:t>
+            </a:r>
+            <a:endParaRPr lang="en-US" sz="1400" dirty="0"/>
+          </a:p>
+          <a:p>
+            <a:pPr lvl="1">
+              <a:lnSpc>
+                <a:spcPct val="150000"/>
+              </a:lnSpc>
             </a:pPr>
             <a:r>
-              <a:rPr lang="en-US" sz="1400" dirty="0"/>
-              <a:t>- discount management</a:t>
-            </a:r>
-          </a:p>
-          <a:p>
-            <a:pPr marL="800100" lvl="2" indent="0">
-              <a:spcAft>
-                <a:spcPts val="1000"/>
-              </a:spcAft>
-              <a:buNone/>
-              <a:defRPr sz="2000">
-                <a:solidFill>
-                  <a:srgbClr val="404040"/>
-                </a:solidFill>
-                <a:latin typeface="Arial"/>
-              </a:defRPr>
+              <a:rPr lang="en-US" sz="1400" dirty="0" err="1"/>
+              <a:t>managementul</a:t>
+            </a:r>
+            <a:r>
+              <a:rPr lang="en-US" sz="1400" dirty="0"/>
+              <a:t> </a:t>
+            </a:r>
+            <a:r>
+              <a:rPr lang="en-US" sz="1400" dirty="0" err="1"/>
+              <a:t>discounturilor</a:t>
+            </a:r>
+            <a:endParaRPr lang="en-US" sz="1400" dirty="0"/>
+          </a:p>
+          <a:p>
+            <a:pPr lvl="1">
+              <a:lnSpc>
+                <a:spcPct val="150000"/>
+              </a:lnSpc>
             </a:pPr>
             <a:r>
-              <a:rPr lang="en-US" sz="1400" dirty="0"/>
-              <a:t>- risk control</a:t>
-            </a:r>
-            <a:endParaRPr sz="1400" dirty="0"/>
+              <a:rPr lang="en-US" sz="1400" dirty="0" err="1"/>
+              <a:t>controlul</a:t>
+            </a:r>
+            <a:r>
+              <a:rPr lang="en-US" sz="1400" dirty="0"/>
+              <a:t> </a:t>
+            </a:r>
+            <a:r>
+              <a:rPr lang="en-US" sz="1400" dirty="0" err="1"/>
+              <a:t>riscului</a:t>
+            </a:r>
+            <a:r>
+              <a:rPr lang="en-US" sz="1400" dirty="0"/>
+              <a:t> </a:t>
+            </a:r>
+            <a:r>
+              <a:rPr lang="en-US" sz="1400" dirty="0" err="1"/>
+              <a:t>tranzactiilor</a:t>
+            </a:r>
+            <a:r>
+              <a:rPr lang="en-US" sz="1400" dirty="0"/>
+              <a:t>.</a:t>
+            </a:r>
           </a:p>
         </p:txBody>
       </p:sp>
+      <p:grpSp>
+        <p:nvGrpSpPr>
+          <p:cNvPr id="5" name="Group 4">
+            <a:extLst>
+              <a:ext uri="{FF2B5EF4-FFF2-40B4-BE49-F238E27FC236}">
+                <a16:creationId xmlns:a16="http://schemas.microsoft.com/office/drawing/2014/main" id="{0AEDE0E7-729E-95BC-2BBB-91E46AED3B48}"/>
+              </a:ext>
+            </a:extLst>
+          </p:cNvPr>
+          <p:cNvGrpSpPr/>
+          <p:nvPr/>
+        </p:nvGrpSpPr>
+        <p:grpSpPr>
+          <a:xfrm>
+            <a:off x="0" y="1"/>
+            <a:ext cx="9144000" cy="659423"/>
+            <a:chOff x="0" y="0"/>
+            <a:chExt cx="9144000" cy="582169"/>
+          </a:xfrm>
+        </p:grpSpPr>
+        <p:sp>
+          <p:nvSpPr>
+            <p:cNvPr id="6" name="Shape 0">
+              <a:extLst>
+                <a:ext uri="{FF2B5EF4-FFF2-40B4-BE49-F238E27FC236}">
+                  <a16:creationId xmlns:a16="http://schemas.microsoft.com/office/drawing/2014/main" id="{F0E2B79D-2E4A-A1D9-0853-9ACF92FB9930}"/>
+                </a:ext>
+              </a:extLst>
+            </p:cNvPr>
+            <p:cNvSpPr/>
+            <p:nvPr/>
+          </p:nvSpPr>
+          <p:spPr>
+            <a:xfrm>
+              <a:off x="0" y="0"/>
+              <a:ext cx="9144000" cy="582169"/>
+            </a:xfrm>
+            <a:prstGeom prst="rect">
+              <a:avLst/>
+            </a:prstGeom>
+            <a:solidFill>
+              <a:srgbClr val="1E2761"/>
+            </a:solidFill>
+            <a:ln w="12700">
+              <a:solidFill>
+                <a:srgbClr val="1E2761"/>
+              </a:solidFill>
+              <a:prstDash val="solid"/>
+            </a:ln>
+          </p:spPr>
+          <p:txBody>
+            <a:bodyPr/>
+            <a:lstStyle/>
+            <a:p>
+              <a:endParaRPr lang="en-US"/>
+            </a:p>
+          </p:txBody>
+        </p:sp>
+        <p:sp>
+          <p:nvSpPr>
+            <p:cNvPr id="7" name="Title 1">
+              <a:extLst>
+                <a:ext uri="{FF2B5EF4-FFF2-40B4-BE49-F238E27FC236}">
+                  <a16:creationId xmlns:a16="http://schemas.microsoft.com/office/drawing/2014/main" id="{6693003C-FCA1-E4CB-FE05-EA12C99FC332}"/>
+                </a:ext>
+              </a:extLst>
+            </p:cNvPr>
+            <p:cNvSpPr txBox="1">
+              <a:spLocks/>
+            </p:cNvSpPr>
+            <p:nvPr/>
+          </p:nvSpPr>
+          <p:spPr>
+            <a:xfrm>
+              <a:off x="254000" y="76200"/>
+              <a:ext cx="8796866" cy="427600"/>
+            </a:xfrm>
+            <a:prstGeom prst="rect">
+              <a:avLst/>
+            </a:prstGeom>
+          </p:spPr>
+          <p:txBody>
+            <a:bodyPr vert="horz" lIns="91440" tIns="45720" rIns="91440" bIns="45720" rtlCol="0" anchor="ctr">
+              <a:noAutofit/>
+            </a:bodyPr>
+            <a:lstStyle>
+              <a:lvl1pPr algn="ctr" defTabSz="457200" rtl="0" eaLnBrk="1" latinLnBrk="0" hangingPunct="1">
+                <a:spcBef>
+                  <a:spcPct val="0"/>
+                </a:spcBef>
+                <a:buNone/>
+                <a:defRPr sz="4400" kern="1200">
+                  <a:solidFill>
+                    <a:schemeClr val="tx1"/>
+                  </a:solidFill>
+                  <a:latin typeface="+mj-lt"/>
+                  <a:ea typeface="+mj-ea"/>
+                  <a:cs typeface="+mj-cs"/>
+                </a:defRPr>
+              </a:lvl1pPr>
+            </a:lstStyle>
+            <a:p>
+              <a:pPr algn="l"/>
+              <a:r>
+                <a:rPr lang="en-US" sz="4000" b="1" dirty="0" err="1">
+                  <a:solidFill>
+                    <a:schemeClr val="bg1"/>
+                  </a:solidFill>
+                </a:rPr>
+                <a:t>Obiectivele</a:t>
+              </a:r>
+              <a:r>
+                <a:rPr lang="en-US" sz="4000" b="1" dirty="0">
+                  <a:solidFill>
+                    <a:schemeClr val="bg1"/>
+                  </a:solidFill>
+                </a:rPr>
+                <a:t> </a:t>
+              </a:r>
+              <a:r>
+                <a:rPr lang="en-US" sz="4000" b="1" dirty="0" err="1">
+                  <a:solidFill>
+                    <a:schemeClr val="bg1"/>
+                  </a:solidFill>
+                </a:rPr>
+                <a:t>Proiectului</a:t>
+              </a:r>
+              <a:endParaRPr lang="en-US" sz="4000" b="1" dirty="0">
+                <a:solidFill>
+                  <a:schemeClr val="bg1"/>
+                </a:solidFill>
+                <a:latin typeface="Arial"/>
+              </a:endParaRPr>
+            </a:p>
+          </p:txBody>
+        </p:sp>
+      </p:grpSp>
     </p:spTree>
   </p:cSld>
   <p:clrMapOvr>
@@ -6758,61 +7397,6 @@
       </p:grpSpPr>
       <p:sp>
         <p:nvSpPr>
-          <p:cNvPr id="2" name="Title 1">
-            <a:extLst>
-              <a:ext uri="{FF2B5EF4-FFF2-40B4-BE49-F238E27FC236}">
-                <a16:creationId xmlns:a16="http://schemas.microsoft.com/office/drawing/2014/main" id="{B4F98158-3815-CA84-0784-C21662FE9C08}"/>
-              </a:ext>
-            </a:extLst>
-          </p:cNvPr>
-          <p:cNvSpPr>
-            <a:spLocks noGrp="1"/>
-          </p:cNvSpPr>
-          <p:nvPr>
-            <p:ph type="title"/>
-          </p:nvPr>
-        </p:nvSpPr>
-        <p:spPr/>
-        <p:txBody>
-          <a:bodyPr>
-            <a:normAutofit/>
-          </a:bodyPr>
-          <a:lstStyle/>
-          <a:p>
-            <a:r>
-              <a:rPr lang="en-US" sz="4000" b="1" dirty="0" err="1">
-                <a:solidFill>
-                  <a:srgbClr val="002060"/>
-                </a:solidFill>
-              </a:rPr>
-              <a:t>Datasetul</a:t>
-            </a:r>
-            <a:r>
-              <a:rPr lang="en-US" sz="4000" b="1" dirty="0">
-                <a:solidFill>
-                  <a:srgbClr val="002060"/>
-                </a:solidFill>
-              </a:rPr>
-              <a:t> </a:t>
-            </a:r>
-            <a:r>
-              <a:rPr lang="en-US" sz="4000" b="1" dirty="0" err="1">
-                <a:solidFill>
-                  <a:srgbClr val="002060"/>
-                </a:solidFill>
-              </a:rPr>
-              <a:t>utilizat</a:t>
-            </a:r>
-            <a:endParaRPr lang="en-US" sz="4000" b="1" dirty="0">
-              <a:solidFill>
-                <a:srgbClr val="002060"/>
-              </a:solidFill>
-            </a:endParaRPr>
-          </a:p>
-        </p:txBody>
-      </p:sp>
-      <p:sp>
-        <p:nvSpPr>
           <p:cNvPr id="3" name="Content Placeholder 2">
             <a:extLst>
               <a:ext uri="{FF2B5EF4-FFF2-40B4-BE49-F238E27FC236}">
@@ -6829,8 +7413,8 @@
         </p:nvSpPr>
         <p:spPr>
           <a:xfrm>
-            <a:off x="457200" y="1828800"/>
-            <a:ext cx="8229600" cy="2929467"/>
+            <a:off x="254000" y="1066800"/>
+            <a:ext cx="8432800" cy="3691467"/>
           </a:xfrm>
         </p:spPr>
         <p:txBody>
@@ -7025,7 +7609,7 @@
         </p:blipFill>
         <p:spPr>
           <a:xfrm>
-            <a:off x="563032" y="3828601"/>
+            <a:off x="563032" y="3429000"/>
             <a:ext cx="8123768" cy="518726"/>
           </a:xfrm>
           <a:prstGeom prst="rect">
@@ -7033,6 +7617,147 @@
           </a:prstGeom>
         </p:spPr>
       </p:pic>
+      <p:grpSp>
+        <p:nvGrpSpPr>
+          <p:cNvPr id="4" name="Group 3">
+            <a:extLst>
+              <a:ext uri="{FF2B5EF4-FFF2-40B4-BE49-F238E27FC236}">
+                <a16:creationId xmlns:a16="http://schemas.microsoft.com/office/drawing/2014/main" id="{93052B0E-B791-2894-C29E-74E26214D100}"/>
+              </a:ext>
+            </a:extLst>
+          </p:cNvPr>
+          <p:cNvGrpSpPr/>
+          <p:nvPr/>
+        </p:nvGrpSpPr>
+        <p:grpSpPr>
+          <a:xfrm>
+            <a:off x="0" y="0"/>
+            <a:ext cx="9144000" cy="608061"/>
+            <a:chOff x="0" y="0"/>
+            <a:chExt cx="9144000" cy="658368"/>
+          </a:xfrm>
+        </p:grpSpPr>
+        <p:sp>
+          <p:nvSpPr>
+            <p:cNvPr id="5" name="Shape 0">
+              <a:extLst>
+                <a:ext uri="{FF2B5EF4-FFF2-40B4-BE49-F238E27FC236}">
+                  <a16:creationId xmlns:a16="http://schemas.microsoft.com/office/drawing/2014/main" id="{603785FB-AB8D-4AB6-6EA3-06C33115DBBC}"/>
+                </a:ext>
+              </a:extLst>
+            </p:cNvPr>
+            <p:cNvSpPr/>
+            <p:nvPr/>
+          </p:nvSpPr>
+          <p:spPr>
+            <a:xfrm>
+              <a:off x="0" y="0"/>
+              <a:ext cx="9144000" cy="658368"/>
+            </a:xfrm>
+            <a:prstGeom prst="rect">
+              <a:avLst/>
+            </a:prstGeom>
+            <a:solidFill>
+              <a:srgbClr val="1E2761"/>
+            </a:solidFill>
+            <a:ln w="12700">
+              <a:solidFill>
+                <a:srgbClr val="1E2761"/>
+              </a:solidFill>
+              <a:prstDash val="solid"/>
+            </a:ln>
+          </p:spPr>
+          <p:txBody>
+            <a:bodyPr/>
+            <a:lstStyle/>
+            <a:p>
+              <a:endParaRPr lang="en-US">
+                <a:solidFill>
+                  <a:schemeClr val="bg1"/>
+                </a:solidFill>
+              </a:endParaRPr>
+            </a:p>
+          </p:txBody>
+        </p:sp>
+        <p:sp>
+          <p:nvSpPr>
+            <p:cNvPr id="6" name="Title 1">
+              <a:extLst>
+                <a:ext uri="{FF2B5EF4-FFF2-40B4-BE49-F238E27FC236}">
+                  <a16:creationId xmlns:a16="http://schemas.microsoft.com/office/drawing/2014/main" id="{440B9B0E-9E76-CAFB-A23C-1DEA64F005C5}"/>
+                </a:ext>
+              </a:extLst>
+            </p:cNvPr>
+            <p:cNvSpPr txBox="1">
+              <a:spLocks/>
+            </p:cNvSpPr>
+            <p:nvPr/>
+          </p:nvSpPr>
+          <p:spPr>
+            <a:xfrm>
+              <a:off x="254000" y="76200"/>
+              <a:ext cx="8796866" cy="449165"/>
+            </a:xfrm>
+            <a:prstGeom prst="rect">
+              <a:avLst/>
+            </a:prstGeom>
+          </p:spPr>
+          <p:txBody>
+            <a:bodyPr vert="horz" lIns="91440" tIns="45720" rIns="91440" bIns="45720" rtlCol="0" anchor="ctr">
+              <a:noAutofit/>
+            </a:bodyPr>
+            <a:lstStyle>
+              <a:lvl1pPr algn="ctr" defTabSz="457200" rtl="0" eaLnBrk="1" latinLnBrk="0" hangingPunct="1">
+                <a:spcBef>
+                  <a:spcPct val="0"/>
+                </a:spcBef>
+                <a:buNone/>
+                <a:defRPr sz="4400" kern="1200">
+                  <a:solidFill>
+                    <a:schemeClr val="tx1"/>
+                  </a:solidFill>
+                  <a:latin typeface="+mj-lt"/>
+                  <a:ea typeface="+mj-ea"/>
+                  <a:cs typeface="+mj-cs"/>
+                </a:defRPr>
+              </a:lvl1pPr>
+            </a:lstStyle>
+            <a:p>
+              <a:pPr algn="l"/>
+              <a:r>
+                <a:rPr lang="en-US" sz="4000" b="1" dirty="0" err="1">
+                  <a:solidFill>
+                    <a:schemeClr val="bg1"/>
+                  </a:solidFill>
+                </a:rPr>
+                <a:t>Datasetul</a:t>
+              </a:r>
+              <a:r>
+                <a:rPr lang="en-US" sz="4000" b="1" dirty="0">
+                  <a:solidFill>
+                    <a:schemeClr val="bg1"/>
+                  </a:solidFill>
+                </a:rPr>
+                <a:t> </a:t>
+              </a:r>
+              <a:r>
+                <a:rPr lang="en-US" sz="4000" b="1" dirty="0" err="1">
+                  <a:solidFill>
+                    <a:schemeClr val="bg1"/>
+                  </a:solidFill>
+                </a:rPr>
+                <a:t>utilizat</a:t>
+              </a:r>
+              <a:endParaRPr lang="en-US" sz="4000" b="1" dirty="0">
+                <a:solidFill>
+                  <a:schemeClr val="bg1"/>
+                </a:solidFill>
+                <a:latin typeface="Arial"/>
+              </a:endParaRPr>
+            </a:p>
+          </p:txBody>
+        </p:sp>
+      </p:grpSp>
     </p:spTree>
     <p:extLst>
       <p:ext uri="{BB962C8B-B14F-4D97-AF65-F5344CB8AC3E}">
@@ -7071,69 +7796,6 @@
       </p:grpSpPr>
       <p:sp>
         <p:nvSpPr>
-          <p:cNvPr id="2" name="Title 1">
-            <a:extLst>
-              <a:ext uri="{FF2B5EF4-FFF2-40B4-BE49-F238E27FC236}">
-                <a16:creationId xmlns:a16="http://schemas.microsoft.com/office/drawing/2014/main" id="{F22CEA20-175C-7F5B-9215-5D165095E4F8}"/>
-              </a:ext>
-            </a:extLst>
-          </p:cNvPr>
-          <p:cNvSpPr>
-            <a:spLocks noGrp="1"/>
-          </p:cNvSpPr>
-          <p:nvPr>
-            <p:ph type="title"/>
-          </p:nvPr>
-        </p:nvSpPr>
-        <p:spPr/>
-        <p:txBody>
-          <a:bodyPr>
-            <a:normAutofit/>
-          </a:bodyPr>
-          <a:lstStyle/>
-          <a:p>
-            <a:r>
-              <a:rPr lang="en-US" sz="4000" b="1" dirty="0">
-                <a:solidFill>
-                  <a:srgbClr val="002060"/>
-                </a:solidFill>
-              </a:rPr>
-              <a:t>Pre-</a:t>
-            </a:r>
-            <a:r>
-              <a:rPr lang="en-US" sz="4000" b="1" dirty="0" err="1">
-                <a:solidFill>
-                  <a:srgbClr val="002060"/>
-                </a:solidFill>
-              </a:rPr>
-              <a:t>procesarea</a:t>
-            </a:r>
-            <a:r>
-              <a:rPr lang="en-US" sz="4000" b="1" dirty="0">
-                <a:solidFill>
-                  <a:srgbClr val="002060"/>
-                </a:solidFill>
-              </a:rPr>
-              <a:t> </a:t>
-            </a:r>
-            <a:r>
-              <a:rPr lang="en-US" sz="4000" b="1" dirty="0" err="1">
-                <a:solidFill>
-                  <a:srgbClr val="002060"/>
-                </a:solidFill>
-              </a:rPr>
-              <a:t>datelor</a:t>
-            </a:r>
-            <a:endParaRPr lang="en-US" sz="4000" b="1" dirty="0">
-              <a:solidFill>
-                <a:srgbClr val="002060"/>
-              </a:solidFill>
-            </a:endParaRPr>
-          </a:p>
-        </p:txBody>
-      </p:sp>
-      <p:sp>
-        <p:nvSpPr>
           <p:cNvPr id="11" name="TextBox 10">
             <a:extLst>
               <a:ext uri="{FF2B5EF4-FFF2-40B4-BE49-F238E27FC236}">
@@ -7146,7 +7808,7 @@
         </p:nvSpPr>
         <p:spPr>
           <a:xfrm>
-            <a:off x="457200" y="2188334"/>
+            <a:off x="254000" y="1434801"/>
             <a:ext cx="8288867" cy="2292935"/>
           </a:xfrm>
           <a:prstGeom prst="rect">
@@ -7203,19 +7865,19 @@
               <a:t>- </a:t>
             </a:r>
             <a:r>
-              <a:rPr lang="en-US" sz="1400" dirty="0" err="1"/>
+              <a:rPr lang="en-US" sz="1400" b="1" dirty="0" err="1"/>
               <a:t>numele</a:t>
             </a:r>
             <a:r>
-              <a:rPr lang="en-US" sz="1400" dirty="0"/>
-              <a:t> </a:t>
-            </a:r>
-            <a:r>
-              <a:rPr lang="en-US" sz="1400" dirty="0" err="1"/>
+              <a:rPr lang="en-US" sz="1400" b="1" dirty="0"/>
+              <a:t> </a:t>
+            </a:r>
+            <a:r>
+              <a:rPr lang="en-US" sz="1400" b="1" dirty="0" err="1"/>
               <a:t>atributelor</a:t>
             </a:r>
             <a:r>
-              <a:rPr lang="en-US" sz="1400" dirty="0"/>
+              <a:rPr lang="en-US" sz="1400" b="1" dirty="0"/>
               <a:t> </a:t>
             </a:r>
             <a:r>
@@ -7256,15 +7918,27 @@
             </a:r>
             <a:r>
               <a:rPr lang="en-US" sz="1400" dirty="0"/>
-              <a:t> ‘</a:t>
-            </a:r>
-            <a:r>
-              <a:rPr lang="en-US" sz="1400" dirty="0" err="1"/>
+              <a:t> </a:t>
+            </a:r>
+            <a:r>
+              <a:rPr lang="en-US" sz="1400" b="1" dirty="0"/>
+              <a:t>‘</a:t>
+            </a:r>
+            <a:r>
+              <a:rPr lang="en-US" sz="1400" b="1" dirty="0" err="1"/>
               <a:t>customer_name</a:t>
             </a:r>
             <a:r>
-              <a:rPr lang="en-US" sz="1400" dirty="0"/>
-              <a:t>’ eliminate </a:t>
+              <a:rPr lang="en-US" sz="1400" b="1" dirty="0"/>
+              <a:t>’ </a:t>
+            </a:r>
+            <a:r>
+              <a:rPr lang="en-US" sz="1400" b="1" dirty="0" err="1"/>
+              <a:t>eliminata</a:t>
+            </a:r>
+            <a:r>
+              <a:rPr lang="en-US" sz="1400" b="1" dirty="0"/>
+              <a:t> </a:t>
             </a:r>
             <a:r>
               <a:rPr lang="en-US" sz="1400" dirty="0" err="1"/>
@@ -7299,14 +7973,18 @@
             </a:r>
             <a:r>
               <a:rPr lang="en-US" sz="1400" dirty="0"/>
-              <a:t> ‘country’ </a:t>
-            </a:r>
-            <a:r>
-              <a:rPr lang="en-US" sz="1400" dirty="0" err="1"/>
-              <a:t>elmiminata</a:t>
-            </a:r>
-            <a:r>
-              <a:rPr lang="en-US" sz="1400" dirty="0"/>
+              <a:t> </a:t>
+            </a:r>
+            <a:r>
+              <a:rPr lang="en-US" sz="1400" b="1" dirty="0"/>
+              <a:t>‘country’ </a:t>
+            </a:r>
+            <a:r>
+              <a:rPr lang="en-US" sz="1400" b="1" dirty="0" err="1"/>
+              <a:t>elminata</a:t>
+            </a:r>
+            <a:r>
+              <a:rPr lang="en-US" sz="1400" b="1" dirty="0"/>
               <a:t> </a:t>
             </a:r>
             <a:r>
@@ -7334,23 +8012,31 @@
             </a:pPr>
             <a:r>
               <a:rPr lang="en-US" sz="1400" dirty="0"/>
-              <a:t>	- 7 </a:t>
-            </a:r>
-            <a:r>
-              <a:rPr lang="en-US" sz="1400" dirty="0" err="1"/>
+              <a:t>	</a:t>
+            </a:r>
+            <a:r>
+              <a:rPr lang="en-US" sz="1400" b="1" dirty="0"/>
+              <a:t>- 7 </a:t>
+            </a:r>
+            <a:r>
+              <a:rPr lang="en-US" sz="1400" b="1" dirty="0" err="1"/>
               <a:t>coloane</a:t>
             </a:r>
             <a:r>
-              <a:rPr lang="en-US" sz="1400" dirty="0"/>
-              <a:t> </a:t>
-            </a:r>
-            <a:r>
-              <a:rPr lang="en-US" sz="1400" dirty="0" err="1"/>
+              <a:rPr lang="en-US" sz="1400" b="1" dirty="0"/>
+              <a:t> </a:t>
+            </a:r>
+            <a:r>
+              <a:rPr lang="en-US" sz="1400" b="1" dirty="0" err="1"/>
               <a:t>noi</a:t>
             </a:r>
             <a:r>
-              <a:rPr lang="en-US" sz="1400" dirty="0"/>
-              <a:t> : an, luna zi, delay: derivate din ‘</a:t>
+              <a:rPr lang="en-US" sz="1400" b="1" dirty="0"/>
+              <a:t> </a:t>
+            </a:r>
+            <a:r>
+              <a:rPr lang="en-US" sz="1400" dirty="0"/>
+              <a:t>: an, luna zi, delay: derivate din ‘</a:t>
             </a:r>
             <a:r>
               <a:rPr lang="en-US" sz="1400" dirty="0" err="1"/>
@@ -7377,23 +8063,31 @@
             </a:pPr>
             <a:r>
               <a:rPr lang="en-US" sz="1400" dirty="0"/>
-              <a:t>	- 2 </a:t>
-            </a:r>
-            <a:r>
-              <a:rPr lang="en-US" sz="1400" dirty="0" err="1"/>
+              <a:t>	</a:t>
+            </a:r>
+            <a:r>
+              <a:rPr lang="en-US" sz="1400" b="1" dirty="0"/>
+              <a:t>- 2 </a:t>
+            </a:r>
+            <a:r>
+              <a:rPr lang="en-US" sz="1400" b="1" dirty="0" err="1"/>
               <a:t>coloane</a:t>
             </a:r>
             <a:r>
-              <a:rPr lang="en-US" sz="1400" dirty="0"/>
-              <a:t> </a:t>
-            </a:r>
-            <a:r>
-              <a:rPr lang="en-US" sz="1400" dirty="0" err="1"/>
+              <a:rPr lang="en-US" sz="1400" b="1" dirty="0"/>
+              <a:t> </a:t>
+            </a:r>
+            <a:r>
+              <a:rPr lang="en-US" sz="1400" b="1" dirty="0" err="1"/>
               <a:t>noi</a:t>
             </a:r>
             <a:r>
-              <a:rPr lang="en-US" sz="1400" dirty="0"/>
-              <a:t> : </a:t>
+              <a:rPr lang="en-US" sz="1400" b="1" dirty="0"/>
+              <a:t> </a:t>
+            </a:r>
+            <a:r>
+              <a:rPr lang="en-US" sz="1400" dirty="0"/>
+              <a:t>: </a:t>
             </a:r>
             <a:r>
               <a:rPr lang="en-US" sz="1400" dirty="0" err="1"/>
@@ -7449,6 +8143,151 @@
           </a:p>
         </p:txBody>
       </p:sp>
+      <p:grpSp>
+        <p:nvGrpSpPr>
+          <p:cNvPr id="3" name="Group 2">
+            <a:extLst>
+              <a:ext uri="{FF2B5EF4-FFF2-40B4-BE49-F238E27FC236}">
+                <a16:creationId xmlns:a16="http://schemas.microsoft.com/office/drawing/2014/main" id="{7FD4A813-6F06-00BE-5058-FE2FD82B09DF}"/>
+              </a:ext>
+            </a:extLst>
+          </p:cNvPr>
+          <p:cNvGrpSpPr/>
+          <p:nvPr/>
+        </p:nvGrpSpPr>
+        <p:grpSpPr>
+          <a:xfrm>
+            <a:off x="0" y="0"/>
+            <a:ext cx="9144000" cy="685802"/>
+            <a:chOff x="0" y="0"/>
+            <a:chExt cx="9144000" cy="658368"/>
+          </a:xfrm>
+        </p:grpSpPr>
+        <p:sp>
+          <p:nvSpPr>
+            <p:cNvPr id="4" name="Shape 0">
+              <a:extLst>
+                <a:ext uri="{FF2B5EF4-FFF2-40B4-BE49-F238E27FC236}">
+                  <a16:creationId xmlns:a16="http://schemas.microsoft.com/office/drawing/2014/main" id="{122D150E-7F8A-A6E6-4BFE-B2AF3C29BE3A}"/>
+                </a:ext>
+              </a:extLst>
+            </p:cNvPr>
+            <p:cNvSpPr/>
+            <p:nvPr/>
+          </p:nvSpPr>
+          <p:spPr>
+            <a:xfrm>
+              <a:off x="0" y="0"/>
+              <a:ext cx="9144000" cy="658368"/>
+            </a:xfrm>
+            <a:prstGeom prst="rect">
+              <a:avLst/>
+            </a:prstGeom>
+            <a:solidFill>
+              <a:srgbClr val="1E2761"/>
+            </a:solidFill>
+            <a:ln w="12700">
+              <a:solidFill>
+                <a:srgbClr val="1E2761"/>
+              </a:solidFill>
+              <a:prstDash val="solid"/>
+            </a:ln>
+          </p:spPr>
+          <p:txBody>
+            <a:bodyPr/>
+            <a:lstStyle/>
+            <a:p>
+              <a:endParaRPr lang="en-US"/>
+            </a:p>
+          </p:txBody>
+        </p:sp>
+        <p:sp>
+          <p:nvSpPr>
+            <p:cNvPr id="5" name="Title 1">
+              <a:extLst>
+                <a:ext uri="{FF2B5EF4-FFF2-40B4-BE49-F238E27FC236}">
+                  <a16:creationId xmlns:a16="http://schemas.microsoft.com/office/drawing/2014/main" id="{BD8C8E86-E764-03DE-8CED-940D9B6975EC}"/>
+                </a:ext>
+              </a:extLst>
+            </p:cNvPr>
+            <p:cNvSpPr txBox="1">
+              <a:spLocks/>
+            </p:cNvSpPr>
+            <p:nvPr/>
+          </p:nvSpPr>
+          <p:spPr>
+            <a:xfrm>
+              <a:off x="254000" y="76200"/>
+              <a:ext cx="8796866" cy="516332"/>
+            </a:xfrm>
+            <a:prstGeom prst="rect">
+              <a:avLst/>
+            </a:prstGeom>
+          </p:spPr>
+          <p:txBody>
+            <a:bodyPr vert="horz" lIns="91440" tIns="45720" rIns="91440" bIns="45720" rtlCol="0" anchor="ctr">
+              <a:noAutofit/>
+            </a:bodyPr>
+            <a:lstStyle>
+              <a:lvl1pPr algn="ctr" defTabSz="457200" rtl="0" eaLnBrk="1" latinLnBrk="0" hangingPunct="1">
+                <a:spcBef>
+                  <a:spcPct val="0"/>
+                </a:spcBef>
+                <a:buNone/>
+                <a:defRPr sz="4400" kern="1200">
+                  <a:solidFill>
+                    <a:schemeClr val="tx1"/>
+                  </a:solidFill>
+                  <a:latin typeface="+mj-lt"/>
+                  <a:ea typeface="+mj-ea"/>
+                  <a:cs typeface="+mj-cs"/>
+                </a:defRPr>
+              </a:lvl1pPr>
+            </a:lstStyle>
+            <a:p>
+              <a:pPr algn="l"/>
+              <a:r>
+                <a:rPr lang="en-US" sz="4000" b="1" dirty="0">
+                  <a:solidFill>
+                    <a:schemeClr val="bg1"/>
+                  </a:solidFill>
+                </a:rPr>
+                <a:t>Pre-</a:t>
+              </a:r>
+              <a:r>
+                <a:rPr lang="en-US" sz="4000" b="1" dirty="0" err="1">
+                  <a:solidFill>
+                    <a:schemeClr val="bg1"/>
+                  </a:solidFill>
+                </a:rPr>
+                <a:t>procesarea</a:t>
+              </a:r>
+              <a:r>
+                <a:rPr lang="en-US" sz="4000" b="1" dirty="0">
+                  <a:solidFill>
+                    <a:schemeClr val="bg1"/>
+                  </a:solidFill>
+                </a:rPr>
+                <a:t> </a:t>
+              </a:r>
+              <a:r>
+                <a:rPr lang="en-US" sz="4000" b="1" dirty="0" err="1">
+                  <a:solidFill>
+                    <a:schemeClr val="bg1"/>
+                  </a:solidFill>
+                </a:rPr>
+                <a:t>datelor</a:t>
+              </a:r>
+              <a:endParaRPr lang="en-US" sz="4000" b="1" dirty="0">
+                <a:solidFill>
+                  <a:schemeClr val="bg1"/>
+                </a:solidFill>
+                <a:latin typeface="Arial"/>
+              </a:endParaRPr>
+            </a:p>
+          </p:txBody>
+        </p:sp>
+      </p:grpSp>
     </p:spTree>
     <p:extLst>
       <p:ext uri="{BB962C8B-B14F-4D97-AF65-F5344CB8AC3E}">
@@ -7479,56 +8318,6 @@
           <a:chExt cx="0" cy="0"/>
         </a:xfrm>
       </p:grpSpPr>
-      <p:sp>
-        <p:nvSpPr>
-          <p:cNvPr id="2" name="Title 1">
-            <a:extLst>
-              <a:ext uri="{FF2B5EF4-FFF2-40B4-BE49-F238E27FC236}">
-                <a16:creationId xmlns:a16="http://schemas.microsoft.com/office/drawing/2014/main" id="{BFE9112E-C459-247E-6DC9-5818798910AB}"/>
-              </a:ext>
-            </a:extLst>
-          </p:cNvPr>
-          <p:cNvSpPr>
-            <a:spLocks noGrp="1"/>
-          </p:cNvSpPr>
-          <p:nvPr>
-            <p:ph type="title"/>
-          </p:nvPr>
-        </p:nvSpPr>
-        <p:spPr/>
-        <p:txBody>
-          <a:bodyPr>
-            <a:normAutofit/>
-          </a:bodyPr>
-          <a:lstStyle/>
-          <a:p>
-            <a:r>
-              <a:rPr lang="en-US" sz="4000" b="1" dirty="0">
-                <a:solidFill>
-                  <a:srgbClr val="002060"/>
-                </a:solidFill>
-              </a:rPr>
-              <a:t>EDA -</a:t>
-            </a:r>
-            <a:r>
-              <a:rPr lang="en-US" sz="4000" b="1" dirty="0" err="1">
-                <a:solidFill>
-                  <a:srgbClr val="002060"/>
-                </a:solidFill>
-              </a:rPr>
-              <a:t>Exporatory</a:t>
-            </a:r>
-            <a:r>
-              <a:rPr lang="en-US" sz="4000" b="1" dirty="0">
-                <a:solidFill>
-                  <a:srgbClr val="002060"/>
-                </a:solidFill>
-              </a:rPr>
-              <a:t> Data Analysis (1)</a:t>
-            </a:r>
-          </a:p>
-        </p:txBody>
-      </p:sp>
       <p:pic>
         <p:nvPicPr>
           <p:cNvPr id="19" name="Content Placeholder 18">
@@ -7553,7 +8342,7 @@
         </p:blipFill>
         <p:spPr>
           <a:xfrm>
-            <a:off x="376226" y="1532046"/>
+            <a:off x="230551" y="1278046"/>
             <a:ext cx="8682898" cy="3303189"/>
           </a:xfrm>
           <a:prstGeom prst="rect">
@@ -7561,6 +8350,143 @@
           </a:prstGeom>
         </p:spPr>
       </p:pic>
+      <p:grpSp>
+        <p:nvGrpSpPr>
+          <p:cNvPr id="4" name="Group 3">
+            <a:extLst>
+              <a:ext uri="{FF2B5EF4-FFF2-40B4-BE49-F238E27FC236}">
+                <a16:creationId xmlns:a16="http://schemas.microsoft.com/office/drawing/2014/main" id="{319D314E-620E-1CA8-8DC6-7871518117E3}"/>
+              </a:ext>
+            </a:extLst>
+          </p:cNvPr>
+          <p:cNvGrpSpPr/>
+          <p:nvPr/>
+        </p:nvGrpSpPr>
+        <p:grpSpPr>
+          <a:xfrm>
+            <a:off x="0" y="1"/>
+            <a:ext cx="9144000" cy="642804"/>
+            <a:chOff x="0" y="0"/>
+            <a:chExt cx="9144000" cy="658368"/>
+          </a:xfrm>
+        </p:grpSpPr>
+        <p:sp>
+          <p:nvSpPr>
+            <p:cNvPr id="5" name="Shape 0">
+              <a:extLst>
+                <a:ext uri="{FF2B5EF4-FFF2-40B4-BE49-F238E27FC236}">
+                  <a16:creationId xmlns:a16="http://schemas.microsoft.com/office/drawing/2014/main" id="{72A2D606-7663-4CB6-0BD0-6FF39BCBC0C9}"/>
+                </a:ext>
+              </a:extLst>
+            </p:cNvPr>
+            <p:cNvSpPr/>
+            <p:nvPr/>
+          </p:nvSpPr>
+          <p:spPr>
+            <a:xfrm>
+              <a:off x="0" y="0"/>
+              <a:ext cx="9144000" cy="658368"/>
+            </a:xfrm>
+            <a:prstGeom prst="rect">
+              <a:avLst/>
+            </a:prstGeom>
+            <a:solidFill>
+              <a:srgbClr val="1E2761"/>
+            </a:solidFill>
+            <a:ln w="12700">
+              <a:solidFill>
+                <a:srgbClr val="1E2761"/>
+              </a:solidFill>
+              <a:prstDash val="solid"/>
+            </a:ln>
+          </p:spPr>
+          <p:txBody>
+            <a:bodyPr/>
+            <a:lstStyle/>
+            <a:p>
+              <a:endParaRPr lang="en-US"/>
+            </a:p>
+          </p:txBody>
+        </p:sp>
+        <p:sp>
+          <p:nvSpPr>
+            <p:cNvPr id="6" name="Title 1">
+              <a:extLst>
+                <a:ext uri="{FF2B5EF4-FFF2-40B4-BE49-F238E27FC236}">
+                  <a16:creationId xmlns:a16="http://schemas.microsoft.com/office/drawing/2014/main" id="{68E80AEC-F7F9-9E1D-9D2B-F38A3667CF0E}"/>
+                </a:ext>
+              </a:extLst>
+            </p:cNvPr>
+            <p:cNvSpPr txBox="1">
+              <a:spLocks/>
+            </p:cNvSpPr>
+            <p:nvPr/>
+          </p:nvSpPr>
+          <p:spPr>
+            <a:xfrm>
+              <a:off x="254000" y="76200"/>
+              <a:ext cx="8796866" cy="491804"/>
+            </a:xfrm>
+            <a:prstGeom prst="rect">
+              <a:avLst/>
+            </a:prstGeom>
+          </p:spPr>
+          <p:txBody>
+            <a:bodyPr vert="horz" lIns="91440" tIns="45720" rIns="91440" bIns="45720" rtlCol="0" anchor="ctr">
+              <a:noAutofit/>
+            </a:bodyPr>
+            <a:lstStyle>
+              <a:lvl1pPr algn="ctr" defTabSz="457200" rtl="0" eaLnBrk="1" latinLnBrk="0" hangingPunct="1">
+                <a:spcBef>
+                  <a:spcPct val="0"/>
+                </a:spcBef>
+                <a:buNone/>
+                <a:defRPr sz="4400" kern="1200">
+                  <a:solidFill>
+                    <a:schemeClr val="tx1"/>
+                  </a:solidFill>
+                  <a:latin typeface="+mj-lt"/>
+                  <a:ea typeface="+mj-ea"/>
+                  <a:cs typeface="+mj-cs"/>
+                </a:defRPr>
+              </a:lvl1pPr>
+            </a:lstStyle>
+            <a:p>
+              <a:pPr algn="l"/>
+              <a:r>
+                <a:rPr lang="en-US" sz="4000" b="1" dirty="0">
+                  <a:solidFill>
+                    <a:schemeClr val="bg1"/>
+                  </a:solidFill>
+                </a:rPr>
+                <a:t>EDA -</a:t>
+              </a:r>
+              <a:r>
+                <a:rPr lang="en-US" sz="4000" b="1" dirty="0" err="1">
+                  <a:solidFill>
+                    <a:schemeClr val="bg1"/>
+                  </a:solidFill>
+                </a:rPr>
+                <a:t>Exporatory</a:t>
+              </a:r>
+              <a:r>
+                <a:rPr lang="en-US" sz="4000" b="1" dirty="0">
+                  <a:solidFill>
+                    <a:schemeClr val="bg1"/>
+                  </a:solidFill>
+                </a:rPr>
+                <a:t> Data Analysis (1)</a:t>
+              </a:r>
+              <a:endParaRPr lang="en-US" sz="4000" b="1" dirty="0">
+                <a:solidFill>
+                  <a:schemeClr val="bg1"/>
+                </a:solidFill>
+                <a:latin typeface="Arial"/>
+              </a:endParaRPr>
+            </a:p>
+          </p:txBody>
+        </p:sp>
+      </p:grpSp>
     </p:spTree>
     <p:extLst>
       <p:ext uri="{BB962C8B-B14F-4D97-AF65-F5344CB8AC3E}">
@@ -7597,56 +8523,6 @@
           <a:chExt cx="0" cy="0"/>
         </a:xfrm>
       </p:grpSpPr>
-      <p:sp>
-        <p:nvSpPr>
-          <p:cNvPr id="2" name="Title 1">
-            <a:extLst>
-              <a:ext uri="{FF2B5EF4-FFF2-40B4-BE49-F238E27FC236}">
-                <a16:creationId xmlns:a16="http://schemas.microsoft.com/office/drawing/2014/main" id="{BECE5B1A-DA77-89CE-5B87-B4DCB8C38272}"/>
-              </a:ext>
-            </a:extLst>
-          </p:cNvPr>
-          <p:cNvSpPr>
-            <a:spLocks noGrp="1"/>
-          </p:cNvSpPr>
-          <p:nvPr>
-            <p:ph type="title"/>
-          </p:nvPr>
-        </p:nvSpPr>
-        <p:spPr/>
-        <p:txBody>
-          <a:bodyPr>
-            <a:normAutofit/>
-          </a:bodyPr>
-          <a:lstStyle/>
-          <a:p>
-            <a:r>
-              <a:rPr lang="en-US" sz="4000" b="1" dirty="0">
-                <a:solidFill>
-                  <a:srgbClr val="002060"/>
-                </a:solidFill>
-              </a:rPr>
-              <a:t>EDA -</a:t>
-            </a:r>
-            <a:r>
-              <a:rPr lang="en-US" sz="4000" b="1" dirty="0" err="1">
-                <a:solidFill>
-                  <a:srgbClr val="002060"/>
-                </a:solidFill>
-              </a:rPr>
-              <a:t>Exporatory</a:t>
-            </a:r>
-            <a:r>
-              <a:rPr lang="en-US" sz="4000" b="1" dirty="0">
-                <a:solidFill>
-                  <a:srgbClr val="002060"/>
-                </a:solidFill>
-              </a:rPr>
-              <a:t> Data Analysis (2)</a:t>
-            </a:r>
-          </a:p>
-        </p:txBody>
-      </p:sp>
       <p:pic>
         <p:nvPicPr>
           <p:cNvPr id="7" name="Picture 6">
@@ -7669,7 +8545,7 @@
         </p:blipFill>
         <p:spPr>
           <a:xfrm>
-            <a:off x="0" y="2042319"/>
+            <a:off x="0" y="1559719"/>
             <a:ext cx="8978449" cy="2773362"/>
           </a:xfrm>
           <a:prstGeom prst="rect">
@@ -7677,6 +8553,143 @@
           </a:prstGeom>
         </p:spPr>
       </p:pic>
+      <p:grpSp>
+        <p:nvGrpSpPr>
+          <p:cNvPr id="3" name="Group 2">
+            <a:extLst>
+              <a:ext uri="{FF2B5EF4-FFF2-40B4-BE49-F238E27FC236}">
+                <a16:creationId xmlns:a16="http://schemas.microsoft.com/office/drawing/2014/main" id="{F139B3EE-3378-A293-B40E-90867E8B1058}"/>
+              </a:ext>
+            </a:extLst>
+          </p:cNvPr>
+          <p:cNvGrpSpPr/>
+          <p:nvPr/>
+        </p:nvGrpSpPr>
+        <p:grpSpPr>
+          <a:xfrm>
+            <a:off x="0" y="1"/>
+            <a:ext cx="9144000" cy="642804"/>
+            <a:chOff x="0" y="0"/>
+            <a:chExt cx="9144000" cy="658368"/>
+          </a:xfrm>
+        </p:grpSpPr>
+        <p:sp>
+          <p:nvSpPr>
+            <p:cNvPr id="4" name="Shape 0">
+              <a:extLst>
+                <a:ext uri="{FF2B5EF4-FFF2-40B4-BE49-F238E27FC236}">
+                  <a16:creationId xmlns:a16="http://schemas.microsoft.com/office/drawing/2014/main" id="{8EA995FF-39C4-CC52-D982-B42D1577EFF9}"/>
+                </a:ext>
+              </a:extLst>
+            </p:cNvPr>
+            <p:cNvSpPr/>
+            <p:nvPr/>
+          </p:nvSpPr>
+          <p:spPr>
+            <a:xfrm>
+              <a:off x="0" y="0"/>
+              <a:ext cx="9144000" cy="658368"/>
+            </a:xfrm>
+            <a:prstGeom prst="rect">
+              <a:avLst/>
+            </a:prstGeom>
+            <a:solidFill>
+              <a:srgbClr val="1E2761"/>
+            </a:solidFill>
+            <a:ln w="12700">
+              <a:solidFill>
+                <a:srgbClr val="1E2761"/>
+              </a:solidFill>
+              <a:prstDash val="solid"/>
+            </a:ln>
+          </p:spPr>
+          <p:txBody>
+            <a:bodyPr/>
+            <a:lstStyle/>
+            <a:p>
+              <a:endParaRPr lang="en-US"/>
+            </a:p>
+          </p:txBody>
+        </p:sp>
+        <p:sp>
+          <p:nvSpPr>
+            <p:cNvPr id="5" name="Title 1">
+              <a:extLst>
+                <a:ext uri="{FF2B5EF4-FFF2-40B4-BE49-F238E27FC236}">
+                  <a16:creationId xmlns:a16="http://schemas.microsoft.com/office/drawing/2014/main" id="{7CEA8F6C-E5D7-9CA9-EC02-BC42C1E484A0}"/>
+                </a:ext>
+              </a:extLst>
+            </p:cNvPr>
+            <p:cNvSpPr txBox="1">
+              <a:spLocks/>
+            </p:cNvSpPr>
+            <p:nvPr/>
+          </p:nvSpPr>
+          <p:spPr>
+            <a:xfrm>
+              <a:off x="254000" y="76200"/>
+              <a:ext cx="8796866" cy="491804"/>
+            </a:xfrm>
+            <a:prstGeom prst="rect">
+              <a:avLst/>
+            </a:prstGeom>
+          </p:spPr>
+          <p:txBody>
+            <a:bodyPr vert="horz" lIns="91440" tIns="45720" rIns="91440" bIns="45720" rtlCol="0" anchor="ctr">
+              <a:noAutofit/>
+            </a:bodyPr>
+            <a:lstStyle>
+              <a:lvl1pPr algn="ctr" defTabSz="457200" rtl="0" eaLnBrk="1" latinLnBrk="0" hangingPunct="1">
+                <a:spcBef>
+                  <a:spcPct val="0"/>
+                </a:spcBef>
+                <a:buNone/>
+                <a:defRPr sz="4400" kern="1200">
+                  <a:solidFill>
+                    <a:schemeClr val="tx1"/>
+                  </a:solidFill>
+                  <a:latin typeface="+mj-lt"/>
+                  <a:ea typeface="+mj-ea"/>
+                  <a:cs typeface="+mj-cs"/>
+                </a:defRPr>
+              </a:lvl1pPr>
+            </a:lstStyle>
+            <a:p>
+              <a:pPr algn="l"/>
+              <a:r>
+                <a:rPr lang="en-US" sz="4000" b="1" dirty="0">
+                  <a:solidFill>
+                    <a:schemeClr val="bg1"/>
+                  </a:solidFill>
+                </a:rPr>
+                <a:t>EDA -</a:t>
+              </a:r>
+              <a:r>
+                <a:rPr lang="en-US" sz="4000" b="1" dirty="0" err="1">
+                  <a:solidFill>
+                    <a:schemeClr val="bg1"/>
+                  </a:solidFill>
+                </a:rPr>
+                <a:t>Exporatory</a:t>
+              </a:r>
+              <a:r>
+                <a:rPr lang="en-US" sz="4000" b="1" dirty="0">
+                  <a:solidFill>
+                    <a:schemeClr val="bg1"/>
+                  </a:solidFill>
+                </a:rPr>
+                <a:t> Data Analysis (2)</a:t>
+              </a:r>
+              <a:endParaRPr lang="en-US" sz="4000" b="1" dirty="0">
+                <a:solidFill>
+                  <a:schemeClr val="bg1"/>
+                </a:solidFill>
+                <a:latin typeface="Arial"/>
+              </a:endParaRPr>
+            </a:p>
+          </p:txBody>
+        </p:sp>
+      </p:grpSp>
     </p:spTree>
     <p:extLst>
       <p:ext uri="{BB962C8B-B14F-4D97-AF65-F5344CB8AC3E}">
@@ -7941,77 +8954,6 @@
           </a:p>
         </p:txBody>
       </p:sp>
-      <p:sp>
-        <p:nvSpPr>
-          <p:cNvPr id="4" name="Title 1">
-            <a:extLst>
-              <a:ext uri="{FF2B5EF4-FFF2-40B4-BE49-F238E27FC236}">
-                <a16:creationId xmlns:a16="http://schemas.microsoft.com/office/drawing/2014/main" id="{B8571E87-9F19-0E8C-385F-4A8F752F5E06}"/>
-              </a:ext>
-            </a:extLst>
-          </p:cNvPr>
-          <p:cNvSpPr txBox="1">
-            <a:spLocks/>
-          </p:cNvSpPr>
-          <p:nvPr/>
-        </p:nvSpPr>
-        <p:spPr>
-          <a:xfrm>
-            <a:off x="554182" y="160337"/>
-            <a:ext cx="8229600" cy="1143000"/>
-          </a:xfrm>
-          <a:prstGeom prst="rect">
-            <a:avLst/>
-          </a:prstGeom>
-        </p:spPr>
-        <p:txBody>
-          <a:bodyPr vert="horz" lIns="91440" tIns="45720" rIns="91440" bIns="45720" rtlCol="0" anchor="ctr">
-            <a:normAutofit/>
-          </a:bodyPr>
-          <a:lstStyle>
-            <a:lvl1pPr algn="ctr" defTabSz="457200" rtl="0" eaLnBrk="1" latinLnBrk="0" hangingPunct="1">
-              <a:spcBef>
-                <a:spcPct val="0"/>
-              </a:spcBef>
-              <a:buNone/>
-              <a:defRPr sz="4400" kern="1200">
-                <a:solidFill>
-                  <a:schemeClr val="tx1"/>
-                </a:solidFill>
-                <a:latin typeface="+mj-lt"/>
-                <a:ea typeface="+mj-ea"/>
-                <a:cs typeface="+mj-cs"/>
-              </a:defRPr>
-            </a:lvl1pPr>
-          </a:lstStyle>
-          <a:p>
-            <a:r>
-              <a:rPr lang="en-US" sz="4000" b="1" dirty="0">
-                <a:solidFill>
-                  <a:srgbClr val="002060"/>
-                </a:solidFill>
-              </a:rPr>
-              <a:t>EDA -</a:t>
-            </a:r>
-            <a:r>
-              <a:rPr lang="en-US" sz="4000" b="1" dirty="0" err="1">
-                <a:solidFill>
-                  <a:srgbClr val="002060"/>
-                </a:solidFill>
-              </a:rPr>
-              <a:t>Exporatory</a:t>
-            </a:r>
-            <a:r>
-              <a:rPr lang="en-US" sz="4000" b="1" dirty="0">
-                <a:solidFill>
-                  <a:srgbClr val="002060"/>
-                </a:solidFill>
-              </a:rPr>
-              <a:t> Data Analysis (3)</a:t>
-            </a:r>
-          </a:p>
-        </p:txBody>
-      </p:sp>
       <p:pic>
         <p:nvPicPr>
           <p:cNvPr id="3" name="Picture 2">
@@ -8034,8 +8976,8 @@
         </p:blipFill>
         <p:spPr>
           <a:xfrm>
-            <a:off x="122382" y="1575651"/>
-            <a:ext cx="8661400" cy="3121921"/>
+            <a:off x="122381" y="1488003"/>
+            <a:ext cx="8904569" cy="3209569"/>
           </a:xfrm>
           <a:prstGeom prst="rect">
             <a:avLst/>
@@ -8090,6 +9032,143 @@
           </a:p>
         </p:txBody>
       </p:sp>
+      <p:grpSp>
+        <p:nvGrpSpPr>
+          <p:cNvPr id="2" name="Group 1">
+            <a:extLst>
+              <a:ext uri="{FF2B5EF4-FFF2-40B4-BE49-F238E27FC236}">
+                <a16:creationId xmlns:a16="http://schemas.microsoft.com/office/drawing/2014/main" id="{F1A939AB-BB18-801F-3D7E-DC6C93640044}"/>
+              </a:ext>
+            </a:extLst>
+          </p:cNvPr>
+          <p:cNvGrpSpPr/>
+          <p:nvPr/>
+        </p:nvGrpSpPr>
+        <p:grpSpPr>
+          <a:xfrm>
+            <a:off x="0" y="1"/>
+            <a:ext cx="9144000" cy="593383"/>
+            <a:chOff x="0" y="0"/>
+            <a:chExt cx="9144000" cy="658368"/>
+          </a:xfrm>
+        </p:grpSpPr>
+        <p:sp>
+          <p:nvSpPr>
+            <p:cNvPr id="5" name="Shape 0">
+              <a:extLst>
+                <a:ext uri="{FF2B5EF4-FFF2-40B4-BE49-F238E27FC236}">
+                  <a16:creationId xmlns:a16="http://schemas.microsoft.com/office/drawing/2014/main" id="{544F886A-D49D-1B99-52D8-2D4949360EE0}"/>
+                </a:ext>
+              </a:extLst>
+            </p:cNvPr>
+            <p:cNvSpPr/>
+            <p:nvPr/>
+          </p:nvSpPr>
+          <p:spPr>
+            <a:xfrm>
+              <a:off x="0" y="0"/>
+              <a:ext cx="9144000" cy="658368"/>
+            </a:xfrm>
+            <a:prstGeom prst="rect">
+              <a:avLst/>
+            </a:prstGeom>
+            <a:solidFill>
+              <a:srgbClr val="1E2761"/>
+            </a:solidFill>
+            <a:ln w="12700">
+              <a:solidFill>
+                <a:srgbClr val="1E2761"/>
+              </a:solidFill>
+              <a:prstDash val="solid"/>
+            </a:ln>
+          </p:spPr>
+          <p:txBody>
+            <a:bodyPr/>
+            <a:lstStyle/>
+            <a:p>
+              <a:endParaRPr lang="en-US"/>
+            </a:p>
+          </p:txBody>
+        </p:sp>
+        <p:sp>
+          <p:nvSpPr>
+            <p:cNvPr id="7" name="Title 1">
+              <a:extLst>
+                <a:ext uri="{FF2B5EF4-FFF2-40B4-BE49-F238E27FC236}">
+                  <a16:creationId xmlns:a16="http://schemas.microsoft.com/office/drawing/2014/main" id="{DF941457-1242-CCD9-6BF2-0A6F8D06B448}"/>
+                </a:ext>
+              </a:extLst>
+            </p:cNvPr>
+            <p:cNvSpPr txBox="1">
+              <a:spLocks/>
+            </p:cNvSpPr>
+            <p:nvPr/>
+          </p:nvSpPr>
+          <p:spPr>
+            <a:xfrm>
+              <a:off x="254000" y="76200"/>
+              <a:ext cx="8796866" cy="491804"/>
+            </a:xfrm>
+            <a:prstGeom prst="rect">
+              <a:avLst/>
+            </a:prstGeom>
+          </p:spPr>
+          <p:txBody>
+            <a:bodyPr vert="horz" lIns="91440" tIns="45720" rIns="91440" bIns="45720" rtlCol="0" anchor="ctr">
+              <a:noAutofit/>
+            </a:bodyPr>
+            <a:lstStyle>
+              <a:lvl1pPr algn="ctr" defTabSz="457200" rtl="0" eaLnBrk="1" latinLnBrk="0" hangingPunct="1">
+                <a:spcBef>
+                  <a:spcPct val="0"/>
+                </a:spcBef>
+                <a:buNone/>
+                <a:defRPr sz="4400" kern="1200">
+                  <a:solidFill>
+                    <a:schemeClr val="tx1"/>
+                  </a:solidFill>
+                  <a:latin typeface="+mj-lt"/>
+                  <a:ea typeface="+mj-ea"/>
+                  <a:cs typeface="+mj-cs"/>
+                </a:defRPr>
+              </a:lvl1pPr>
+            </a:lstStyle>
+            <a:p>
+              <a:pPr algn="l"/>
+              <a:r>
+                <a:rPr lang="en-US" sz="4000" b="1" dirty="0">
+                  <a:solidFill>
+                    <a:schemeClr val="bg1"/>
+                  </a:solidFill>
+                </a:rPr>
+                <a:t>EDA -</a:t>
+              </a:r>
+              <a:r>
+                <a:rPr lang="en-US" sz="4000" b="1" dirty="0" err="1">
+                  <a:solidFill>
+                    <a:schemeClr val="bg1"/>
+                  </a:solidFill>
+                </a:rPr>
+                <a:t>Exporatory</a:t>
+              </a:r>
+              <a:r>
+                <a:rPr lang="en-US" sz="4000" b="1" dirty="0">
+                  <a:solidFill>
+                    <a:schemeClr val="bg1"/>
+                  </a:solidFill>
+                </a:rPr>
+                <a:t> Data Analysis (3)</a:t>
+              </a:r>
+              <a:endParaRPr lang="en-US" sz="4000" b="1" dirty="0">
+                <a:solidFill>
+                  <a:schemeClr val="bg1"/>
+                </a:solidFill>
+                <a:latin typeface="Arial"/>
+              </a:endParaRPr>
+            </a:p>
+          </p:txBody>
+        </p:sp>
+      </p:grpSp>
     </p:spTree>
     <p:extLst>
       <p:ext uri="{BB962C8B-B14F-4D97-AF65-F5344CB8AC3E}">
@@ -8122,82 +9201,6 @@
       </p:grpSpPr>
       <p:sp>
         <p:nvSpPr>
-          <p:cNvPr id="2" name="Title 1"/>
-          <p:cNvSpPr>
-            <a:spLocks noGrp="1"/>
-          </p:cNvSpPr>
-          <p:nvPr>
-            <p:ph type="title"/>
-          </p:nvPr>
-        </p:nvSpPr>
-        <p:spPr/>
-        <p:txBody>
-          <a:bodyPr>
-            <a:normAutofit/>
-          </a:bodyPr>
-          <a:lstStyle/>
-          <a:p>
-            <a:r>
-              <a:rPr sz="4000" b="1" dirty="0" err="1">
-                <a:solidFill>
-                  <a:srgbClr val="002060"/>
-                </a:solidFill>
-              </a:rPr>
-              <a:t>Arhitectura</a:t>
-            </a:r>
-            <a:r>
-              <a:rPr sz="4000" b="1" dirty="0">
-                <a:solidFill>
-                  <a:srgbClr val="002060"/>
-                </a:solidFill>
-              </a:rPr>
-              <a:t> </a:t>
-            </a:r>
-            <a:r>
-              <a:rPr sz="4000" b="1" dirty="0" err="1">
-                <a:solidFill>
-                  <a:srgbClr val="002060"/>
-                </a:solidFill>
-              </a:rPr>
-              <a:t>Datelor</a:t>
-            </a:r>
-            <a:r>
-              <a:rPr sz="4000" b="1" dirty="0">
-                <a:solidFill>
-                  <a:srgbClr val="002060"/>
-                </a:solidFill>
-              </a:rPr>
-              <a:t> </a:t>
-            </a:r>
-            <a:r>
-              <a:rPr lang="en-US" sz="4000" b="1" dirty="0" err="1">
-                <a:solidFill>
-                  <a:srgbClr val="002060"/>
-                </a:solidFill>
-              </a:rPr>
-              <a:t>s</a:t>
-            </a:r>
-            <a:r>
-              <a:rPr sz="4000" b="1" dirty="0" err="1">
-                <a:solidFill>
-                  <a:srgbClr val="002060"/>
-                </a:solidFill>
-              </a:rPr>
-              <a:t>i</a:t>
-            </a:r>
-            <a:r>
-              <a:rPr sz="4000" b="1" dirty="0">
-                <a:solidFill>
-                  <a:srgbClr val="002060"/>
-                </a:solidFill>
-              </a:rPr>
-              <a:t> Pipeline</a:t>
-            </a:r>
-          </a:p>
-        </p:txBody>
-      </p:sp>
-      <p:sp>
-        <p:nvSpPr>
           <p:cNvPr id="9" name="Rectangle 1">
             <a:extLst>
               <a:ext uri="{FF2B5EF4-FFF2-40B4-BE49-F238E27FC236}">
@@ -8212,7 +9215,7 @@
         </p:nvSpPr>
         <p:spPr bwMode="auto">
           <a:xfrm>
-            <a:off x="583563" y="1760561"/>
+            <a:off x="254000" y="1183503"/>
             <a:ext cx="8374170" cy="2644250"/>
           </a:xfrm>
           <a:prstGeom prst="rect">
@@ -8965,6 +9968,143 @@
           </a:p>
         </p:txBody>
       </p:sp>
+      <p:grpSp>
+        <p:nvGrpSpPr>
+          <p:cNvPr id="3" name="Group 2">
+            <a:extLst>
+              <a:ext uri="{FF2B5EF4-FFF2-40B4-BE49-F238E27FC236}">
+                <a16:creationId xmlns:a16="http://schemas.microsoft.com/office/drawing/2014/main" id="{BF49E917-A24D-6BE9-0392-48C14FC4DB72}"/>
+              </a:ext>
+            </a:extLst>
+          </p:cNvPr>
+          <p:cNvGrpSpPr/>
+          <p:nvPr/>
+        </p:nvGrpSpPr>
+        <p:grpSpPr>
+          <a:xfrm>
+            <a:off x="0" y="0"/>
+            <a:ext cx="9144000" cy="575733"/>
+            <a:chOff x="0" y="0"/>
+            <a:chExt cx="9144000" cy="658368"/>
+          </a:xfrm>
+        </p:grpSpPr>
+        <p:sp>
+          <p:nvSpPr>
+            <p:cNvPr id="4" name="Shape 0">
+              <a:extLst>
+                <a:ext uri="{FF2B5EF4-FFF2-40B4-BE49-F238E27FC236}">
+                  <a16:creationId xmlns:a16="http://schemas.microsoft.com/office/drawing/2014/main" id="{50416B38-D73C-E7C9-22D4-CB93F45E98AC}"/>
+                </a:ext>
+              </a:extLst>
+            </p:cNvPr>
+            <p:cNvSpPr/>
+            <p:nvPr/>
+          </p:nvSpPr>
+          <p:spPr>
+            <a:xfrm>
+              <a:off x="0" y="0"/>
+              <a:ext cx="9144000" cy="658368"/>
+            </a:xfrm>
+            <a:prstGeom prst="rect">
+              <a:avLst/>
+            </a:prstGeom>
+            <a:solidFill>
+              <a:srgbClr val="1E2761"/>
+            </a:solidFill>
+            <a:ln w="12700">
+              <a:solidFill>
+                <a:srgbClr val="1E2761"/>
+              </a:solidFill>
+              <a:prstDash val="solid"/>
+            </a:ln>
+          </p:spPr>
+          <p:txBody>
+            <a:bodyPr/>
+            <a:lstStyle/>
+            <a:p>
+              <a:endParaRPr lang="en-US"/>
+            </a:p>
+          </p:txBody>
+        </p:sp>
+        <p:sp>
+          <p:nvSpPr>
+            <p:cNvPr id="5" name="Title 1">
+              <a:extLst>
+                <a:ext uri="{FF2B5EF4-FFF2-40B4-BE49-F238E27FC236}">
+                  <a16:creationId xmlns:a16="http://schemas.microsoft.com/office/drawing/2014/main" id="{67F7EB02-7696-8821-5CD6-AB556B5AEEB5}"/>
+                </a:ext>
+              </a:extLst>
+            </p:cNvPr>
+            <p:cNvSpPr txBox="1">
+              <a:spLocks/>
+            </p:cNvSpPr>
+            <p:nvPr/>
+          </p:nvSpPr>
+          <p:spPr>
+            <a:xfrm>
+              <a:off x="254000" y="76200"/>
+              <a:ext cx="8796866" cy="491804"/>
+            </a:xfrm>
+            <a:prstGeom prst="rect">
+              <a:avLst/>
+            </a:prstGeom>
+          </p:spPr>
+          <p:txBody>
+            <a:bodyPr vert="horz" lIns="91440" tIns="45720" rIns="91440" bIns="45720" rtlCol="0" anchor="ctr">
+              <a:noAutofit/>
+            </a:bodyPr>
+            <a:lstStyle>
+              <a:lvl1pPr algn="ctr" defTabSz="457200" rtl="0" eaLnBrk="1" latinLnBrk="0" hangingPunct="1">
+                <a:spcBef>
+                  <a:spcPct val="0"/>
+                </a:spcBef>
+                <a:buNone/>
+                <a:defRPr sz="4400" kern="1200">
+                  <a:solidFill>
+                    <a:schemeClr val="tx1"/>
+                  </a:solidFill>
+                  <a:latin typeface="+mj-lt"/>
+                  <a:ea typeface="+mj-ea"/>
+                  <a:cs typeface="+mj-cs"/>
+                </a:defRPr>
+              </a:lvl1pPr>
+            </a:lstStyle>
+            <a:p>
+              <a:pPr algn="l"/>
+              <a:r>
+                <a:rPr lang="en-US" sz="4000" b="1" dirty="0" err="1">
+                  <a:solidFill>
+                    <a:schemeClr val="bg1"/>
+                  </a:solidFill>
+                </a:rPr>
+                <a:t>Arhitectura</a:t>
+              </a:r>
+              <a:r>
+                <a:rPr lang="en-US" sz="4000" b="1" dirty="0">
+                  <a:solidFill>
+                    <a:schemeClr val="bg1"/>
+                  </a:solidFill>
+                </a:rPr>
+                <a:t> </a:t>
+              </a:r>
+              <a:r>
+                <a:rPr lang="en-US" sz="4000" b="1" dirty="0" err="1">
+                  <a:solidFill>
+                    <a:schemeClr val="bg1"/>
+                  </a:solidFill>
+                </a:rPr>
+                <a:t>Datelor</a:t>
+              </a:r>
+              <a:endParaRPr lang="en-US" sz="4000" b="1" dirty="0">
+                <a:solidFill>
+                  <a:schemeClr val="bg1"/>
+                </a:solidFill>
+                <a:latin typeface="Arial"/>
+              </a:endParaRPr>
+            </a:p>
+          </p:txBody>
+        </p:sp>
+      </p:grpSp>
     </p:spTree>
   </p:cSld>
   <p:clrMapOvr>
@@ -8990,79 +10130,6 @@
           <a:chExt cx="0" cy="0"/>
         </a:xfrm>
       </p:grpSpPr>
-      <p:sp>
-        <p:nvSpPr>
-          <p:cNvPr id="2" name="Title 1"/>
-          <p:cNvSpPr>
-            <a:spLocks noGrp="1"/>
-          </p:cNvSpPr>
-          <p:nvPr>
-            <p:ph type="title"/>
-          </p:nvPr>
-        </p:nvSpPr>
-        <p:spPr/>
-        <p:txBody>
-          <a:bodyPr>
-            <a:normAutofit/>
-          </a:bodyPr>
-          <a:lstStyle/>
-          <a:p>
-            <a:r>
-              <a:rPr sz="4000" b="1" dirty="0">
-                <a:solidFill>
-                  <a:srgbClr val="002060"/>
-                </a:solidFill>
-              </a:rPr>
-              <a:t>Insights: </a:t>
-            </a:r>
-            <a:r>
-              <a:rPr sz="4000" b="1" dirty="0" err="1">
-                <a:solidFill>
-                  <a:srgbClr val="002060"/>
-                </a:solidFill>
-              </a:rPr>
-              <a:t>Factorii</a:t>
-            </a:r>
-            <a:r>
-              <a:rPr sz="4000" b="1" dirty="0">
-                <a:solidFill>
-                  <a:srgbClr val="002060"/>
-                </a:solidFill>
-              </a:rPr>
-              <a:t> </a:t>
-            </a:r>
-            <a:r>
-              <a:rPr sz="4000" b="1" dirty="0" err="1">
-                <a:solidFill>
-                  <a:srgbClr val="002060"/>
-                </a:solidFill>
-              </a:rPr>
-              <a:t>Determinan</a:t>
-            </a:r>
-            <a:r>
-              <a:rPr lang="en-US" sz="4000" b="1" dirty="0" err="1">
-                <a:solidFill>
-                  <a:srgbClr val="002060"/>
-                </a:solidFill>
-              </a:rPr>
-              <a:t>t</a:t>
-            </a:r>
-            <a:r>
-              <a:rPr sz="4000" b="1" dirty="0" err="1">
-                <a:solidFill>
-                  <a:srgbClr val="002060"/>
-                </a:solidFill>
-              </a:rPr>
-              <a:t>i</a:t>
-            </a:r>
-            <a:endParaRPr sz="4000" b="1" dirty="0">
-              <a:solidFill>
-                <a:srgbClr val="002060"/>
-              </a:solidFill>
-            </a:endParaRPr>
-          </a:p>
-        </p:txBody>
-      </p:sp>
       <p:pic>
         <p:nvPicPr>
           <p:cNvPr id="15" name="Content Placeholder 14">
@@ -9087,14 +10154,163 @@
         </p:blipFill>
         <p:spPr>
           <a:xfrm>
-            <a:off x="563880" y="1919866"/>
-            <a:ext cx="7287491" cy="3323416"/>
+            <a:off x="29024" y="1173797"/>
+            <a:ext cx="9021842" cy="4114357"/>
           </a:xfrm>
           <a:prstGeom prst="rect">
             <a:avLst/>
           </a:prstGeom>
         </p:spPr>
       </p:pic>
+      <p:grpSp>
+        <p:nvGrpSpPr>
+          <p:cNvPr id="3" name="Group 2">
+            <a:extLst>
+              <a:ext uri="{FF2B5EF4-FFF2-40B4-BE49-F238E27FC236}">
+                <a16:creationId xmlns:a16="http://schemas.microsoft.com/office/drawing/2014/main" id="{C592A90C-6DB9-D4F8-96D7-E7597E97EE76}"/>
+              </a:ext>
+            </a:extLst>
+          </p:cNvPr>
+          <p:cNvGrpSpPr/>
+          <p:nvPr/>
+        </p:nvGrpSpPr>
+        <p:grpSpPr>
+          <a:xfrm>
+            <a:off x="0" y="1"/>
+            <a:ext cx="9144000" cy="642804"/>
+            <a:chOff x="0" y="0"/>
+            <a:chExt cx="9144000" cy="658368"/>
+          </a:xfrm>
+        </p:grpSpPr>
+        <p:sp>
+          <p:nvSpPr>
+            <p:cNvPr id="4" name="Shape 0">
+              <a:extLst>
+                <a:ext uri="{FF2B5EF4-FFF2-40B4-BE49-F238E27FC236}">
+                  <a16:creationId xmlns:a16="http://schemas.microsoft.com/office/drawing/2014/main" id="{2A4B3178-D0DD-00F0-E762-847F80A10C19}"/>
+                </a:ext>
+              </a:extLst>
+            </p:cNvPr>
+            <p:cNvSpPr/>
+            <p:nvPr/>
+          </p:nvSpPr>
+          <p:spPr>
+            <a:xfrm>
+              <a:off x="0" y="0"/>
+              <a:ext cx="9144000" cy="658368"/>
+            </a:xfrm>
+            <a:prstGeom prst="rect">
+              <a:avLst/>
+            </a:prstGeom>
+            <a:solidFill>
+              <a:srgbClr val="1E2761"/>
+            </a:solidFill>
+            <a:ln w="12700">
+              <a:solidFill>
+                <a:srgbClr val="1E2761"/>
+              </a:solidFill>
+              <a:prstDash val="solid"/>
+            </a:ln>
+          </p:spPr>
+          <p:txBody>
+            <a:bodyPr/>
+            <a:lstStyle/>
+            <a:p>
+              <a:endParaRPr lang="en-US">
+                <a:solidFill>
+                  <a:schemeClr val="bg1"/>
+                </a:solidFill>
+              </a:endParaRPr>
+            </a:p>
+          </p:txBody>
+        </p:sp>
+        <p:sp>
+          <p:nvSpPr>
+            <p:cNvPr id="5" name="Title 1">
+              <a:extLst>
+                <a:ext uri="{FF2B5EF4-FFF2-40B4-BE49-F238E27FC236}">
+                  <a16:creationId xmlns:a16="http://schemas.microsoft.com/office/drawing/2014/main" id="{063544C3-32CE-80D3-F14A-79E422ED5C7F}"/>
+                </a:ext>
+              </a:extLst>
+            </p:cNvPr>
+            <p:cNvSpPr txBox="1">
+              <a:spLocks/>
+            </p:cNvSpPr>
+            <p:nvPr/>
+          </p:nvSpPr>
+          <p:spPr>
+            <a:xfrm>
+              <a:off x="254000" y="76200"/>
+              <a:ext cx="8796866" cy="491804"/>
+            </a:xfrm>
+            <a:prstGeom prst="rect">
+              <a:avLst/>
+            </a:prstGeom>
+          </p:spPr>
+          <p:txBody>
+            <a:bodyPr vert="horz" lIns="91440" tIns="45720" rIns="91440" bIns="45720" rtlCol="0" anchor="ctr">
+              <a:noAutofit/>
+            </a:bodyPr>
+            <a:lstStyle>
+              <a:lvl1pPr algn="ctr" defTabSz="457200" rtl="0" eaLnBrk="1" latinLnBrk="0" hangingPunct="1">
+                <a:spcBef>
+                  <a:spcPct val="0"/>
+                </a:spcBef>
+                <a:buNone/>
+                <a:defRPr sz="4400" kern="1200">
+                  <a:solidFill>
+                    <a:schemeClr val="tx1"/>
+                  </a:solidFill>
+                  <a:latin typeface="+mj-lt"/>
+                  <a:ea typeface="+mj-ea"/>
+                  <a:cs typeface="+mj-cs"/>
+                </a:defRPr>
+              </a:lvl1pPr>
+            </a:lstStyle>
+            <a:p>
+              <a:pPr algn="l"/>
+              <a:r>
+                <a:rPr lang="en-US" sz="4000" b="1" dirty="0">
+                  <a:solidFill>
+                    <a:schemeClr val="bg1"/>
+                  </a:solidFill>
+                </a:rPr>
+                <a:t>Insights: </a:t>
+              </a:r>
+              <a:r>
+                <a:rPr lang="en-US" sz="4000" b="1" dirty="0" err="1">
+                  <a:solidFill>
+                    <a:schemeClr val="bg1"/>
+                  </a:solidFill>
+                </a:rPr>
+                <a:t>Factorii</a:t>
+              </a:r>
+              <a:r>
+                <a:rPr lang="en-US" sz="4000" b="1" dirty="0">
+                  <a:solidFill>
+                    <a:schemeClr val="bg1"/>
+                  </a:solidFill>
+                </a:rPr>
+                <a:t> </a:t>
+              </a:r>
+              <a:r>
+                <a:rPr lang="en-US" sz="4000" b="1" dirty="0" err="1">
+                  <a:solidFill>
+                    <a:schemeClr val="bg1"/>
+                  </a:solidFill>
+                </a:rPr>
+                <a:t>Determinanti</a:t>
+              </a:r>
+              <a:endParaRPr lang="en-US" sz="4000" b="1" dirty="0">
+                <a:solidFill>
+                  <a:schemeClr val="bg1"/>
+                </a:solidFill>
+                <a:latin typeface="Arial"/>
+              </a:endParaRPr>
+            </a:p>
+          </p:txBody>
+        </p:sp>
+      </p:grpSp>
     </p:spTree>
   </p:cSld>
   <p:clrMapOvr>
